--- a/resultados finais/mostra-cientifica-2026/Mostra-Cientifica-2026-Apresentacao-AAF-H-pylori.pptx
+++ b/resultados finais/mostra-cientifica-2026/Mostra-Cientifica-2026-Apresentacao-AAF-H-pylori.pptx
@@ -1,28 +1,27 @@
 
 <file path=ppt/presentation.xml><?xml version="1.0" encoding="utf-8"?>
-<p:presentation xmlns:a="http://schemas.openxmlformats.org/drawingml/2006/main" xmlns:r="http://schemas.openxmlformats.org/officeDocument/2006/relationships" xmlns:mc="http://schemas.openxmlformats.org/markup-compatibility/2006" xmlns:mv="urn:schemas-microsoft-com:mac:vml" xmlns:p="http://schemas.openxmlformats.org/presentationml/2006/main" xmlns:c="http://schemas.openxmlformats.org/drawingml/2006/chart" xmlns:dgm="http://schemas.openxmlformats.org/drawingml/2006/diagram" xmlns:o="urn:schemas-microsoft-com:office:office" xmlns:v="urn:schemas-microsoft-com:vml" xmlns:pvml="urn:schemas-microsoft-com:office:powerpoint" xmlns:com="http://schemas.openxmlformats.org/drawingml/2006/compatibility" xmlns:p14="http://schemas.microsoft.com/office/powerpoint/2010/main" xmlns:p15="http://schemas.microsoft.com/office/powerpoint/2012/main" xmlns:ahyp="http://schemas.microsoft.com/office/drawing/2018/hyperlinkcolor" autoCompressPictures="0" strictFirstAndLastChars="0" saveSubsetFonts="1">
+<p:presentation xmlns:a="http://schemas.openxmlformats.org/drawingml/2006/main" xmlns:r="http://schemas.openxmlformats.org/officeDocument/2006/relationships" xmlns:p="http://schemas.openxmlformats.org/presentationml/2006/main" strictFirstAndLastChars="0" saveSubsetFonts="1" autoCompressPictures="0">
   <p:sldMasterIdLst>
-    <p:sldMasterId id="2147483659" r:id="rId4"/>
+    <p:sldMasterId id="2147483659" r:id="rId1"/>
   </p:sldMasterIdLst>
   <p:notesMasterIdLst>
-    <p:notesMasterId r:id="rId5"/>
+    <p:notesMasterId r:id="rId11"/>
   </p:notesMasterIdLst>
   <p:sldIdLst>
-    <p:sldId id="300" r:id="rIdS900"/>
-    <p:sldId id="301" r:id="rIdS901"/>
-    <p:sldId id="302" r:id="rIdS902"/>
-    <p:sldId id="303" r:id="rIdS903"/>
-    <p:sldId id="304" r:id="rIdS904"/>
-    <p:sldId id="305" r:id="rIdS905"/>
-    <p:sldId id="306" r:id="rIdS906"/>
-    <p:sldId id="307" r:id="rIdS907"/>
-    <p:sldId id="308" r:id="rIdS908"/>
-    <p:sldId id="309" r:id="rIdS909"/>
+    <p:sldId id="300" r:id="rId2"/>
+    <p:sldId id="301" r:id="rId3"/>
+    <p:sldId id="302" r:id="rId4"/>
+    <p:sldId id="303" r:id="rId5"/>
+    <p:sldId id="305" r:id="rId6"/>
+    <p:sldId id="306" r:id="rId7"/>
+    <p:sldId id="307" r:id="rId8"/>
+    <p:sldId id="308" r:id="rId9"/>
+    <p:sldId id="309" r:id="rId10"/>
   </p:sldIdLst>
-  <p:sldSz cy="5143500" cx="9144000"/>
+  <p:sldSz cx="9144000" cy="5143500" type="screen16x9"/>
   <p:notesSz cx="6858000" cy="9144000"/>
   <p:defaultTextStyle>
-    <a:defPPr lvl="0" marR="0" rtl="0" algn="l">
+    <a:defPPr marR="0" lvl="0" algn="l" rtl="0">
       <a:lnSpc>
         <a:spcPct val="100000"/>
       </a:lnSpc>
@@ -33,7 +32,7 @@
         <a:spcPts val="0"/>
       </a:spcAft>
     </a:defPPr>
-    <a:lvl1pPr lvl="0" marR="0" rtl="0" algn="l">
+    <a:lvl1pPr marR="0" lvl="0" algn="l" rtl="0">
       <a:lnSpc>
         <a:spcPct val="100000"/>
       </a:lnSpc>
@@ -47,7 +46,7 @@
         <a:srgbClr val="000000"/>
       </a:buClr>
       <a:buFont typeface="Arial"/>
-      <a:defRPr b="0" i="0" spc="0" sz="1400" u="none" cap="none" strike="noStrike">
+      <a:defRPr sz="1400" b="0" i="0" u="none" strike="noStrike" cap="none" spc="0">
         <a:solidFill>
           <a:srgbClr val="000000"/>
         </a:solidFill>
@@ -57,7 +56,7 @@
         <a:sym typeface="Arial"/>
       </a:defRPr>
     </a:lvl1pPr>
-    <a:lvl2pPr lvl="1" marR="0" rtl="0" algn="l">
+    <a:lvl2pPr marR="0" lvl="1" algn="l" rtl="0">
       <a:lnSpc>
         <a:spcPct val="100000"/>
       </a:lnSpc>
@@ -71,7 +70,7 @@
         <a:srgbClr val="000000"/>
       </a:buClr>
       <a:buFont typeface="Arial"/>
-      <a:defRPr b="0" i="0" spc="0" sz="1400" u="none" cap="none" strike="noStrike">
+      <a:defRPr sz="1400" b="0" i="0" u="none" strike="noStrike" cap="none" spc="0">
         <a:solidFill>
           <a:srgbClr val="000000"/>
         </a:solidFill>
@@ -81,7 +80,7 @@
         <a:sym typeface="Arial"/>
       </a:defRPr>
     </a:lvl2pPr>
-    <a:lvl3pPr lvl="2" marR="0" rtl="0" algn="l">
+    <a:lvl3pPr marR="0" lvl="2" algn="l" rtl="0">
       <a:lnSpc>
         <a:spcPct val="100000"/>
       </a:lnSpc>
@@ -95,7 +94,7 @@
         <a:srgbClr val="000000"/>
       </a:buClr>
       <a:buFont typeface="Arial"/>
-      <a:defRPr b="0" i="0" spc="0" sz="1400" u="none" cap="none" strike="noStrike">
+      <a:defRPr sz="1400" b="0" i="0" u="none" strike="noStrike" cap="none" spc="0">
         <a:solidFill>
           <a:srgbClr val="000000"/>
         </a:solidFill>
@@ -105,7 +104,7 @@
         <a:sym typeface="Arial"/>
       </a:defRPr>
     </a:lvl3pPr>
-    <a:lvl4pPr lvl="3" marR="0" rtl="0" algn="l">
+    <a:lvl4pPr marR="0" lvl="3" algn="l" rtl="0">
       <a:lnSpc>
         <a:spcPct val="100000"/>
       </a:lnSpc>
@@ -119,7 +118,7 @@
         <a:srgbClr val="000000"/>
       </a:buClr>
       <a:buFont typeface="Arial"/>
-      <a:defRPr b="0" i="0" spc="0" sz="1400" u="none" cap="none" strike="noStrike">
+      <a:defRPr sz="1400" b="0" i="0" u="none" strike="noStrike" cap="none" spc="0">
         <a:solidFill>
           <a:srgbClr val="000000"/>
         </a:solidFill>
@@ -129,7 +128,7 @@
         <a:sym typeface="Arial"/>
       </a:defRPr>
     </a:lvl4pPr>
-    <a:lvl5pPr lvl="4" marR="0" rtl="0" algn="l">
+    <a:lvl5pPr marR="0" lvl="4" algn="l" rtl="0">
       <a:lnSpc>
         <a:spcPct val="100000"/>
       </a:lnSpc>
@@ -143,7 +142,7 @@
         <a:srgbClr val="000000"/>
       </a:buClr>
       <a:buFont typeface="Arial"/>
-      <a:defRPr b="0" i="0" spc="0" sz="1400" u="none" cap="none" strike="noStrike">
+      <a:defRPr sz="1400" b="0" i="0" u="none" strike="noStrike" cap="none" spc="0">
         <a:solidFill>
           <a:srgbClr val="000000"/>
         </a:solidFill>
@@ -153,7 +152,7 @@
         <a:sym typeface="Arial"/>
       </a:defRPr>
     </a:lvl5pPr>
-    <a:lvl6pPr lvl="5" marR="0" rtl="0" algn="l">
+    <a:lvl6pPr marR="0" lvl="5" algn="l" rtl="0">
       <a:lnSpc>
         <a:spcPct val="100000"/>
       </a:lnSpc>
@@ -167,7 +166,7 @@
         <a:srgbClr val="000000"/>
       </a:buClr>
       <a:buFont typeface="Arial"/>
-      <a:defRPr b="0" i="0" spc="0" sz="1400" u="none" cap="none" strike="noStrike">
+      <a:defRPr sz="1400" b="0" i="0" u="none" strike="noStrike" cap="none" spc="0">
         <a:solidFill>
           <a:srgbClr val="000000"/>
         </a:solidFill>
@@ -177,7 +176,7 @@
         <a:sym typeface="Arial"/>
       </a:defRPr>
     </a:lvl6pPr>
-    <a:lvl7pPr lvl="6" marR="0" rtl="0" algn="l">
+    <a:lvl7pPr marR="0" lvl="6" algn="l" rtl="0">
       <a:lnSpc>
         <a:spcPct val="100000"/>
       </a:lnSpc>
@@ -191,7 +190,7 @@
         <a:srgbClr val="000000"/>
       </a:buClr>
       <a:buFont typeface="Arial"/>
-      <a:defRPr b="0" i="0" spc="0" sz="1400" u="none" cap="none" strike="noStrike">
+      <a:defRPr sz="1400" b="0" i="0" u="none" strike="noStrike" cap="none" spc="0">
         <a:solidFill>
           <a:srgbClr val="000000"/>
         </a:solidFill>
@@ -201,7 +200,7 @@
         <a:sym typeface="Arial"/>
       </a:defRPr>
     </a:lvl7pPr>
-    <a:lvl8pPr lvl="7" marR="0" rtl="0" algn="l">
+    <a:lvl8pPr marR="0" lvl="7" algn="l" rtl="0">
       <a:lnSpc>
         <a:spcPct val="100000"/>
       </a:lnSpc>
@@ -215,7 +214,7 @@
         <a:srgbClr val="000000"/>
       </a:buClr>
       <a:buFont typeface="Arial"/>
-      <a:defRPr b="0" i="0" spc="0" sz="1400" u="none" cap="none" strike="noStrike">
+      <a:defRPr sz="1400" b="0" i="0" u="none" strike="noStrike" cap="none" spc="0">
         <a:solidFill>
           <a:srgbClr val="000000"/>
         </a:solidFill>
@@ -225,7 +224,7 @@
         <a:sym typeface="Arial"/>
       </a:defRPr>
     </a:lvl8pPr>
-    <a:lvl9pPr lvl="8" marR="0" rtl="0" algn="l">
+    <a:lvl9pPr marR="0" lvl="8" algn="l" rtl="0">
       <a:lnSpc>
         <a:spcPct val="100000"/>
       </a:lnSpc>
@@ -239,7 +238,7 @@
         <a:srgbClr val="000000"/>
       </a:buClr>
       <a:buFont typeface="Arial"/>
-      <a:defRPr b="0" i="0" spc="0" sz="1400" u="none" cap="none" strike="noStrike">
+      <a:defRPr sz="1400" b="0" i="0" u="none" strike="noStrike" cap="none" spc="0">
         <a:solidFill>
           <a:srgbClr val="000000"/>
         </a:solidFill>
@@ -252,7 +251,7 @@
   </p:defaultTextStyle>
   <p:extLst>
     <p:ext uri="{EFAFB233-063F-42B5-8137-9DF3F51BA10A}">
-      <p15:sldGuideLst>
+      <p15:sldGuideLst xmlns:p15="http://schemas.microsoft.com/office/powerpoint/2012/main">
         <p15:guide id="1" orient="horz" pos="1620">
           <p15:clr>
             <a:srgbClr val="747775"/>
@@ -270,11 +269,16 @@
 </file>
 
 <file path=ppt/notesMasters/notesMaster1.xml><?xml version="1.0" encoding="utf-8"?>
-<p:notesMaster xmlns:a="http://schemas.openxmlformats.org/drawingml/2006/main" xmlns:r="http://schemas.openxmlformats.org/officeDocument/2006/relationships" xmlns:mc="http://schemas.openxmlformats.org/markup-compatibility/2006" xmlns:mv="urn:schemas-microsoft-com:mac:vml" xmlns:p="http://schemas.openxmlformats.org/presentationml/2006/main" xmlns:c="http://schemas.openxmlformats.org/drawingml/2006/chart" xmlns:dgm="http://schemas.openxmlformats.org/drawingml/2006/diagram" xmlns:o="urn:schemas-microsoft-com:office:office" xmlns:v="urn:schemas-microsoft-com:vml" xmlns:pvml="urn:schemas-microsoft-com:office:powerpoint" xmlns:com="http://schemas.openxmlformats.org/drawingml/2006/compatibility" xmlns:p14="http://schemas.microsoft.com/office/powerpoint/2010/main" xmlns:p15="http://schemas.microsoft.com/office/powerpoint/2012/main" xmlns:ahyp="http://schemas.microsoft.com/office/drawing/2018/hyperlinkcolor">
+<p:notesMaster xmlns:a="http://schemas.openxmlformats.org/drawingml/2006/main" xmlns:r="http://schemas.openxmlformats.org/officeDocument/2006/relationships" xmlns:p="http://schemas.openxmlformats.org/presentationml/2006/main">
   <p:cSld>
+    <p:bg>
+      <p:bgRef idx="1001">
+        <a:schemeClr val="bg1"/>
+      </p:bgRef>
+    </p:bg>
     <p:spTree>
       <p:nvGrpSpPr>
-        <p:cNvPr id="2" name="Shape 2"/>
+        <p:cNvPr id="1" name="Shape 2"/>
         <p:cNvGrpSpPr/>
         <p:nvPr/>
       </p:nvGrpSpPr>
@@ -289,9 +293,11 @@
       <p:sp>
         <p:nvSpPr>
           <p:cNvPr id="3" name="Google Shape;3;n"/>
-          <p:cNvSpPr/>
+          <p:cNvSpPr>
+            <a:spLocks noGrp="1" noRot="1" noChangeAspect="1"/>
+          </p:cNvSpPr>
           <p:nvPr>
-            <p:ph idx="2" type="sldImg"/>
+            <p:ph type="sldImg" idx="2"/>
           </p:nvPr>
         </p:nvSpPr>
         <p:spPr>
@@ -300,9 +306,13 @@
             <a:ext cx="6096075" cy="3429000"/>
           </a:xfrm>
           <a:custGeom>
-            <a:rect b="b" l="l" r="r" t="t"/>
+            <a:avLst/>
+            <a:gdLst/>
+            <a:ahLst/>
+            <a:cxnLst/>
+            <a:rect l="l" t="t" r="r" b="b"/>
             <a:pathLst>
-              <a:path extrusionOk="0" h="120000" w="120000">
+              <a:path w="120000" h="120000" extrusionOk="0">
                 <a:moveTo>
                   <a:pt x="0" y="0"/>
                 </a:moveTo>
@@ -320,23 +330,25 @@
             </a:pathLst>
           </a:custGeom>
           <a:noFill/>
-          <a:ln cap="flat" cmpd="sng" w="9525">
+          <a:ln w="9525" cap="flat" cmpd="sng">
             <a:solidFill>
               <a:srgbClr val="000000"/>
             </a:solidFill>
             <a:prstDash val="solid"/>
             <a:round/>
-            <a:headEnd len="sm" w="sm" type="none"/>
-            <a:tailEnd len="sm" w="sm" type="none"/>
+            <a:headEnd type="none" w="sm" len="sm"/>
+            <a:tailEnd type="none" w="sm" len="sm"/>
           </a:ln>
         </p:spPr>
       </p:sp>
       <p:sp>
         <p:nvSpPr>
           <p:cNvPr id="4" name="Google Shape;4;n"/>
-          <p:cNvSpPr txBox="1"/>
+          <p:cNvSpPr txBox="1">
+            <a:spLocks noGrp="1"/>
+          </p:cNvSpPr>
           <p:nvPr>
-            <p:ph idx="1" type="body"/>
+            <p:ph type="body" idx="1"/>
           </p:nvPr>
         </p:nvSpPr>
         <p:spPr>
@@ -353,11 +365,11 @@
           </a:ln>
         </p:spPr>
         <p:txBody>
-          <a:bodyPr anchorCtr="0" anchor="t" bIns="91425" lIns="91425" spcFirstLastPara="1" rIns="91425" wrap="square" tIns="91425">
+          <a:bodyPr spcFirstLastPara="1" wrap="square" lIns="91425" tIns="91425" rIns="91425" bIns="91425" anchor="t" anchorCtr="0">
             <a:noAutofit/>
           </a:bodyPr>
           <a:lstStyle>
-            <a:lvl1pPr indent="-298450" lvl="0" marL="457200">
+            <a:lvl1pPr marL="457200" lvl="0" indent="-298450">
               <a:spcBef>
                 <a:spcPts val="0"/>
               </a:spcBef>
@@ -368,7 +380,7 @@
               <a:buChar char="●"/>
               <a:defRPr sz="1100"/>
             </a:lvl1pPr>
-            <a:lvl2pPr indent="-298450" lvl="1" marL="914400">
+            <a:lvl2pPr marL="914400" lvl="1" indent="-298450">
               <a:spcBef>
                 <a:spcPts val="0"/>
               </a:spcBef>
@@ -379,7 +391,7 @@
               <a:buChar char="○"/>
               <a:defRPr sz="1100"/>
             </a:lvl2pPr>
-            <a:lvl3pPr indent="-298450" lvl="2" marL="1371600">
+            <a:lvl3pPr marL="1371600" lvl="2" indent="-298450">
               <a:spcBef>
                 <a:spcPts val="0"/>
               </a:spcBef>
@@ -390,7 +402,7 @@
               <a:buChar char="■"/>
               <a:defRPr sz="1100"/>
             </a:lvl3pPr>
-            <a:lvl4pPr indent="-298450" lvl="3" marL="1828800">
+            <a:lvl4pPr marL="1828800" lvl="3" indent="-298450">
               <a:spcBef>
                 <a:spcPts val="0"/>
               </a:spcBef>
@@ -401,7 +413,7 @@
               <a:buChar char="●"/>
               <a:defRPr sz="1100"/>
             </a:lvl4pPr>
-            <a:lvl5pPr indent="-298450" lvl="4" marL="2286000">
+            <a:lvl5pPr marL="2286000" lvl="4" indent="-298450">
               <a:spcBef>
                 <a:spcPts val="0"/>
               </a:spcBef>
@@ -412,7 +424,7 @@
               <a:buChar char="○"/>
               <a:defRPr sz="1100"/>
             </a:lvl5pPr>
-            <a:lvl6pPr indent="-298450" lvl="5" marL="2743200">
+            <a:lvl6pPr marL="2743200" lvl="5" indent="-298450">
               <a:spcBef>
                 <a:spcPts val="0"/>
               </a:spcBef>
@@ -423,7 +435,7 @@
               <a:buChar char="■"/>
               <a:defRPr sz="1100"/>
             </a:lvl6pPr>
-            <a:lvl7pPr indent="-298450" lvl="6" marL="3200400">
+            <a:lvl7pPr marL="3200400" lvl="6" indent="-298450">
               <a:spcBef>
                 <a:spcPts val="0"/>
               </a:spcBef>
@@ -434,7 +446,7 @@
               <a:buChar char="●"/>
               <a:defRPr sz="1100"/>
             </a:lvl7pPr>
-            <a:lvl8pPr indent="-298450" lvl="7" marL="3657600">
+            <a:lvl8pPr marL="3657600" lvl="7" indent="-298450">
               <a:spcBef>
                 <a:spcPts val="0"/>
               </a:spcBef>
@@ -445,7 +457,7 @@
               <a:buChar char="○"/>
               <a:defRPr sz="1100"/>
             </a:lvl8pPr>
-            <a:lvl9pPr indent="-298450" lvl="8" marL="4114800">
+            <a:lvl9pPr marL="4114800" lvl="8" indent="-298450">
               <a:spcBef>
                 <a:spcPts val="0"/>
               </a:spcBef>
@@ -457,14 +469,16 @@
               <a:defRPr sz="1100"/>
             </a:lvl9pPr>
           </a:lstStyle>
-          <a:p/>
+          <a:p>
+            <a:endParaRPr/>
+          </a:p>
         </p:txBody>
       </p:sp>
     </p:spTree>
   </p:cSld>
-  <p:clrMap accent1="accent1" accent2="accent2" accent3="accent3" accent4="accent4" accent5="accent5" accent6="accent6" bg1="lt1" bg2="dk2" tx1="dk1" tx2="lt2" folHlink="folHlink" hlink="hlink"/>
+  <p:clrMap bg1="lt1" tx1="dk1" bg2="dk2" tx2="lt2" accent1="accent1" accent2="accent2" accent3="accent3" accent4="accent4" accent5="accent5" accent6="accent6" hlink="hlink" folHlink="folHlink"/>
   <p:notesStyle>
-    <a:defPPr lvl="0" marR="0" rtl="0" algn="l">
+    <a:defPPr marR="0" lvl="0" algn="l" rtl="0">
       <a:lnSpc>
         <a:spcPct val="100000"/>
       </a:lnSpc>
@@ -475,7 +489,7 @@
         <a:spcPts val="0"/>
       </a:spcAft>
     </a:defPPr>
-    <a:lvl1pPr lvl="0" marR="0" rtl="0" algn="l">
+    <a:lvl1pPr marR="0" lvl="0" algn="l" rtl="0">
       <a:lnSpc>
         <a:spcPct val="100000"/>
       </a:lnSpc>
@@ -489,7 +503,7 @@
         <a:srgbClr val="000000"/>
       </a:buClr>
       <a:buFont typeface="Arial"/>
-      <a:defRPr b="0" i="0" spc="0" sz="1400" u="none" cap="none" strike="noStrike">
+      <a:defRPr sz="1400" b="0" i="0" u="none" strike="noStrike" cap="none" spc="0">
         <a:solidFill>
           <a:srgbClr val="000000"/>
         </a:solidFill>
@@ -499,7 +513,7 @@
         <a:sym typeface="Arial"/>
       </a:defRPr>
     </a:lvl1pPr>
-    <a:lvl2pPr lvl="1" marR="0" rtl="0" algn="l">
+    <a:lvl2pPr marR="0" lvl="1" algn="l" rtl="0">
       <a:lnSpc>
         <a:spcPct val="100000"/>
       </a:lnSpc>
@@ -513,7 +527,7 @@
         <a:srgbClr val="000000"/>
       </a:buClr>
       <a:buFont typeface="Arial"/>
-      <a:defRPr b="0" i="0" spc="0" sz="1400" u="none" cap="none" strike="noStrike">
+      <a:defRPr sz="1400" b="0" i="0" u="none" strike="noStrike" cap="none" spc="0">
         <a:solidFill>
           <a:srgbClr val="000000"/>
         </a:solidFill>
@@ -523,7 +537,7 @@
         <a:sym typeface="Arial"/>
       </a:defRPr>
     </a:lvl2pPr>
-    <a:lvl3pPr lvl="2" marR="0" rtl="0" algn="l">
+    <a:lvl3pPr marR="0" lvl="2" algn="l" rtl="0">
       <a:lnSpc>
         <a:spcPct val="100000"/>
       </a:lnSpc>
@@ -537,7 +551,7 @@
         <a:srgbClr val="000000"/>
       </a:buClr>
       <a:buFont typeface="Arial"/>
-      <a:defRPr b="0" i="0" spc="0" sz="1400" u="none" cap="none" strike="noStrike">
+      <a:defRPr sz="1400" b="0" i="0" u="none" strike="noStrike" cap="none" spc="0">
         <a:solidFill>
           <a:srgbClr val="000000"/>
         </a:solidFill>
@@ -547,7 +561,7 @@
         <a:sym typeface="Arial"/>
       </a:defRPr>
     </a:lvl3pPr>
-    <a:lvl4pPr lvl="3" marR="0" rtl="0" algn="l">
+    <a:lvl4pPr marR="0" lvl="3" algn="l" rtl="0">
       <a:lnSpc>
         <a:spcPct val="100000"/>
       </a:lnSpc>
@@ -561,7 +575,7 @@
         <a:srgbClr val="000000"/>
       </a:buClr>
       <a:buFont typeface="Arial"/>
-      <a:defRPr b="0" i="0" spc="0" sz="1400" u="none" cap="none" strike="noStrike">
+      <a:defRPr sz="1400" b="0" i="0" u="none" strike="noStrike" cap="none" spc="0">
         <a:solidFill>
           <a:srgbClr val="000000"/>
         </a:solidFill>
@@ -571,7 +585,7 @@
         <a:sym typeface="Arial"/>
       </a:defRPr>
     </a:lvl4pPr>
-    <a:lvl5pPr lvl="4" marR="0" rtl="0" algn="l">
+    <a:lvl5pPr marR="0" lvl="4" algn="l" rtl="0">
       <a:lnSpc>
         <a:spcPct val="100000"/>
       </a:lnSpc>
@@ -585,7 +599,7 @@
         <a:srgbClr val="000000"/>
       </a:buClr>
       <a:buFont typeface="Arial"/>
-      <a:defRPr b="0" i="0" spc="0" sz="1400" u="none" cap="none" strike="noStrike">
+      <a:defRPr sz="1400" b="0" i="0" u="none" strike="noStrike" cap="none" spc="0">
         <a:solidFill>
           <a:srgbClr val="000000"/>
         </a:solidFill>
@@ -595,7 +609,7 @@
         <a:sym typeface="Arial"/>
       </a:defRPr>
     </a:lvl5pPr>
-    <a:lvl6pPr lvl="5" marR="0" rtl="0" algn="l">
+    <a:lvl6pPr marR="0" lvl="5" algn="l" rtl="0">
       <a:lnSpc>
         <a:spcPct val="100000"/>
       </a:lnSpc>
@@ -609,7 +623,7 @@
         <a:srgbClr val="000000"/>
       </a:buClr>
       <a:buFont typeface="Arial"/>
-      <a:defRPr b="0" i="0" spc="0" sz="1400" u="none" cap="none" strike="noStrike">
+      <a:defRPr sz="1400" b="0" i="0" u="none" strike="noStrike" cap="none" spc="0">
         <a:solidFill>
           <a:srgbClr val="000000"/>
         </a:solidFill>
@@ -619,7 +633,7 @@
         <a:sym typeface="Arial"/>
       </a:defRPr>
     </a:lvl6pPr>
-    <a:lvl7pPr lvl="6" marR="0" rtl="0" algn="l">
+    <a:lvl7pPr marR="0" lvl="6" algn="l" rtl="0">
       <a:lnSpc>
         <a:spcPct val="100000"/>
       </a:lnSpc>
@@ -633,7 +647,7 @@
         <a:srgbClr val="000000"/>
       </a:buClr>
       <a:buFont typeface="Arial"/>
-      <a:defRPr b="0" i="0" spc="0" sz="1400" u="none" cap="none" strike="noStrike">
+      <a:defRPr sz="1400" b="0" i="0" u="none" strike="noStrike" cap="none" spc="0">
         <a:solidFill>
           <a:srgbClr val="000000"/>
         </a:solidFill>
@@ -643,7 +657,7 @@
         <a:sym typeface="Arial"/>
       </a:defRPr>
     </a:lvl7pPr>
-    <a:lvl8pPr lvl="7" marR="0" rtl="0" algn="l">
+    <a:lvl8pPr marR="0" lvl="7" algn="l" rtl="0">
       <a:lnSpc>
         <a:spcPct val="100000"/>
       </a:lnSpc>
@@ -657,7 +671,7 @@
         <a:srgbClr val="000000"/>
       </a:buClr>
       <a:buFont typeface="Arial"/>
-      <a:defRPr b="0" i="0" spc="0" sz="1400" u="none" cap="none" strike="noStrike">
+      <a:defRPr sz="1400" b="0" i="0" u="none" strike="noStrike" cap="none" spc="0">
         <a:solidFill>
           <a:srgbClr val="000000"/>
         </a:solidFill>
@@ -667,7 +681,7 @@
         <a:sym typeface="Arial"/>
       </a:defRPr>
     </a:lvl8pPr>
-    <a:lvl9pPr lvl="8" marR="0" rtl="0" algn="l">
+    <a:lvl9pPr marR="0" lvl="8" algn="l" rtl="0">
       <a:lnSpc>
         <a:spcPct val="100000"/>
       </a:lnSpc>
@@ -681,7 +695,7 @@
         <a:srgbClr val="000000"/>
       </a:buClr>
       <a:buFont typeface="Arial"/>
-      <a:defRPr b="0" i="0" spc="0" sz="1400" u="none" cap="none" strike="noStrike">
+      <a:defRPr sz="1400" b="0" i="0" u="none" strike="noStrike" cap="none" spc="0">
         <a:solidFill>
           <a:srgbClr val="000000"/>
         </a:solidFill>
@@ -696,11 +710,11 @@
 </file>
 
 <file path=ppt/slideLayouts/slideLayout1.xml><?xml version="1.0" encoding="utf-8"?>
-<p:sldLayout xmlns:a="http://schemas.openxmlformats.org/drawingml/2006/main" xmlns:r="http://schemas.openxmlformats.org/officeDocument/2006/relationships" xmlns:mc="http://schemas.openxmlformats.org/markup-compatibility/2006" xmlns:mv="urn:schemas-microsoft-com:mac:vml" xmlns:p="http://schemas.openxmlformats.org/presentationml/2006/main" xmlns:c="http://schemas.openxmlformats.org/drawingml/2006/chart" xmlns:dgm="http://schemas.openxmlformats.org/drawingml/2006/diagram" xmlns:o="urn:schemas-microsoft-com:office:office" xmlns:v="urn:schemas-microsoft-com:vml" xmlns:pvml="urn:schemas-microsoft-com:office:powerpoint" xmlns:com="http://schemas.openxmlformats.org/drawingml/2006/compatibility" xmlns:p14="http://schemas.microsoft.com/office/powerpoint/2010/main" xmlns:p15="http://schemas.microsoft.com/office/powerpoint/2012/main" xmlns:ahyp="http://schemas.microsoft.com/office/drawing/2018/hyperlinkcolor" matchingName="Title slide" type="title">
+<p:sldLayout xmlns:a="http://schemas.openxmlformats.org/drawingml/2006/main" xmlns:r="http://schemas.openxmlformats.org/officeDocument/2006/relationships" xmlns:p="http://schemas.openxmlformats.org/presentationml/2006/main" matchingName="Title slide" type="title">
   <p:cSld name="TITLE">
     <p:spTree>
       <p:nvGrpSpPr>
-        <p:cNvPr id="9" name="Shape 9"/>
+        <p:cNvPr id="1" name="Shape 9"/>
         <p:cNvGrpSpPr/>
         <p:nvPr/>
       </p:nvGrpSpPr>
@@ -715,7 +729,9 @@
       <p:sp>
         <p:nvSpPr>
           <p:cNvPr id="10" name="Google Shape;10;p2"/>
-          <p:cNvSpPr txBox="1"/>
+          <p:cNvSpPr txBox="1">
+            <a:spLocks noGrp="1"/>
+          </p:cNvSpPr>
           <p:nvPr>
             <p:ph type="ctrTitle"/>
           </p:nvPr>
@@ -730,7 +746,7 @@
           </a:prstGeom>
         </p:spPr>
         <p:txBody>
-          <a:bodyPr anchorCtr="0" anchor="b" bIns="91425" lIns="91425" spcFirstLastPara="1" rIns="91425" wrap="square" tIns="91425">
+          <a:bodyPr spcFirstLastPara="1" wrap="square" lIns="91425" tIns="91425" rIns="91425" bIns="91425" anchor="b" anchorCtr="0">
             <a:normAutofit/>
           </a:bodyPr>
           <a:lstStyle>
@@ -834,15 +850,19 @@
               <a:defRPr sz="5200"/>
             </a:lvl9pPr>
           </a:lstStyle>
-          <a:p/>
+          <a:p>
+            <a:endParaRPr/>
+          </a:p>
         </p:txBody>
       </p:sp>
       <p:sp>
         <p:nvSpPr>
           <p:cNvPr id="11" name="Google Shape;11;p2"/>
-          <p:cNvSpPr txBox="1"/>
+          <p:cNvSpPr txBox="1">
+            <a:spLocks noGrp="1"/>
+          </p:cNvSpPr>
           <p:nvPr>
-            <p:ph idx="1" type="subTitle"/>
+            <p:ph type="subTitle" idx="1"/>
           </p:nvPr>
         </p:nvSpPr>
         <p:spPr>
@@ -855,7 +875,7 @@
           </a:prstGeom>
         </p:spPr>
         <p:txBody>
-          <a:bodyPr anchorCtr="0" anchor="t" bIns="91425" lIns="91425" spcFirstLastPara="1" rIns="91425" wrap="square" tIns="91425">
+          <a:bodyPr spcFirstLastPara="1" wrap="square" lIns="91425" tIns="91425" rIns="91425" bIns="91425" anchor="t" anchorCtr="0">
             <a:normAutofit/>
           </a:bodyPr>
           <a:lstStyle>
@@ -986,15 +1006,19 @@
               <a:defRPr sz="2800"/>
             </a:lvl9pPr>
           </a:lstStyle>
-          <a:p/>
+          <a:p>
+            <a:endParaRPr/>
+          </a:p>
         </p:txBody>
       </p:sp>
       <p:sp>
         <p:nvSpPr>
           <p:cNvPr id="12" name="Google Shape;12;p2"/>
-          <p:cNvSpPr txBox="1"/>
+          <p:cNvSpPr txBox="1">
+            <a:spLocks noGrp="1"/>
+          </p:cNvSpPr>
           <p:nvPr>
-            <p:ph idx="12" type="sldNum"/>
+            <p:ph type="sldNum" idx="12"/>
           </p:nvPr>
         </p:nvSpPr>
         <p:spPr>
@@ -1007,7 +1031,7 @@
           </a:prstGeom>
         </p:spPr>
         <p:txBody>
-          <a:bodyPr anchorCtr="0" anchor="ctr" bIns="91425" lIns="91425" spcFirstLastPara="1" rIns="91425" wrap="square" tIns="91425">
+          <a:bodyPr spcFirstLastPara="1" wrap="square" lIns="91425" tIns="91425" rIns="91425" bIns="91425" anchor="ctr" anchorCtr="0">
             <a:normAutofit/>
           </a:bodyPr>
           <a:lstStyle>
@@ -1049,7 +1073,7 @@
             </a:lvl9pPr>
           </a:lstStyle>
           <a:p>
-            <a:pPr indent="0" lvl="0" marL="0" rtl="0" algn="r">
+            <a:pPr marL="0" lvl="0" indent="0" algn="r" rtl="0">
               <a:spcBef>
                 <a:spcPts val="0"/>
               </a:spcBef>
@@ -1060,7 +1084,7 @@
             </a:pPr>
             <a:fld id="{00000000-1234-1234-1234-123412341234}" type="slidenum">
               <a:rPr lang="pt-BR"/>
-              <a:t>‹#›</a:t>
+              <a:t>‹nº›</a:t>
             </a:fld>
             <a:endParaRPr/>
           </a:p>
@@ -1075,11 +1099,11 @@
 </file>
 
 <file path=ppt/slideLayouts/slideLayout10.xml><?xml version="1.0" encoding="utf-8"?>
-<p:sldLayout xmlns:a="http://schemas.openxmlformats.org/drawingml/2006/main" xmlns:r="http://schemas.openxmlformats.org/officeDocument/2006/relationships" xmlns:mc="http://schemas.openxmlformats.org/markup-compatibility/2006" xmlns:mv="urn:schemas-microsoft-com:mac:vml" xmlns:p="http://schemas.openxmlformats.org/presentationml/2006/main" xmlns:c="http://schemas.openxmlformats.org/drawingml/2006/chart" xmlns:dgm="http://schemas.openxmlformats.org/drawingml/2006/diagram" xmlns:o="urn:schemas-microsoft-com:office:office" xmlns:v="urn:schemas-microsoft-com:vml" xmlns:pvml="urn:schemas-microsoft-com:office:powerpoint" xmlns:com="http://schemas.openxmlformats.org/drawingml/2006/compatibility" xmlns:p14="http://schemas.microsoft.com/office/powerpoint/2010/main" xmlns:p15="http://schemas.microsoft.com/office/powerpoint/2012/main" xmlns:ahyp="http://schemas.microsoft.com/office/drawing/2018/hyperlinkcolor" matchingName="Big number">
+<p:sldLayout xmlns:a="http://schemas.openxmlformats.org/drawingml/2006/main" xmlns:r="http://schemas.openxmlformats.org/officeDocument/2006/relationships" xmlns:p="http://schemas.openxmlformats.org/presentationml/2006/main" matchingName="Big number">
   <p:cSld name="BIG_NUMBER">
     <p:spTree>
       <p:nvGrpSpPr>
-        <p:cNvPr id="44" name="Shape 44"/>
+        <p:cNvPr id="1" name="Shape 44"/>
         <p:cNvGrpSpPr/>
         <p:nvPr/>
       </p:nvGrpSpPr>
@@ -1094,9 +1118,11 @@
       <p:sp>
         <p:nvSpPr>
           <p:cNvPr id="45" name="Google Shape;45;p11"/>
-          <p:cNvSpPr txBox="1"/>
+          <p:cNvSpPr txBox="1">
+            <a:spLocks noGrp="1"/>
+          </p:cNvSpPr>
           <p:nvPr>
-            <p:ph hasCustomPrompt="1" type="title"/>
+            <p:ph type="title" hasCustomPrompt="1"/>
           </p:nvPr>
         </p:nvSpPr>
         <p:spPr>
@@ -1109,7 +1135,7 @@
           </a:prstGeom>
         </p:spPr>
         <p:txBody>
-          <a:bodyPr anchorCtr="0" anchor="b" bIns="91425" lIns="91425" spcFirstLastPara="1" rIns="91425" wrap="square" tIns="91425">
+          <a:bodyPr spcFirstLastPara="1" wrap="square" lIns="91425" tIns="91425" rIns="91425" bIns="91425" anchor="b" anchorCtr="0">
             <a:normAutofit/>
           </a:bodyPr>
           <a:lstStyle>
@@ -1223,9 +1249,11 @@
       <p:sp>
         <p:nvSpPr>
           <p:cNvPr id="46" name="Google Shape;46;p11"/>
-          <p:cNvSpPr txBox="1"/>
+          <p:cNvSpPr txBox="1">
+            <a:spLocks noGrp="1"/>
+          </p:cNvSpPr>
           <p:nvPr>
-            <p:ph idx="1" type="body"/>
+            <p:ph type="body" idx="1"/>
           </p:nvPr>
         </p:nvSpPr>
         <p:spPr>
@@ -1238,11 +1266,11 @@
           </a:prstGeom>
         </p:spPr>
         <p:txBody>
-          <a:bodyPr anchorCtr="0" anchor="t" bIns="91425" lIns="91425" spcFirstLastPara="1" rIns="91425" wrap="square" tIns="91425">
+          <a:bodyPr spcFirstLastPara="1" wrap="square" lIns="91425" tIns="91425" rIns="91425" bIns="91425" anchor="t" anchorCtr="0">
             <a:normAutofit/>
           </a:bodyPr>
           <a:lstStyle>
-            <a:lvl1pPr indent="-342900" lvl="0" marL="457200" algn="ctr">
+            <a:lvl1pPr marL="457200" lvl="0" indent="-342900" algn="ctr">
               <a:spcBef>
                 <a:spcPts val="0"/>
               </a:spcBef>
@@ -1253,7 +1281,7 @@
               <a:buChar char="●"/>
               <a:defRPr/>
             </a:lvl1pPr>
-            <a:lvl2pPr indent="-317500" lvl="1" marL="914400" algn="ctr">
+            <a:lvl2pPr marL="914400" lvl="1" indent="-317500" algn="ctr">
               <a:spcBef>
                 <a:spcPts val="0"/>
               </a:spcBef>
@@ -1264,7 +1292,7 @@
               <a:buChar char="○"/>
               <a:defRPr/>
             </a:lvl2pPr>
-            <a:lvl3pPr indent="-317500" lvl="2" marL="1371600" algn="ctr">
+            <a:lvl3pPr marL="1371600" lvl="2" indent="-317500" algn="ctr">
               <a:spcBef>
                 <a:spcPts val="0"/>
               </a:spcBef>
@@ -1275,7 +1303,7 @@
               <a:buChar char="■"/>
               <a:defRPr/>
             </a:lvl3pPr>
-            <a:lvl4pPr indent="-317500" lvl="3" marL="1828800" algn="ctr">
+            <a:lvl4pPr marL="1828800" lvl="3" indent="-317500" algn="ctr">
               <a:spcBef>
                 <a:spcPts val="0"/>
               </a:spcBef>
@@ -1286,7 +1314,7 @@
               <a:buChar char="●"/>
               <a:defRPr/>
             </a:lvl4pPr>
-            <a:lvl5pPr indent="-317500" lvl="4" marL="2286000" algn="ctr">
+            <a:lvl5pPr marL="2286000" lvl="4" indent="-317500" algn="ctr">
               <a:spcBef>
                 <a:spcPts val="0"/>
               </a:spcBef>
@@ -1297,7 +1325,7 @@
               <a:buChar char="○"/>
               <a:defRPr/>
             </a:lvl5pPr>
-            <a:lvl6pPr indent="-317500" lvl="5" marL="2743200" algn="ctr">
+            <a:lvl6pPr marL="2743200" lvl="5" indent="-317500" algn="ctr">
               <a:spcBef>
                 <a:spcPts val="0"/>
               </a:spcBef>
@@ -1308,7 +1336,7 @@
               <a:buChar char="■"/>
               <a:defRPr/>
             </a:lvl6pPr>
-            <a:lvl7pPr indent="-317500" lvl="6" marL="3200400" algn="ctr">
+            <a:lvl7pPr marL="3200400" lvl="6" indent="-317500" algn="ctr">
               <a:spcBef>
                 <a:spcPts val="0"/>
               </a:spcBef>
@@ -1319,7 +1347,7 @@
               <a:buChar char="●"/>
               <a:defRPr/>
             </a:lvl7pPr>
-            <a:lvl8pPr indent="-317500" lvl="7" marL="3657600" algn="ctr">
+            <a:lvl8pPr marL="3657600" lvl="7" indent="-317500" algn="ctr">
               <a:spcBef>
                 <a:spcPts val="0"/>
               </a:spcBef>
@@ -1330,7 +1358,7 @@
               <a:buChar char="○"/>
               <a:defRPr/>
             </a:lvl8pPr>
-            <a:lvl9pPr indent="-317500" lvl="8" marL="4114800" algn="ctr">
+            <a:lvl9pPr marL="4114800" lvl="8" indent="-317500" algn="ctr">
               <a:spcBef>
                 <a:spcPts val="0"/>
               </a:spcBef>
@@ -1342,15 +1370,19 @@
               <a:defRPr/>
             </a:lvl9pPr>
           </a:lstStyle>
-          <a:p/>
+          <a:p>
+            <a:endParaRPr/>
+          </a:p>
         </p:txBody>
       </p:sp>
       <p:sp>
         <p:nvSpPr>
           <p:cNvPr id="47" name="Google Shape;47;p11"/>
-          <p:cNvSpPr txBox="1"/>
+          <p:cNvSpPr txBox="1">
+            <a:spLocks noGrp="1"/>
+          </p:cNvSpPr>
           <p:nvPr>
-            <p:ph idx="12" type="sldNum"/>
+            <p:ph type="sldNum" idx="12"/>
           </p:nvPr>
         </p:nvSpPr>
         <p:spPr>
@@ -1363,7 +1395,7 @@
           </a:prstGeom>
         </p:spPr>
         <p:txBody>
-          <a:bodyPr anchorCtr="0" anchor="ctr" bIns="91425" lIns="91425" spcFirstLastPara="1" rIns="91425" wrap="square" tIns="91425">
+          <a:bodyPr spcFirstLastPara="1" wrap="square" lIns="91425" tIns="91425" rIns="91425" bIns="91425" anchor="ctr" anchorCtr="0">
             <a:normAutofit/>
           </a:bodyPr>
           <a:lstStyle>
@@ -1405,7 +1437,7 @@
             </a:lvl9pPr>
           </a:lstStyle>
           <a:p>
-            <a:pPr indent="0" lvl="0" marL="0" rtl="0" algn="r">
+            <a:pPr marL="0" lvl="0" indent="0" algn="r" rtl="0">
               <a:spcBef>
                 <a:spcPts val="0"/>
               </a:spcBef>
@@ -1416,7 +1448,7 @@
             </a:pPr>
             <a:fld id="{00000000-1234-1234-1234-123412341234}" type="slidenum">
               <a:rPr lang="pt-BR"/>
-              <a:t>‹#›</a:t>
+              <a:t>‹nº›</a:t>
             </a:fld>
             <a:endParaRPr/>
           </a:p>
@@ -1431,11 +1463,11 @@
 </file>
 
 <file path=ppt/slideLayouts/slideLayout11.xml><?xml version="1.0" encoding="utf-8"?>
-<p:sldLayout xmlns:a="http://schemas.openxmlformats.org/drawingml/2006/main" xmlns:r="http://schemas.openxmlformats.org/officeDocument/2006/relationships" xmlns:mc="http://schemas.openxmlformats.org/markup-compatibility/2006" xmlns:mv="urn:schemas-microsoft-com:mac:vml" xmlns:p="http://schemas.openxmlformats.org/presentationml/2006/main" xmlns:c="http://schemas.openxmlformats.org/drawingml/2006/chart" xmlns:dgm="http://schemas.openxmlformats.org/drawingml/2006/diagram" xmlns:o="urn:schemas-microsoft-com:office:office" xmlns:v="urn:schemas-microsoft-com:vml" xmlns:pvml="urn:schemas-microsoft-com:office:powerpoint" xmlns:com="http://schemas.openxmlformats.org/drawingml/2006/compatibility" xmlns:p14="http://schemas.microsoft.com/office/powerpoint/2010/main" xmlns:p15="http://schemas.microsoft.com/office/powerpoint/2012/main" xmlns:ahyp="http://schemas.microsoft.com/office/drawing/2018/hyperlinkcolor" matchingName="Blank" type="blank">
+<p:sldLayout xmlns:a="http://schemas.openxmlformats.org/drawingml/2006/main" xmlns:r="http://schemas.openxmlformats.org/officeDocument/2006/relationships" xmlns:p="http://schemas.openxmlformats.org/presentationml/2006/main" matchingName="Blank" type="blank">
   <p:cSld name="BLANK">
     <p:spTree>
       <p:nvGrpSpPr>
-        <p:cNvPr id="48" name="Shape 48"/>
+        <p:cNvPr id="1" name="Shape 48"/>
         <p:cNvGrpSpPr/>
         <p:nvPr/>
       </p:nvGrpSpPr>
@@ -1450,9 +1482,11 @@
       <p:sp>
         <p:nvSpPr>
           <p:cNvPr id="49" name="Google Shape;49;p12"/>
-          <p:cNvSpPr txBox="1"/>
+          <p:cNvSpPr txBox="1">
+            <a:spLocks noGrp="1"/>
+          </p:cNvSpPr>
           <p:nvPr>
-            <p:ph idx="12" type="sldNum"/>
+            <p:ph type="sldNum" idx="12"/>
           </p:nvPr>
         </p:nvSpPr>
         <p:spPr>
@@ -1465,7 +1499,7 @@
           </a:prstGeom>
         </p:spPr>
         <p:txBody>
-          <a:bodyPr anchorCtr="0" anchor="ctr" bIns="91425" lIns="91425" spcFirstLastPara="1" rIns="91425" wrap="square" tIns="91425">
+          <a:bodyPr spcFirstLastPara="1" wrap="square" lIns="91425" tIns="91425" rIns="91425" bIns="91425" anchor="ctr" anchorCtr="0">
             <a:normAutofit/>
           </a:bodyPr>
           <a:lstStyle>
@@ -1507,7 +1541,7 @@
             </a:lvl9pPr>
           </a:lstStyle>
           <a:p>
-            <a:pPr indent="0" lvl="0" marL="0" rtl="0" algn="r">
+            <a:pPr marL="0" lvl="0" indent="0" algn="r" rtl="0">
               <a:spcBef>
                 <a:spcPts val="0"/>
               </a:spcBef>
@@ -1518,7 +1552,7 @@
             </a:pPr>
             <a:fld id="{00000000-1234-1234-1234-123412341234}" type="slidenum">
               <a:rPr lang="pt-BR"/>
-              <a:t>‹#›</a:t>
+              <a:t>‹nº›</a:t>
             </a:fld>
             <a:endParaRPr/>
           </a:p>
@@ -1533,11 +1567,11 @@
 </file>
 
 <file path=ppt/slideLayouts/slideLayout2.xml><?xml version="1.0" encoding="utf-8"?>
-<p:sldLayout xmlns:a="http://schemas.openxmlformats.org/drawingml/2006/main" xmlns:r="http://schemas.openxmlformats.org/officeDocument/2006/relationships" xmlns:mc="http://schemas.openxmlformats.org/markup-compatibility/2006" xmlns:mv="urn:schemas-microsoft-com:mac:vml" xmlns:p="http://schemas.openxmlformats.org/presentationml/2006/main" xmlns:c="http://schemas.openxmlformats.org/drawingml/2006/chart" xmlns:dgm="http://schemas.openxmlformats.org/drawingml/2006/diagram" xmlns:o="urn:schemas-microsoft-com:office:office" xmlns:v="urn:schemas-microsoft-com:vml" xmlns:pvml="urn:schemas-microsoft-com:office:powerpoint" xmlns:com="http://schemas.openxmlformats.org/drawingml/2006/compatibility" xmlns:p14="http://schemas.microsoft.com/office/powerpoint/2010/main" xmlns:p15="http://schemas.microsoft.com/office/powerpoint/2012/main" xmlns:ahyp="http://schemas.microsoft.com/office/drawing/2018/hyperlinkcolor" matchingName="Section header" type="secHead">
+<p:sldLayout xmlns:a="http://schemas.openxmlformats.org/drawingml/2006/main" xmlns:r="http://schemas.openxmlformats.org/officeDocument/2006/relationships" xmlns:p="http://schemas.openxmlformats.org/presentationml/2006/main" matchingName="Section header" type="secHead">
   <p:cSld name="SECTION_HEADER">
     <p:spTree>
       <p:nvGrpSpPr>
-        <p:cNvPr id="13" name="Shape 13"/>
+        <p:cNvPr id="1" name="Shape 13"/>
         <p:cNvGrpSpPr/>
         <p:nvPr/>
       </p:nvGrpSpPr>
@@ -1552,7 +1586,9 @@
       <p:sp>
         <p:nvSpPr>
           <p:cNvPr id="14" name="Google Shape;14;p3"/>
-          <p:cNvSpPr txBox="1"/>
+          <p:cNvSpPr txBox="1">
+            <a:spLocks noGrp="1"/>
+          </p:cNvSpPr>
           <p:nvPr>
             <p:ph type="title"/>
           </p:nvPr>
@@ -1567,7 +1603,7 @@
           </a:prstGeom>
         </p:spPr>
         <p:txBody>
-          <a:bodyPr anchorCtr="0" anchor="ctr" bIns="91425" lIns="91425" spcFirstLastPara="1" rIns="91425" wrap="square" tIns="91425">
+          <a:bodyPr spcFirstLastPara="1" wrap="square" lIns="91425" tIns="91425" rIns="91425" bIns="91425" anchor="ctr" anchorCtr="0">
             <a:normAutofit/>
           </a:bodyPr>
           <a:lstStyle>
@@ -1671,15 +1707,19 @@
               <a:defRPr sz="3600"/>
             </a:lvl9pPr>
           </a:lstStyle>
-          <a:p/>
+          <a:p>
+            <a:endParaRPr/>
+          </a:p>
         </p:txBody>
       </p:sp>
       <p:sp>
         <p:nvSpPr>
           <p:cNvPr id="15" name="Google Shape;15;p3"/>
-          <p:cNvSpPr txBox="1"/>
+          <p:cNvSpPr txBox="1">
+            <a:spLocks noGrp="1"/>
+          </p:cNvSpPr>
           <p:nvPr>
-            <p:ph idx="12" type="sldNum"/>
+            <p:ph type="sldNum" idx="12"/>
           </p:nvPr>
         </p:nvSpPr>
         <p:spPr>
@@ -1692,7 +1732,7 @@
           </a:prstGeom>
         </p:spPr>
         <p:txBody>
-          <a:bodyPr anchorCtr="0" anchor="ctr" bIns="91425" lIns="91425" spcFirstLastPara="1" rIns="91425" wrap="square" tIns="91425">
+          <a:bodyPr spcFirstLastPara="1" wrap="square" lIns="91425" tIns="91425" rIns="91425" bIns="91425" anchor="ctr" anchorCtr="0">
             <a:normAutofit/>
           </a:bodyPr>
           <a:lstStyle>
@@ -1734,7 +1774,7 @@
             </a:lvl9pPr>
           </a:lstStyle>
           <a:p>
-            <a:pPr indent="0" lvl="0" marL="0" rtl="0" algn="r">
+            <a:pPr marL="0" lvl="0" indent="0" algn="r" rtl="0">
               <a:spcBef>
                 <a:spcPts val="0"/>
               </a:spcBef>
@@ -1745,7 +1785,7 @@
             </a:pPr>
             <a:fld id="{00000000-1234-1234-1234-123412341234}" type="slidenum">
               <a:rPr lang="pt-BR"/>
-              <a:t>‹#›</a:t>
+              <a:t>‹nº›</a:t>
             </a:fld>
             <a:endParaRPr/>
           </a:p>
@@ -1760,11 +1800,11 @@
 </file>
 
 <file path=ppt/slideLayouts/slideLayout3.xml><?xml version="1.0" encoding="utf-8"?>
-<p:sldLayout xmlns:a="http://schemas.openxmlformats.org/drawingml/2006/main" xmlns:r="http://schemas.openxmlformats.org/officeDocument/2006/relationships" xmlns:mc="http://schemas.openxmlformats.org/markup-compatibility/2006" xmlns:mv="urn:schemas-microsoft-com:mac:vml" xmlns:p="http://schemas.openxmlformats.org/presentationml/2006/main" xmlns:c="http://schemas.openxmlformats.org/drawingml/2006/chart" xmlns:dgm="http://schemas.openxmlformats.org/drawingml/2006/diagram" xmlns:o="urn:schemas-microsoft-com:office:office" xmlns:v="urn:schemas-microsoft-com:vml" xmlns:pvml="urn:schemas-microsoft-com:office:powerpoint" xmlns:com="http://schemas.openxmlformats.org/drawingml/2006/compatibility" xmlns:p14="http://schemas.microsoft.com/office/powerpoint/2010/main" xmlns:p15="http://schemas.microsoft.com/office/powerpoint/2012/main" xmlns:ahyp="http://schemas.microsoft.com/office/drawing/2018/hyperlinkcolor" matchingName="Title and body" type="tx">
+<p:sldLayout xmlns:a="http://schemas.openxmlformats.org/drawingml/2006/main" xmlns:r="http://schemas.openxmlformats.org/officeDocument/2006/relationships" xmlns:p="http://schemas.openxmlformats.org/presentationml/2006/main" matchingName="Title and body" type="tx">
   <p:cSld name="TITLE_AND_BODY">
     <p:spTree>
       <p:nvGrpSpPr>
-        <p:cNvPr id="16" name="Shape 16"/>
+        <p:cNvPr id="1" name="Shape 16"/>
         <p:cNvGrpSpPr/>
         <p:nvPr/>
       </p:nvGrpSpPr>
@@ -1779,7 +1819,9 @@
       <p:sp>
         <p:nvSpPr>
           <p:cNvPr id="17" name="Google Shape;17;p4"/>
-          <p:cNvSpPr txBox="1"/>
+          <p:cNvSpPr txBox="1">
+            <a:spLocks noGrp="1"/>
+          </p:cNvSpPr>
           <p:nvPr>
             <p:ph type="title"/>
           </p:nvPr>
@@ -1794,7 +1836,7 @@
           </a:prstGeom>
         </p:spPr>
         <p:txBody>
-          <a:bodyPr anchorCtr="0" anchor="t" bIns="91425" lIns="91425" spcFirstLastPara="1" rIns="91425" wrap="square" tIns="91425">
+          <a:bodyPr spcFirstLastPara="1" wrap="square" lIns="91425" tIns="91425" rIns="91425" bIns="91425" anchor="t" anchorCtr="0">
             <a:normAutofit/>
           </a:bodyPr>
           <a:lstStyle>
@@ -1898,15 +1940,19 @@
               <a:defRPr/>
             </a:lvl9pPr>
           </a:lstStyle>
-          <a:p/>
+          <a:p>
+            <a:endParaRPr/>
+          </a:p>
         </p:txBody>
       </p:sp>
       <p:sp>
         <p:nvSpPr>
           <p:cNvPr id="18" name="Google Shape;18;p4"/>
-          <p:cNvSpPr txBox="1"/>
+          <p:cNvSpPr txBox="1">
+            <a:spLocks noGrp="1"/>
+          </p:cNvSpPr>
           <p:nvPr>
-            <p:ph idx="1" type="body"/>
+            <p:ph type="body" idx="1"/>
           </p:nvPr>
         </p:nvSpPr>
         <p:spPr>
@@ -1919,11 +1965,11 @@
           </a:prstGeom>
         </p:spPr>
         <p:txBody>
-          <a:bodyPr anchorCtr="0" anchor="t" bIns="91425" lIns="91425" spcFirstLastPara="1" rIns="91425" wrap="square" tIns="91425">
+          <a:bodyPr spcFirstLastPara="1" wrap="square" lIns="91425" tIns="91425" rIns="91425" bIns="91425" anchor="t" anchorCtr="0">
             <a:normAutofit/>
           </a:bodyPr>
           <a:lstStyle>
-            <a:lvl1pPr indent="-342900" lvl="0" marL="457200">
+            <a:lvl1pPr marL="457200" lvl="0" indent="-342900">
               <a:spcBef>
                 <a:spcPts val="0"/>
               </a:spcBef>
@@ -1934,7 +1980,7 @@
               <a:buChar char="●"/>
               <a:defRPr/>
             </a:lvl1pPr>
-            <a:lvl2pPr indent="-317500" lvl="1" marL="914400">
+            <a:lvl2pPr marL="914400" lvl="1" indent="-317500">
               <a:spcBef>
                 <a:spcPts val="0"/>
               </a:spcBef>
@@ -1945,7 +1991,7 @@
               <a:buChar char="○"/>
               <a:defRPr/>
             </a:lvl2pPr>
-            <a:lvl3pPr indent="-317500" lvl="2" marL="1371600">
+            <a:lvl3pPr marL="1371600" lvl="2" indent="-317500">
               <a:spcBef>
                 <a:spcPts val="0"/>
               </a:spcBef>
@@ -1956,7 +2002,7 @@
               <a:buChar char="■"/>
               <a:defRPr/>
             </a:lvl3pPr>
-            <a:lvl4pPr indent="-317500" lvl="3" marL="1828800">
+            <a:lvl4pPr marL="1828800" lvl="3" indent="-317500">
               <a:spcBef>
                 <a:spcPts val="0"/>
               </a:spcBef>
@@ -1967,7 +2013,7 @@
               <a:buChar char="●"/>
               <a:defRPr/>
             </a:lvl4pPr>
-            <a:lvl5pPr indent="-317500" lvl="4" marL="2286000">
+            <a:lvl5pPr marL="2286000" lvl="4" indent="-317500">
               <a:spcBef>
                 <a:spcPts val="0"/>
               </a:spcBef>
@@ -1978,7 +2024,7 @@
               <a:buChar char="○"/>
               <a:defRPr/>
             </a:lvl5pPr>
-            <a:lvl6pPr indent="-317500" lvl="5" marL="2743200">
+            <a:lvl6pPr marL="2743200" lvl="5" indent="-317500">
               <a:spcBef>
                 <a:spcPts val="0"/>
               </a:spcBef>
@@ -1989,7 +2035,7 @@
               <a:buChar char="■"/>
               <a:defRPr/>
             </a:lvl6pPr>
-            <a:lvl7pPr indent="-317500" lvl="6" marL="3200400">
+            <a:lvl7pPr marL="3200400" lvl="6" indent="-317500">
               <a:spcBef>
                 <a:spcPts val="0"/>
               </a:spcBef>
@@ -2000,7 +2046,7 @@
               <a:buChar char="●"/>
               <a:defRPr/>
             </a:lvl7pPr>
-            <a:lvl8pPr indent="-317500" lvl="7" marL="3657600">
+            <a:lvl8pPr marL="3657600" lvl="7" indent="-317500">
               <a:spcBef>
                 <a:spcPts val="0"/>
               </a:spcBef>
@@ -2011,7 +2057,7 @@
               <a:buChar char="○"/>
               <a:defRPr/>
             </a:lvl8pPr>
-            <a:lvl9pPr indent="-317500" lvl="8" marL="4114800">
+            <a:lvl9pPr marL="4114800" lvl="8" indent="-317500">
               <a:spcBef>
                 <a:spcPts val="0"/>
               </a:spcBef>
@@ -2023,15 +2069,19 @@
               <a:defRPr/>
             </a:lvl9pPr>
           </a:lstStyle>
-          <a:p/>
+          <a:p>
+            <a:endParaRPr/>
+          </a:p>
         </p:txBody>
       </p:sp>
       <p:sp>
         <p:nvSpPr>
           <p:cNvPr id="19" name="Google Shape;19;p4"/>
-          <p:cNvSpPr txBox="1"/>
+          <p:cNvSpPr txBox="1">
+            <a:spLocks noGrp="1"/>
+          </p:cNvSpPr>
           <p:nvPr>
-            <p:ph idx="12" type="sldNum"/>
+            <p:ph type="sldNum" idx="12"/>
           </p:nvPr>
         </p:nvSpPr>
         <p:spPr>
@@ -2044,7 +2094,7 @@
           </a:prstGeom>
         </p:spPr>
         <p:txBody>
-          <a:bodyPr anchorCtr="0" anchor="ctr" bIns="91425" lIns="91425" spcFirstLastPara="1" rIns="91425" wrap="square" tIns="91425">
+          <a:bodyPr spcFirstLastPara="1" wrap="square" lIns="91425" tIns="91425" rIns="91425" bIns="91425" anchor="ctr" anchorCtr="0">
             <a:normAutofit/>
           </a:bodyPr>
           <a:lstStyle>
@@ -2086,7 +2136,7 @@
             </a:lvl9pPr>
           </a:lstStyle>
           <a:p>
-            <a:pPr indent="0" lvl="0" marL="0" rtl="0" algn="r">
+            <a:pPr marL="0" lvl="0" indent="0" algn="r" rtl="0">
               <a:spcBef>
                 <a:spcPts val="0"/>
               </a:spcBef>
@@ -2097,7 +2147,7 @@
             </a:pPr>
             <a:fld id="{00000000-1234-1234-1234-123412341234}" type="slidenum">
               <a:rPr lang="pt-BR"/>
-              <a:t>‹#›</a:t>
+              <a:t>‹nº›</a:t>
             </a:fld>
             <a:endParaRPr/>
           </a:p>
@@ -2112,11 +2162,11 @@
 </file>
 
 <file path=ppt/slideLayouts/slideLayout4.xml><?xml version="1.0" encoding="utf-8"?>
-<p:sldLayout xmlns:a="http://schemas.openxmlformats.org/drawingml/2006/main" xmlns:r="http://schemas.openxmlformats.org/officeDocument/2006/relationships" xmlns:mc="http://schemas.openxmlformats.org/markup-compatibility/2006" xmlns:mv="urn:schemas-microsoft-com:mac:vml" xmlns:p="http://schemas.openxmlformats.org/presentationml/2006/main" xmlns:c="http://schemas.openxmlformats.org/drawingml/2006/chart" xmlns:dgm="http://schemas.openxmlformats.org/drawingml/2006/diagram" xmlns:o="urn:schemas-microsoft-com:office:office" xmlns:v="urn:schemas-microsoft-com:vml" xmlns:pvml="urn:schemas-microsoft-com:office:powerpoint" xmlns:com="http://schemas.openxmlformats.org/drawingml/2006/compatibility" xmlns:p14="http://schemas.microsoft.com/office/powerpoint/2010/main" xmlns:p15="http://schemas.microsoft.com/office/powerpoint/2012/main" xmlns:ahyp="http://schemas.microsoft.com/office/drawing/2018/hyperlinkcolor" matchingName="Title and two columns" type="twoColTx">
+<p:sldLayout xmlns:a="http://schemas.openxmlformats.org/drawingml/2006/main" xmlns:r="http://schemas.openxmlformats.org/officeDocument/2006/relationships" xmlns:p="http://schemas.openxmlformats.org/presentationml/2006/main" matchingName="Title and two columns" type="twoColTx">
   <p:cSld name="TITLE_AND_TWO_COLUMNS">
     <p:spTree>
       <p:nvGrpSpPr>
-        <p:cNvPr id="20" name="Shape 20"/>
+        <p:cNvPr id="1" name="Shape 20"/>
         <p:cNvGrpSpPr/>
         <p:nvPr/>
       </p:nvGrpSpPr>
@@ -2131,7 +2181,9 @@
       <p:sp>
         <p:nvSpPr>
           <p:cNvPr id="21" name="Google Shape;21;p5"/>
-          <p:cNvSpPr txBox="1"/>
+          <p:cNvSpPr txBox="1">
+            <a:spLocks noGrp="1"/>
+          </p:cNvSpPr>
           <p:nvPr>
             <p:ph type="title"/>
           </p:nvPr>
@@ -2146,7 +2198,7 @@
           </a:prstGeom>
         </p:spPr>
         <p:txBody>
-          <a:bodyPr anchorCtr="0" anchor="t" bIns="91425" lIns="91425" spcFirstLastPara="1" rIns="91425" wrap="square" tIns="91425">
+          <a:bodyPr spcFirstLastPara="1" wrap="square" lIns="91425" tIns="91425" rIns="91425" bIns="91425" anchor="t" anchorCtr="0">
             <a:normAutofit/>
           </a:bodyPr>
           <a:lstStyle>
@@ -2250,15 +2302,19 @@
               <a:defRPr/>
             </a:lvl9pPr>
           </a:lstStyle>
-          <a:p/>
+          <a:p>
+            <a:endParaRPr/>
+          </a:p>
         </p:txBody>
       </p:sp>
       <p:sp>
         <p:nvSpPr>
           <p:cNvPr id="22" name="Google Shape;22;p5"/>
-          <p:cNvSpPr txBox="1"/>
+          <p:cNvSpPr txBox="1">
+            <a:spLocks noGrp="1"/>
+          </p:cNvSpPr>
           <p:nvPr>
-            <p:ph idx="1" type="body"/>
+            <p:ph type="body" idx="1"/>
           </p:nvPr>
         </p:nvSpPr>
         <p:spPr>
@@ -2271,11 +2327,11 @@
           </a:prstGeom>
         </p:spPr>
         <p:txBody>
-          <a:bodyPr anchorCtr="0" anchor="t" bIns="91425" lIns="91425" spcFirstLastPara="1" rIns="91425" wrap="square" tIns="91425">
+          <a:bodyPr spcFirstLastPara="1" wrap="square" lIns="91425" tIns="91425" rIns="91425" bIns="91425" anchor="t" anchorCtr="0">
             <a:normAutofit/>
           </a:bodyPr>
           <a:lstStyle>
-            <a:lvl1pPr indent="-317500" lvl="0" marL="457200">
+            <a:lvl1pPr marL="457200" lvl="0" indent="-317500">
               <a:spcBef>
                 <a:spcPts val="0"/>
               </a:spcBef>
@@ -2286,7 +2342,7 @@
               <a:buChar char="●"/>
               <a:defRPr sz="1400"/>
             </a:lvl1pPr>
-            <a:lvl2pPr indent="-304800" lvl="1" marL="914400">
+            <a:lvl2pPr marL="914400" lvl="1" indent="-304800">
               <a:spcBef>
                 <a:spcPts val="0"/>
               </a:spcBef>
@@ -2297,7 +2353,7 @@
               <a:buChar char="○"/>
               <a:defRPr sz="1200"/>
             </a:lvl2pPr>
-            <a:lvl3pPr indent="-304800" lvl="2" marL="1371600">
+            <a:lvl3pPr marL="1371600" lvl="2" indent="-304800">
               <a:spcBef>
                 <a:spcPts val="0"/>
               </a:spcBef>
@@ -2308,7 +2364,7 @@
               <a:buChar char="■"/>
               <a:defRPr sz="1200"/>
             </a:lvl3pPr>
-            <a:lvl4pPr indent="-304800" lvl="3" marL="1828800">
+            <a:lvl4pPr marL="1828800" lvl="3" indent="-304800">
               <a:spcBef>
                 <a:spcPts val="0"/>
               </a:spcBef>
@@ -2319,7 +2375,7 @@
               <a:buChar char="●"/>
               <a:defRPr sz="1200"/>
             </a:lvl4pPr>
-            <a:lvl5pPr indent="-304800" lvl="4" marL="2286000">
+            <a:lvl5pPr marL="2286000" lvl="4" indent="-304800">
               <a:spcBef>
                 <a:spcPts val="0"/>
               </a:spcBef>
@@ -2330,7 +2386,7 @@
               <a:buChar char="○"/>
               <a:defRPr sz="1200"/>
             </a:lvl5pPr>
-            <a:lvl6pPr indent="-304800" lvl="5" marL="2743200">
+            <a:lvl6pPr marL="2743200" lvl="5" indent="-304800">
               <a:spcBef>
                 <a:spcPts val="0"/>
               </a:spcBef>
@@ -2341,7 +2397,7 @@
               <a:buChar char="■"/>
               <a:defRPr sz="1200"/>
             </a:lvl6pPr>
-            <a:lvl7pPr indent="-304800" lvl="6" marL="3200400">
+            <a:lvl7pPr marL="3200400" lvl="6" indent="-304800">
               <a:spcBef>
                 <a:spcPts val="0"/>
               </a:spcBef>
@@ -2352,7 +2408,7 @@
               <a:buChar char="●"/>
               <a:defRPr sz="1200"/>
             </a:lvl7pPr>
-            <a:lvl8pPr indent="-304800" lvl="7" marL="3657600">
+            <a:lvl8pPr marL="3657600" lvl="7" indent="-304800">
               <a:spcBef>
                 <a:spcPts val="0"/>
               </a:spcBef>
@@ -2363,7 +2419,7 @@
               <a:buChar char="○"/>
               <a:defRPr sz="1200"/>
             </a:lvl8pPr>
-            <a:lvl9pPr indent="-304800" lvl="8" marL="4114800">
+            <a:lvl9pPr marL="4114800" lvl="8" indent="-304800">
               <a:spcBef>
                 <a:spcPts val="0"/>
               </a:spcBef>
@@ -2375,15 +2431,19 @@
               <a:defRPr sz="1200"/>
             </a:lvl9pPr>
           </a:lstStyle>
-          <a:p/>
+          <a:p>
+            <a:endParaRPr/>
+          </a:p>
         </p:txBody>
       </p:sp>
       <p:sp>
         <p:nvSpPr>
           <p:cNvPr id="23" name="Google Shape;23;p5"/>
-          <p:cNvSpPr txBox="1"/>
+          <p:cNvSpPr txBox="1">
+            <a:spLocks noGrp="1"/>
+          </p:cNvSpPr>
           <p:nvPr>
-            <p:ph idx="2" type="body"/>
+            <p:ph type="body" idx="2"/>
           </p:nvPr>
         </p:nvSpPr>
         <p:spPr>
@@ -2396,11 +2456,11 @@
           </a:prstGeom>
         </p:spPr>
         <p:txBody>
-          <a:bodyPr anchorCtr="0" anchor="t" bIns="91425" lIns="91425" spcFirstLastPara="1" rIns="91425" wrap="square" tIns="91425">
+          <a:bodyPr spcFirstLastPara="1" wrap="square" lIns="91425" tIns="91425" rIns="91425" bIns="91425" anchor="t" anchorCtr="0">
             <a:normAutofit/>
           </a:bodyPr>
           <a:lstStyle>
-            <a:lvl1pPr indent="-317500" lvl="0" marL="457200">
+            <a:lvl1pPr marL="457200" lvl="0" indent="-317500">
               <a:spcBef>
                 <a:spcPts val="0"/>
               </a:spcBef>
@@ -2411,7 +2471,7 @@
               <a:buChar char="●"/>
               <a:defRPr sz="1400"/>
             </a:lvl1pPr>
-            <a:lvl2pPr indent="-304800" lvl="1" marL="914400">
+            <a:lvl2pPr marL="914400" lvl="1" indent="-304800">
               <a:spcBef>
                 <a:spcPts val="0"/>
               </a:spcBef>
@@ -2422,7 +2482,7 @@
               <a:buChar char="○"/>
               <a:defRPr sz="1200"/>
             </a:lvl2pPr>
-            <a:lvl3pPr indent="-304800" lvl="2" marL="1371600">
+            <a:lvl3pPr marL="1371600" lvl="2" indent="-304800">
               <a:spcBef>
                 <a:spcPts val="0"/>
               </a:spcBef>
@@ -2433,7 +2493,7 @@
               <a:buChar char="■"/>
               <a:defRPr sz="1200"/>
             </a:lvl3pPr>
-            <a:lvl4pPr indent="-304800" lvl="3" marL="1828800">
+            <a:lvl4pPr marL="1828800" lvl="3" indent="-304800">
               <a:spcBef>
                 <a:spcPts val="0"/>
               </a:spcBef>
@@ -2444,7 +2504,7 @@
               <a:buChar char="●"/>
               <a:defRPr sz="1200"/>
             </a:lvl4pPr>
-            <a:lvl5pPr indent="-304800" lvl="4" marL="2286000">
+            <a:lvl5pPr marL="2286000" lvl="4" indent="-304800">
               <a:spcBef>
                 <a:spcPts val="0"/>
               </a:spcBef>
@@ -2455,7 +2515,7 @@
               <a:buChar char="○"/>
               <a:defRPr sz="1200"/>
             </a:lvl5pPr>
-            <a:lvl6pPr indent="-304800" lvl="5" marL="2743200">
+            <a:lvl6pPr marL="2743200" lvl="5" indent="-304800">
               <a:spcBef>
                 <a:spcPts val="0"/>
               </a:spcBef>
@@ -2466,7 +2526,7 @@
               <a:buChar char="■"/>
               <a:defRPr sz="1200"/>
             </a:lvl6pPr>
-            <a:lvl7pPr indent="-304800" lvl="6" marL="3200400">
+            <a:lvl7pPr marL="3200400" lvl="6" indent="-304800">
               <a:spcBef>
                 <a:spcPts val="0"/>
               </a:spcBef>
@@ -2477,7 +2537,7 @@
               <a:buChar char="●"/>
               <a:defRPr sz="1200"/>
             </a:lvl7pPr>
-            <a:lvl8pPr indent="-304800" lvl="7" marL="3657600">
+            <a:lvl8pPr marL="3657600" lvl="7" indent="-304800">
               <a:spcBef>
                 <a:spcPts val="0"/>
               </a:spcBef>
@@ -2488,7 +2548,7 @@
               <a:buChar char="○"/>
               <a:defRPr sz="1200"/>
             </a:lvl8pPr>
-            <a:lvl9pPr indent="-304800" lvl="8" marL="4114800">
+            <a:lvl9pPr marL="4114800" lvl="8" indent="-304800">
               <a:spcBef>
                 <a:spcPts val="0"/>
               </a:spcBef>
@@ -2500,15 +2560,19 @@
               <a:defRPr sz="1200"/>
             </a:lvl9pPr>
           </a:lstStyle>
-          <a:p/>
+          <a:p>
+            <a:endParaRPr/>
+          </a:p>
         </p:txBody>
       </p:sp>
       <p:sp>
         <p:nvSpPr>
           <p:cNvPr id="24" name="Google Shape;24;p5"/>
-          <p:cNvSpPr txBox="1"/>
+          <p:cNvSpPr txBox="1">
+            <a:spLocks noGrp="1"/>
+          </p:cNvSpPr>
           <p:nvPr>
-            <p:ph idx="12" type="sldNum"/>
+            <p:ph type="sldNum" idx="12"/>
           </p:nvPr>
         </p:nvSpPr>
         <p:spPr>
@@ -2521,7 +2585,7 @@
           </a:prstGeom>
         </p:spPr>
         <p:txBody>
-          <a:bodyPr anchorCtr="0" anchor="ctr" bIns="91425" lIns="91425" spcFirstLastPara="1" rIns="91425" wrap="square" tIns="91425">
+          <a:bodyPr spcFirstLastPara="1" wrap="square" lIns="91425" tIns="91425" rIns="91425" bIns="91425" anchor="ctr" anchorCtr="0">
             <a:normAutofit/>
           </a:bodyPr>
           <a:lstStyle>
@@ -2563,7 +2627,7 @@
             </a:lvl9pPr>
           </a:lstStyle>
           <a:p>
-            <a:pPr indent="0" lvl="0" marL="0" rtl="0" algn="r">
+            <a:pPr marL="0" lvl="0" indent="0" algn="r" rtl="0">
               <a:spcBef>
                 <a:spcPts val="0"/>
               </a:spcBef>
@@ -2574,7 +2638,7 @@
             </a:pPr>
             <a:fld id="{00000000-1234-1234-1234-123412341234}" type="slidenum">
               <a:rPr lang="pt-BR"/>
-              <a:t>‹#›</a:t>
+              <a:t>‹nº›</a:t>
             </a:fld>
             <a:endParaRPr/>
           </a:p>
@@ -2589,11 +2653,11 @@
 </file>
 
 <file path=ppt/slideLayouts/slideLayout5.xml><?xml version="1.0" encoding="utf-8"?>
-<p:sldLayout xmlns:a="http://schemas.openxmlformats.org/drawingml/2006/main" xmlns:r="http://schemas.openxmlformats.org/officeDocument/2006/relationships" xmlns:mc="http://schemas.openxmlformats.org/markup-compatibility/2006" xmlns:mv="urn:schemas-microsoft-com:mac:vml" xmlns:p="http://schemas.openxmlformats.org/presentationml/2006/main" xmlns:c="http://schemas.openxmlformats.org/drawingml/2006/chart" xmlns:dgm="http://schemas.openxmlformats.org/drawingml/2006/diagram" xmlns:o="urn:schemas-microsoft-com:office:office" xmlns:v="urn:schemas-microsoft-com:vml" xmlns:pvml="urn:schemas-microsoft-com:office:powerpoint" xmlns:com="http://schemas.openxmlformats.org/drawingml/2006/compatibility" xmlns:p14="http://schemas.microsoft.com/office/powerpoint/2010/main" xmlns:p15="http://schemas.microsoft.com/office/powerpoint/2012/main" xmlns:ahyp="http://schemas.microsoft.com/office/drawing/2018/hyperlinkcolor" matchingName="Title only" type="titleOnly">
+<p:sldLayout xmlns:a="http://schemas.openxmlformats.org/drawingml/2006/main" xmlns:r="http://schemas.openxmlformats.org/officeDocument/2006/relationships" xmlns:p="http://schemas.openxmlformats.org/presentationml/2006/main" matchingName="Title only" type="titleOnly">
   <p:cSld name="TITLE_ONLY">
     <p:spTree>
       <p:nvGrpSpPr>
-        <p:cNvPr id="25" name="Shape 25"/>
+        <p:cNvPr id="1" name="Shape 25"/>
         <p:cNvGrpSpPr/>
         <p:nvPr/>
       </p:nvGrpSpPr>
@@ -2608,7 +2672,9 @@
       <p:sp>
         <p:nvSpPr>
           <p:cNvPr id="26" name="Google Shape;26;p6"/>
-          <p:cNvSpPr txBox="1"/>
+          <p:cNvSpPr txBox="1">
+            <a:spLocks noGrp="1"/>
+          </p:cNvSpPr>
           <p:nvPr>
             <p:ph type="title"/>
           </p:nvPr>
@@ -2623,7 +2689,7 @@
           </a:prstGeom>
         </p:spPr>
         <p:txBody>
-          <a:bodyPr anchorCtr="0" anchor="t" bIns="91425" lIns="91425" spcFirstLastPara="1" rIns="91425" wrap="square" tIns="91425">
+          <a:bodyPr spcFirstLastPara="1" wrap="square" lIns="91425" tIns="91425" rIns="91425" bIns="91425" anchor="t" anchorCtr="0">
             <a:normAutofit/>
           </a:bodyPr>
           <a:lstStyle>
@@ -2727,15 +2793,19 @@
               <a:defRPr/>
             </a:lvl9pPr>
           </a:lstStyle>
-          <a:p/>
+          <a:p>
+            <a:endParaRPr/>
+          </a:p>
         </p:txBody>
       </p:sp>
       <p:sp>
         <p:nvSpPr>
           <p:cNvPr id="27" name="Google Shape;27;p6"/>
-          <p:cNvSpPr txBox="1"/>
+          <p:cNvSpPr txBox="1">
+            <a:spLocks noGrp="1"/>
+          </p:cNvSpPr>
           <p:nvPr>
-            <p:ph idx="12" type="sldNum"/>
+            <p:ph type="sldNum" idx="12"/>
           </p:nvPr>
         </p:nvSpPr>
         <p:spPr>
@@ -2748,7 +2818,7 @@
           </a:prstGeom>
         </p:spPr>
         <p:txBody>
-          <a:bodyPr anchorCtr="0" anchor="ctr" bIns="91425" lIns="91425" spcFirstLastPara="1" rIns="91425" wrap="square" tIns="91425">
+          <a:bodyPr spcFirstLastPara="1" wrap="square" lIns="91425" tIns="91425" rIns="91425" bIns="91425" anchor="ctr" anchorCtr="0">
             <a:normAutofit/>
           </a:bodyPr>
           <a:lstStyle>
@@ -2790,7 +2860,7 @@
             </a:lvl9pPr>
           </a:lstStyle>
           <a:p>
-            <a:pPr indent="0" lvl="0" marL="0" rtl="0" algn="r">
+            <a:pPr marL="0" lvl="0" indent="0" algn="r" rtl="0">
               <a:spcBef>
                 <a:spcPts val="0"/>
               </a:spcBef>
@@ -2801,7 +2871,7 @@
             </a:pPr>
             <a:fld id="{00000000-1234-1234-1234-123412341234}" type="slidenum">
               <a:rPr lang="pt-BR"/>
-              <a:t>‹#›</a:t>
+              <a:t>‹nº›</a:t>
             </a:fld>
             <a:endParaRPr/>
           </a:p>
@@ -2816,11 +2886,11 @@
 </file>
 
 <file path=ppt/slideLayouts/slideLayout6.xml><?xml version="1.0" encoding="utf-8"?>
-<p:sldLayout xmlns:a="http://schemas.openxmlformats.org/drawingml/2006/main" xmlns:r="http://schemas.openxmlformats.org/officeDocument/2006/relationships" xmlns:mc="http://schemas.openxmlformats.org/markup-compatibility/2006" xmlns:mv="urn:schemas-microsoft-com:mac:vml" xmlns:p="http://schemas.openxmlformats.org/presentationml/2006/main" xmlns:c="http://schemas.openxmlformats.org/drawingml/2006/chart" xmlns:dgm="http://schemas.openxmlformats.org/drawingml/2006/diagram" xmlns:o="urn:schemas-microsoft-com:office:office" xmlns:v="urn:schemas-microsoft-com:vml" xmlns:pvml="urn:schemas-microsoft-com:office:powerpoint" xmlns:com="http://schemas.openxmlformats.org/drawingml/2006/compatibility" xmlns:p14="http://schemas.microsoft.com/office/powerpoint/2010/main" xmlns:p15="http://schemas.microsoft.com/office/powerpoint/2012/main" xmlns:ahyp="http://schemas.microsoft.com/office/drawing/2018/hyperlinkcolor" matchingName="One column text">
+<p:sldLayout xmlns:a="http://schemas.openxmlformats.org/drawingml/2006/main" xmlns:r="http://schemas.openxmlformats.org/officeDocument/2006/relationships" xmlns:p="http://schemas.openxmlformats.org/presentationml/2006/main" matchingName="One column text">
   <p:cSld name="ONE_COLUMN_TEXT">
     <p:spTree>
       <p:nvGrpSpPr>
-        <p:cNvPr id="28" name="Shape 28"/>
+        <p:cNvPr id="1" name="Shape 28"/>
         <p:cNvGrpSpPr/>
         <p:nvPr/>
       </p:nvGrpSpPr>
@@ -2835,7 +2905,9 @@
       <p:sp>
         <p:nvSpPr>
           <p:cNvPr id="29" name="Google Shape;29;p7"/>
-          <p:cNvSpPr txBox="1"/>
+          <p:cNvSpPr txBox="1">
+            <a:spLocks noGrp="1"/>
+          </p:cNvSpPr>
           <p:nvPr>
             <p:ph type="title"/>
           </p:nvPr>
@@ -2850,7 +2922,7 @@
           </a:prstGeom>
         </p:spPr>
         <p:txBody>
-          <a:bodyPr anchorCtr="0" anchor="b" bIns="91425" lIns="91425" spcFirstLastPara="1" rIns="91425" wrap="square" tIns="91425">
+          <a:bodyPr spcFirstLastPara="1" wrap="square" lIns="91425" tIns="91425" rIns="91425" bIns="91425" anchor="b" anchorCtr="0">
             <a:normAutofit/>
           </a:bodyPr>
           <a:lstStyle>
@@ -2954,15 +3026,19 @@
               <a:defRPr sz="2400"/>
             </a:lvl9pPr>
           </a:lstStyle>
-          <a:p/>
+          <a:p>
+            <a:endParaRPr/>
+          </a:p>
         </p:txBody>
       </p:sp>
       <p:sp>
         <p:nvSpPr>
           <p:cNvPr id="30" name="Google Shape;30;p7"/>
-          <p:cNvSpPr txBox="1"/>
+          <p:cNvSpPr txBox="1">
+            <a:spLocks noGrp="1"/>
+          </p:cNvSpPr>
           <p:nvPr>
-            <p:ph idx="1" type="body"/>
+            <p:ph type="body" idx="1"/>
           </p:nvPr>
         </p:nvSpPr>
         <p:spPr>
@@ -2975,11 +3051,11 @@
           </a:prstGeom>
         </p:spPr>
         <p:txBody>
-          <a:bodyPr anchorCtr="0" anchor="t" bIns="91425" lIns="91425" spcFirstLastPara="1" rIns="91425" wrap="square" tIns="91425">
+          <a:bodyPr spcFirstLastPara="1" wrap="square" lIns="91425" tIns="91425" rIns="91425" bIns="91425" anchor="t" anchorCtr="0">
             <a:normAutofit/>
           </a:bodyPr>
           <a:lstStyle>
-            <a:lvl1pPr indent="-304800" lvl="0" marL="457200">
+            <a:lvl1pPr marL="457200" lvl="0" indent="-304800">
               <a:spcBef>
                 <a:spcPts val="0"/>
               </a:spcBef>
@@ -2990,7 +3066,7 @@
               <a:buChar char="●"/>
               <a:defRPr sz="1200"/>
             </a:lvl1pPr>
-            <a:lvl2pPr indent="-304800" lvl="1" marL="914400">
+            <a:lvl2pPr marL="914400" lvl="1" indent="-304800">
               <a:spcBef>
                 <a:spcPts val="0"/>
               </a:spcBef>
@@ -3001,7 +3077,7 @@
               <a:buChar char="○"/>
               <a:defRPr sz="1200"/>
             </a:lvl2pPr>
-            <a:lvl3pPr indent="-304800" lvl="2" marL="1371600">
+            <a:lvl3pPr marL="1371600" lvl="2" indent="-304800">
               <a:spcBef>
                 <a:spcPts val="0"/>
               </a:spcBef>
@@ -3012,7 +3088,7 @@
               <a:buChar char="■"/>
               <a:defRPr sz="1200"/>
             </a:lvl3pPr>
-            <a:lvl4pPr indent="-304800" lvl="3" marL="1828800">
+            <a:lvl4pPr marL="1828800" lvl="3" indent="-304800">
               <a:spcBef>
                 <a:spcPts val="0"/>
               </a:spcBef>
@@ -3023,7 +3099,7 @@
               <a:buChar char="●"/>
               <a:defRPr sz="1200"/>
             </a:lvl4pPr>
-            <a:lvl5pPr indent="-304800" lvl="4" marL="2286000">
+            <a:lvl5pPr marL="2286000" lvl="4" indent="-304800">
               <a:spcBef>
                 <a:spcPts val="0"/>
               </a:spcBef>
@@ -3034,7 +3110,7 @@
               <a:buChar char="○"/>
               <a:defRPr sz="1200"/>
             </a:lvl5pPr>
-            <a:lvl6pPr indent="-304800" lvl="5" marL="2743200">
+            <a:lvl6pPr marL="2743200" lvl="5" indent="-304800">
               <a:spcBef>
                 <a:spcPts val="0"/>
               </a:spcBef>
@@ -3045,7 +3121,7 @@
               <a:buChar char="■"/>
               <a:defRPr sz="1200"/>
             </a:lvl6pPr>
-            <a:lvl7pPr indent="-304800" lvl="6" marL="3200400">
+            <a:lvl7pPr marL="3200400" lvl="6" indent="-304800">
               <a:spcBef>
                 <a:spcPts val="0"/>
               </a:spcBef>
@@ -3056,7 +3132,7 @@
               <a:buChar char="●"/>
               <a:defRPr sz="1200"/>
             </a:lvl7pPr>
-            <a:lvl8pPr indent="-304800" lvl="7" marL="3657600">
+            <a:lvl8pPr marL="3657600" lvl="7" indent="-304800">
               <a:spcBef>
                 <a:spcPts val="0"/>
               </a:spcBef>
@@ -3067,7 +3143,7 @@
               <a:buChar char="○"/>
               <a:defRPr sz="1200"/>
             </a:lvl8pPr>
-            <a:lvl9pPr indent="-304800" lvl="8" marL="4114800">
+            <a:lvl9pPr marL="4114800" lvl="8" indent="-304800">
               <a:spcBef>
                 <a:spcPts val="0"/>
               </a:spcBef>
@@ -3079,15 +3155,19 @@
               <a:defRPr sz="1200"/>
             </a:lvl9pPr>
           </a:lstStyle>
-          <a:p/>
+          <a:p>
+            <a:endParaRPr/>
+          </a:p>
         </p:txBody>
       </p:sp>
       <p:sp>
         <p:nvSpPr>
           <p:cNvPr id="31" name="Google Shape;31;p7"/>
-          <p:cNvSpPr txBox="1"/>
+          <p:cNvSpPr txBox="1">
+            <a:spLocks noGrp="1"/>
+          </p:cNvSpPr>
           <p:nvPr>
-            <p:ph idx="12" type="sldNum"/>
+            <p:ph type="sldNum" idx="12"/>
           </p:nvPr>
         </p:nvSpPr>
         <p:spPr>
@@ -3100,7 +3180,7 @@
           </a:prstGeom>
         </p:spPr>
         <p:txBody>
-          <a:bodyPr anchorCtr="0" anchor="ctr" bIns="91425" lIns="91425" spcFirstLastPara="1" rIns="91425" wrap="square" tIns="91425">
+          <a:bodyPr spcFirstLastPara="1" wrap="square" lIns="91425" tIns="91425" rIns="91425" bIns="91425" anchor="ctr" anchorCtr="0">
             <a:normAutofit/>
           </a:bodyPr>
           <a:lstStyle>
@@ -3142,7 +3222,7 @@
             </a:lvl9pPr>
           </a:lstStyle>
           <a:p>
-            <a:pPr indent="0" lvl="0" marL="0" rtl="0" algn="r">
+            <a:pPr marL="0" lvl="0" indent="0" algn="r" rtl="0">
               <a:spcBef>
                 <a:spcPts val="0"/>
               </a:spcBef>
@@ -3153,7 +3233,7 @@
             </a:pPr>
             <a:fld id="{00000000-1234-1234-1234-123412341234}" type="slidenum">
               <a:rPr lang="pt-BR"/>
-              <a:t>‹#›</a:t>
+              <a:t>‹nº›</a:t>
             </a:fld>
             <a:endParaRPr/>
           </a:p>
@@ -3168,11 +3248,11 @@
 </file>
 
 <file path=ppt/slideLayouts/slideLayout7.xml><?xml version="1.0" encoding="utf-8"?>
-<p:sldLayout xmlns:a="http://schemas.openxmlformats.org/drawingml/2006/main" xmlns:r="http://schemas.openxmlformats.org/officeDocument/2006/relationships" xmlns:mc="http://schemas.openxmlformats.org/markup-compatibility/2006" xmlns:mv="urn:schemas-microsoft-com:mac:vml" xmlns:p="http://schemas.openxmlformats.org/presentationml/2006/main" xmlns:c="http://schemas.openxmlformats.org/drawingml/2006/chart" xmlns:dgm="http://schemas.openxmlformats.org/drawingml/2006/diagram" xmlns:o="urn:schemas-microsoft-com:office:office" xmlns:v="urn:schemas-microsoft-com:vml" xmlns:pvml="urn:schemas-microsoft-com:office:powerpoint" xmlns:com="http://schemas.openxmlformats.org/drawingml/2006/compatibility" xmlns:p14="http://schemas.microsoft.com/office/powerpoint/2010/main" xmlns:p15="http://schemas.microsoft.com/office/powerpoint/2012/main" xmlns:ahyp="http://schemas.microsoft.com/office/drawing/2018/hyperlinkcolor" matchingName="Main point">
+<p:sldLayout xmlns:a="http://schemas.openxmlformats.org/drawingml/2006/main" xmlns:r="http://schemas.openxmlformats.org/officeDocument/2006/relationships" xmlns:p="http://schemas.openxmlformats.org/presentationml/2006/main" matchingName="Main point">
   <p:cSld name="MAIN_POINT">
     <p:spTree>
       <p:nvGrpSpPr>
-        <p:cNvPr id="32" name="Shape 32"/>
+        <p:cNvPr id="1" name="Shape 32"/>
         <p:cNvGrpSpPr/>
         <p:nvPr/>
       </p:nvGrpSpPr>
@@ -3187,7 +3267,9 @@
       <p:sp>
         <p:nvSpPr>
           <p:cNvPr id="33" name="Google Shape;33;p8"/>
-          <p:cNvSpPr txBox="1"/>
+          <p:cNvSpPr txBox="1">
+            <a:spLocks noGrp="1"/>
+          </p:cNvSpPr>
           <p:nvPr>
             <p:ph type="title"/>
           </p:nvPr>
@@ -3202,7 +3284,7 @@
           </a:prstGeom>
         </p:spPr>
         <p:txBody>
-          <a:bodyPr anchorCtr="0" anchor="ctr" bIns="91425" lIns="91425" spcFirstLastPara="1" rIns="91425" wrap="square" tIns="91425">
+          <a:bodyPr spcFirstLastPara="1" wrap="square" lIns="91425" tIns="91425" rIns="91425" bIns="91425" anchor="ctr" anchorCtr="0">
             <a:normAutofit/>
           </a:bodyPr>
           <a:lstStyle>
@@ -3306,15 +3388,19 @@
               <a:defRPr sz="4800"/>
             </a:lvl9pPr>
           </a:lstStyle>
-          <a:p/>
+          <a:p>
+            <a:endParaRPr/>
+          </a:p>
         </p:txBody>
       </p:sp>
       <p:sp>
         <p:nvSpPr>
           <p:cNvPr id="34" name="Google Shape;34;p8"/>
-          <p:cNvSpPr txBox="1"/>
+          <p:cNvSpPr txBox="1">
+            <a:spLocks noGrp="1"/>
+          </p:cNvSpPr>
           <p:nvPr>
-            <p:ph idx="12" type="sldNum"/>
+            <p:ph type="sldNum" idx="12"/>
           </p:nvPr>
         </p:nvSpPr>
         <p:spPr>
@@ -3327,7 +3413,7 @@
           </a:prstGeom>
         </p:spPr>
         <p:txBody>
-          <a:bodyPr anchorCtr="0" anchor="ctr" bIns="91425" lIns="91425" spcFirstLastPara="1" rIns="91425" wrap="square" tIns="91425">
+          <a:bodyPr spcFirstLastPara="1" wrap="square" lIns="91425" tIns="91425" rIns="91425" bIns="91425" anchor="ctr" anchorCtr="0">
             <a:normAutofit/>
           </a:bodyPr>
           <a:lstStyle>
@@ -3369,7 +3455,7 @@
             </a:lvl9pPr>
           </a:lstStyle>
           <a:p>
-            <a:pPr indent="0" lvl="0" marL="0" rtl="0" algn="r">
+            <a:pPr marL="0" lvl="0" indent="0" algn="r" rtl="0">
               <a:spcBef>
                 <a:spcPts val="0"/>
               </a:spcBef>
@@ -3380,7 +3466,7 @@
             </a:pPr>
             <a:fld id="{00000000-1234-1234-1234-123412341234}" type="slidenum">
               <a:rPr lang="pt-BR"/>
-              <a:t>‹#›</a:t>
+              <a:t>‹nº›</a:t>
             </a:fld>
             <a:endParaRPr/>
           </a:p>
@@ -3395,11 +3481,11 @@
 </file>
 
 <file path=ppt/slideLayouts/slideLayout8.xml><?xml version="1.0" encoding="utf-8"?>
-<p:sldLayout xmlns:a="http://schemas.openxmlformats.org/drawingml/2006/main" xmlns:r="http://schemas.openxmlformats.org/officeDocument/2006/relationships" xmlns:mc="http://schemas.openxmlformats.org/markup-compatibility/2006" xmlns:mv="urn:schemas-microsoft-com:mac:vml" xmlns:p="http://schemas.openxmlformats.org/presentationml/2006/main" xmlns:c="http://schemas.openxmlformats.org/drawingml/2006/chart" xmlns:dgm="http://schemas.openxmlformats.org/drawingml/2006/diagram" xmlns:o="urn:schemas-microsoft-com:office:office" xmlns:v="urn:schemas-microsoft-com:vml" xmlns:pvml="urn:schemas-microsoft-com:office:powerpoint" xmlns:com="http://schemas.openxmlformats.org/drawingml/2006/compatibility" xmlns:p14="http://schemas.microsoft.com/office/powerpoint/2010/main" xmlns:p15="http://schemas.microsoft.com/office/powerpoint/2012/main" xmlns:ahyp="http://schemas.microsoft.com/office/drawing/2018/hyperlinkcolor" matchingName="Section title and description">
+<p:sldLayout xmlns:a="http://schemas.openxmlformats.org/drawingml/2006/main" xmlns:r="http://schemas.openxmlformats.org/officeDocument/2006/relationships" xmlns:p="http://schemas.openxmlformats.org/presentationml/2006/main" matchingName="Section title and description">
   <p:cSld name="SECTION_TITLE_AND_DESCRIPTION">
     <p:spTree>
       <p:nvGrpSpPr>
-        <p:cNvPr id="35" name="Shape 35"/>
+        <p:cNvPr id="1" name="Shape 35"/>
         <p:cNvGrpSpPr/>
         <p:nvPr/>
       </p:nvGrpSpPr>
@@ -3433,12 +3519,12 @@
           </a:ln>
         </p:spPr>
         <p:txBody>
-          <a:bodyPr anchorCtr="0" anchor="ctr" bIns="91425" lIns="91425" spcFirstLastPara="1" rIns="91425" wrap="square" tIns="91425">
+          <a:bodyPr spcFirstLastPara="1" wrap="square" lIns="91425" tIns="91425" rIns="91425" bIns="91425" anchor="ctr" anchorCtr="0">
             <a:noAutofit/>
           </a:bodyPr>
           <a:lstStyle/>
           <a:p>
-            <a:pPr indent="0" lvl="0" marL="0" rtl="0" algn="l">
+            <a:pPr marL="0" lvl="0" indent="0" algn="l" rtl="0">
               <a:spcBef>
                 <a:spcPts val="0"/>
               </a:spcBef>
@@ -3447,9 +3533,6 @@
               </a:spcAft>
               <a:buNone/>
             </a:pPr>
-            <a:r>
-              <a:t/>
-            </a:r>
             <a:endParaRPr/>
           </a:p>
         </p:txBody>
@@ -3457,7 +3540,9 @@
       <p:sp>
         <p:nvSpPr>
           <p:cNvPr id="37" name="Google Shape;37;p9"/>
-          <p:cNvSpPr txBox="1"/>
+          <p:cNvSpPr txBox="1">
+            <a:spLocks noGrp="1"/>
+          </p:cNvSpPr>
           <p:nvPr>
             <p:ph type="title"/>
           </p:nvPr>
@@ -3472,7 +3557,7 @@
           </a:prstGeom>
         </p:spPr>
         <p:txBody>
-          <a:bodyPr anchorCtr="0" anchor="b" bIns="91425" lIns="91425" spcFirstLastPara="1" rIns="91425" wrap="square" tIns="91425">
+          <a:bodyPr spcFirstLastPara="1" wrap="square" lIns="91425" tIns="91425" rIns="91425" bIns="91425" anchor="b" anchorCtr="0">
             <a:normAutofit/>
           </a:bodyPr>
           <a:lstStyle>
@@ -3576,15 +3661,19 @@
               <a:defRPr sz="4200"/>
             </a:lvl9pPr>
           </a:lstStyle>
-          <a:p/>
+          <a:p>
+            <a:endParaRPr/>
+          </a:p>
         </p:txBody>
       </p:sp>
       <p:sp>
         <p:nvSpPr>
           <p:cNvPr id="38" name="Google Shape;38;p9"/>
-          <p:cNvSpPr txBox="1"/>
+          <p:cNvSpPr txBox="1">
+            <a:spLocks noGrp="1"/>
+          </p:cNvSpPr>
           <p:nvPr>
-            <p:ph idx="1" type="subTitle"/>
+            <p:ph type="subTitle" idx="1"/>
           </p:nvPr>
         </p:nvSpPr>
         <p:spPr>
@@ -3597,7 +3686,7 @@
           </a:prstGeom>
         </p:spPr>
         <p:txBody>
-          <a:bodyPr anchorCtr="0" anchor="t" bIns="91425" lIns="91425" spcFirstLastPara="1" rIns="91425" wrap="square" tIns="91425">
+          <a:bodyPr spcFirstLastPara="1" wrap="square" lIns="91425" tIns="91425" rIns="91425" bIns="91425" anchor="t" anchorCtr="0">
             <a:normAutofit/>
           </a:bodyPr>
           <a:lstStyle>
@@ -3728,15 +3817,19 @@
               <a:defRPr sz="2100"/>
             </a:lvl9pPr>
           </a:lstStyle>
-          <a:p/>
+          <a:p>
+            <a:endParaRPr/>
+          </a:p>
         </p:txBody>
       </p:sp>
       <p:sp>
         <p:nvSpPr>
           <p:cNvPr id="39" name="Google Shape;39;p9"/>
-          <p:cNvSpPr txBox="1"/>
+          <p:cNvSpPr txBox="1">
+            <a:spLocks noGrp="1"/>
+          </p:cNvSpPr>
           <p:nvPr>
-            <p:ph idx="2" type="body"/>
+            <p:ph type="body" idx="2"/>
           </p:nvPr>
         </p:nvSpPr>
         <p:spPr>
@@ -3749,11 +3842,11 @@
           </a:prstGeom>
         </p:spPr>
         <p:txBody>
-          <a:bodyPr anchorCtr="0" anchor="ctr" bIns="91425" lIns="91425" spcFirstLastPara="1" rIns="91425" wrap="square" tIns="91425">
+          <a:bodyPr spcFirstLastPara="1" wrap="square" lIns="91425" tIns="91425" rIns="91425" bIns="91425" anchor="ctr" anchorCtr="0">
             <a:normAutofit/>
           </a:bodyPr>
           <a:lstStyle>
-            <a:lvl1pPr indent="-342900" lvl="0" marL="457200">
+            <a:lvl1pPr marL="457200" lvl="0" indent="-342900">
               <a:spcBef>
                 <a:spcPts val="0"/>
               </a:spcBef>
@@ -3764,7 +3857,7 @@
               <a:buChar char="●"/>
               <a:defRPr/>
             </a:lvl1pPr>
-            <a:lvl2pPr indent="-317500" lvl="1" marL="914400">
+            <a:lvl2pPr marL="914400" lvl="1" indent="-317500">
               <a:spcBef>
                 <a:spcPts val="0"/>
               </a:spcBef>
@@ -3775,7 +3868,7 @@
               <a:buChar char="○"/>
               <a:defRPr/>
             </a:lvl2pPr>
-            <a:lvl3pPr indent="-317500" lvl="2" marL="1371600">
+            <a:lvl3pPr marL="1371600" lvl="2" indent="-317500">
               <a:spcBef>
                 <a:spcPts val="0"/>
               </a:spcBef>
@@ -3786,7 +3879,7 @@
               <a:buChar char="■"/>
               <a:defRPr/>
             </a:lvl3pPr>
-            <a:lvl4pPr indent="-317500" lvl="3" marL="1828800">
+            <a:lvl4pPr marL="1828800" lvl="3" indent="-317500">
               <a:spcBef>
                 <a:spcPts val="0"/>
               </a:spcBef>
@@ -3797,7 +3890,7 @@
               <a:buChar char="●"/>
               <a:defRPr/>
             </a:lvl4pPr>
-            <a:lvl5pPr indent="-317500" lvl="4" marL="2286000">
+            <a:lvl5pPr marL="2286000" lvl="4" indent="-317500">
               <a:spcBef>
                 <a:spcPts val="0"/>
               </a:spcBef>
@@ -3808,7 +3901,7 @@
               <a:buChar char="○"/>
               <a:defRPr/>
             </a:lvl5pPr>
-            <a:lvl6pPr indent="-317500" lvl="5" marL="2743200">
+            <a:lvl6pPr marL="2743200" lvl="5" indent="-317500">
               <a:spcBef>
                 <a:spcPts val="0"/>
               </a:spcBef>
@@ -3819,7 +3912,7 @@
               <a:buChar char="■"/>
               <a:defRPr/>
             </a:lvl6pPr>
-            <a:lvl7pPr indent="-317500" lvl="6" marL="3200400">
+            <a:lvl7pPr marL="3200400" lvl="6" indent="-317500">
               <a:spcBef>
                 <a:spcPts val="0"/>
               </a:spcBef>
@@ -3830,7 +3923,7 @@
               <a:buChar char="●"/>
               <a:defRPr/>
             </a:lvl7pPr>
-            <a:lvl8pPr indent="-317500" lvl="7" marL="3657600">
+            <a:lvl8pPr marL="3657600" lvl="7" indent="-317500">
               <a:spcBef>
                 <a:spcPts val="0"/>
               </a:spcBef>
@@ -3841,7 +3934,7 @@
               <a:buChar char="○"/>
               <a:defRPr/>
             </a:lvl8pPr>
-            <a:lvl9pPr indent="-317500" lvl="8" marL="4114800">
+            <a:lvl9pPr marL="4114800" lvl="8" indent="-317500">
               <a:spcBef>
                 <a:spcPts val="0"/>
               </a:spcBef>
@@ -3853,15 +3946,19 @@
               <a:defRPr/>
             </a:lvl9pPr>
           </a:lstStyle>
-          <a:p/>
+          <a:p>
+            <a:endParaRPr/>
+          </a:p>
         </p:txBody>
       </p:sp>
       <p:sp>
         <p:nvSpPr>
           <p:cNvPr id="40" name="Google Shape;40;p9"/>
-          <p:cNvSpPr txBox="1"/>
+          <p:cNvSpPr txBox="1">
+            <a:spLocks noGrp="1"/>
+          </p:cNvSpPr>
           <p:nvPr>
-            <p:ph idx="12" type="sldNum"/>
+            <p:ph type="sldNum" idx="12"/>
           </p:nvPr>
         </p:nvSpPr>
         <p:spPr>
@@ -3874,7 +3971,7 @@
           </a:prstGeom>
         </p:spPr>
         <p:txBody>
-          <a:bodyPr anchorCtr="0" anchor="ctr" bIns="91425" lIns="91425" spcFirstLastPara="1" rIns="91425" wrap="square" tIns="91425">
+          <a:bodyPr spcFirstLastPara="1" wrap="square" lIns="91425" tIns="91425" rIns="91425" bIns="91425" anchor="ctr" anchorCtr="0">
             <a:normAutofit/>
           </a:bodyPr>
           <a:lstStyle>
@@ -3916,7 +4013,7 @@
             </a:lvl9pPr>
           </a:lstStyle>
           <a:p>
-            <a:pPr indent="0" lvl="0" marL="0" rtl="0" algn="r">
+            <a:pPr marL="0" lvl="0" indent="0" algn="r" rtl="0">
               <a:spcBef>
                 <a:spcPts val="0"/>
               </a:spcBef>
@@ -3927,7 +4024,7 @@
             </a:pPr>
             <a:fld id="{00000000-1234-1234-1234-123412341234}" type="slidenum">
               <a:rPr lang="pt-BR"/>
-              <a:t>‹#›</a:t>
+              <a:t>‹nº›</a:t>
             </a:fld>
             <a:endParaRPr/>
           </a:p>
@@ -3942,11 +4039,11 @@
 </file>
 
 <file path=ppt/slideLayouts/slideLayout9.xml><?xml version="1.0" encoding="utf-8"?>
-<p:sldLayout xmlns:a="http://schemas.openxmlformats.org/drawingml/2006/main" xmlns:r="http://schemas.openxmlformats.org/officeDocument/2006/relationships" xmlns:mc="http://schemas.openxmlformats.org/markup-compatibility/2006" xmlns:mv="urn:schemas-microsoft-com:mac:vml" xmlns:p="http://schemas.openxmlformats.org/presentationml/2006/main" xmlns:c="http://schemas.openxmlformats.org/drawingml/2006/chart" xmlns:dgm="http://schemas.openxmlformats.org/drawingml/2006/diagram" xmlns:o="urn:schemas-microsoft-com:office:office" xmlns:v="urn:schemas-microsoft-com:vml" xmlns:pvml="urn:schemas-microsoft-com:office:powerpoint" xmlns:com="http://schemas.openxmlformats.org/drawingml/2006/compatibility" xmlns:p14="http://schemas.microsoft.com/office/powerpoint/2010/main" xmlns:p15="http://schemas.microsoft.com/office/powerpoint/2012/main" xmlns:ahyp="http://schemas.microsoft.com/office/drawing/2018/hyperlinkcolor" matchingName="Caption">
+<p:sldLayout xmlns:a="http://schemas.openxmlformats.org/drawingml/2006/main" xmlns:r="http://schemas.openxmlformats.org/officeDocument/2006/relationships" xmlns:p="http://schemas.openxmlformats.org/presentationml/2006/main" matchingName="Caption">
   <p:cSld name="CAPTION_ONLY">
     <p:spTree>
       <p:nvGrpSpPr>
-        <p:cNvPr id="41" name="Shape 41"/>
+        <p:cNvPr id="1" name="Shape 41"/>
         <p:cNvGrpSpPr/>
         <p:nvPr/>
       </p:nvGrpSpPr>
@@ -3961,9 +4058,11 @@
       <p:sp>
         <p:nvSpPr>
           <p:cNvPr id="42" name="Google Shape;42;p10"/>
-          <p:cNvSpPr txBox="1"/>
+          <p:cNvSpPr txBox="1">
+            <a:spLocks noGrp="1"/>
+          </p:cNvSpPr>
           <p:nvPr>
-            <p:ph idx="1" type="body"/>
+            <p:ph type="body" idx="1"/>
           </p:nvPr>
         </p:nvSpPr>
         <p:spPr>
@@ -3976,11 +4075,11 @@
           </a:prstGeom>
         </p:spPr>
         <p:txBody>
-          <a:bodyPr anchorCtr="0" anchor="ctr" bIns="91425" lIns="91425" spcFirstLastPara="1" rIns="91425" wrap="square" tIns="91425">
+          <a:bodyPr spcFirstLastPara="1" wrap="square" lIns="91425" tIns="91425" rIns="91425" bIns="91425" anchor="ctr" anchorCtr="0">
             <a:normAutofit/>
           </a:bodyPr>
           <a:lstStyle>
-            <a:lvl1pPr indent="-228600" lvl="0" marL="457200">
+            <a:lvl1pPr marL="457200" lvl="0" indent="-228600">
               <a:lnSpc>
                 <a:spcPct val="100000"/>
               </a:lnSpc>
@@ -3995,15 +4094,19 @@
               <a:defRPr/>
             </a:lvl1pPr>
           </a:lstStyle>
-          <a:p/>
+          <a:p>
+            <a:endParaRPr/>
+          </a:p>
         </p:txBody>
       </p:sp>
       <p:sp>
         <p:nvSpPr>
           <p:cNvPr id="43" name="Google Shape;43;p10"/>
-          <p:cNvSpPr txBox="1"/>
+          <p:cNvSpPr txBox="1">
+            <a:spLocks noGrp="1"/>
+          </p:cNvSpPr>
           <p:nvPr>
-            <p:ph idx="12" type="sldNum"/>
+            <p:ph type="sldNum" idx="12"/>
           </p:nvPr>
         </p:nvSpPr>
         <p:spPr>
@@ -4016,7 +4119,7 @@
           </a:prstGeom>
         </p:spPr>
         <p:txBody>
-          <a:bodyPr anchorCtr="0" anchor="ctr" bIns="91425" lIns="91425" spcFirstLastPara="1" rIns="91425" wrap="square" tIns="91425">
+          <a:bodyPr spcFirstLastPara="1" wrap="square" lIns="91425" tIns="91425" rIns="91425" bIns="91425" anchor="ctr" anchorCtr="0">
             <a:normAutofit/>
           </a:bodyPr>
           <a:lstStyle>
@@ -4058,7 +4161,7 @@
             </a:lvl9pPr>
           </a:lstStyle>
           <a:p>
-            <a:pPr indent="0" lvl="0" marL="0" rtl="0" algn="r">
+            <a:pPr marL="0" lvl="0" indent="0" algn="r" rtl="0">
               <a:spcBef>
                 <a:spcPts val="0"/>
               </a:spcBef>
@@ -4069,7 +4172,7 @@
             </a:pPr>
             <a:fld id="{00000000-1234-1234-1234-123412341234}" type="slidenum">
               <a:rPr lang="pt-BR"/>
-              <a:t>‹#›</a:t>
+              <a:t>‹nº›</a:t>
             </a:fld>
             <a:endParaRPr/>
           </a:p>
@@ -4084,18 +4187,19 @@
 </file>
 
 <file path=ppt/slideMasters/slideMaster1.xml><?xml version="1.0" encoding="utf-8"?>
-<p:sldMaster xmlns:a="http://schemas.openxmlformats.org/drawingml/2006/main" xmlns:r="http://schemas.openxmlformats.org/officeDocument/2006/relationships" xmlns:mc="http://schemas.openxmlformats.org/markup-compatibility/2006" xmlns:mv="urn:schemas-microsoft-com:mac:vml" xmlns:p="http://schemas.openxmlformats.org/presentationml/2006/main" xmlns:c="http://schemas.openxmlformats.org/drawingml/2006/chart" xmlns:dgm="http://schemas.openxmlformats.org/drawingml/2006/diagram" xmlns:o="urn:schemas-microsoft-com:office:office" xmlns:v="urn:schemas-microsoft-com:vml" xmlns:pvml="urn:schemas-microsoft-com:office:powerpoint" xmlns:com="http://schemas.openxmlformats.org/drawingml/2006/compatibility" xmlns:p14="http://schemas.microsoft.com/office/powerpoint/2010/main" xmlns:p15="http://schemas.microsoft.com/office/powerpoint/2012/main" xmlns:ahyp="http://schemas.microsoft.com/office/drawing/2018/hyperlinkcolor">
+<p:sldMaster xmlns:a="http://schemas.openxmlformats.org/drawingml/2006/main" xmlns:r="http://schemas.openxmlformats.org/officeDocument/2006/relationships" xmlns:p="http://schemas.openxmlformats.org/presentationml/2006/main">
   <p:cSld name="simple-light-2">
     <p:bg>
       <p:bgPr>
         <a:solidFill>
           <a:schemeClr val="lt1"/>
         </a:solidFill>
+        <a:effectLst/>
       </p:bgPr>
     </p:bg>
     <p:spTree>
       <p:nvGrpSpPr>
-        <p:cNvPr id="5" name="Shape 5"/>
+        <p:cNvPr id="1" name="Shape 5"/>
         <p:cNvGrpSpPr/>
         <p:nvPr/>
       </p:nvGrpSpPr>
@@ -4110,7 +4214,9 @@
       <p:sp>
         <p:nvSpPr>
           <p:cNvPr id="6" name="Google Shape;6;p1"/>
-          <p:cNvSpPr txBox="1"/>
+          <p:cNvSpPr txBox="1">
+            <a:spLocks noGrp="1"/>
+          </p:cNvSpPr>
           <p:nvPr>
             <p:ph type="title"/>
           </p:nvPr>
@@ -4129,7 +4235,7 @@
           </a:ln>
         </p:spPr>
         <p:txBody>
-          <a:bodyPr anchorCtr="0" anchor="t" bIns="91425" lIns="91425" spcFirstLastPara="1" rIns="91425" wrap="square" tIns="91425">
+          <a:bodyPr spcFirstLastPara="1" wrap="square" lIns="91425" tIns="91425" rIns="91425" bIns="91425" anchor="t" anchorCtr="0">
             <a:normAutofit/>
           </a:bodyPr>
           <a:lstStyle>
@@ -4296,15 +4402,19 @@
               </a:defRPr>
             </a:lvl9pPr>
           </a:lstStyle>
-          <a:p/>
+          <a:p>
+            <a:endParaRPr/>
+          </a:p>
         </p:txBody>
       </p:sp>
       <p:sp>
         <p:nvSpPr>
           <p:cNvPr id="7" name="Google Shape;7;p1"/>
-          <p:cNvSpPr txBox="1"/>
+          <p:cNvSpPr txBox="1">
+            <a:spLocks noGrp="1"/>
+          </p:cNvSpPr>
           <p:nvPr>
-            <p:ph idx="1" type="body"/>
+            <p:ph type="body" idx="1"/>
           </p:nvPr>
         </p:nvSpPr>
         <p:spPr>
@@ -4321,11 +4431,11 @@
           </a:ln>
         </p:spPr>
         <p:txBody>
-          <a:bodyPr anchorCtr="0" anchor="t" bIns="91425" lIns="91425" spcFirstLastPara="1" rIns="91425" wrap="square" tIns="91425">
+          <a:bodyPr spcFirstLastPara="1" wrap="square" lIns="91425" tIns="91425" rIns="91425" bIns="91425" anchor="t" anchorCtr="0">
             <a:normAutofit/>
           </a:bodyPr>
           <a:lstStyle>
-            <a:lvl1pPr indent="-342900" lvl="0" marL="457200">
+            <a:lvl1pPr marL="457200" lvl="0" indent="-342900">
               <a:lnSpc>
                 <a:spcPct val="115000"/>
               </a:lnSpc>
@@ -4346,7 +4456,7 @@
                 </a:solidFill>
               </a:defRPr>
             </a:lvl1pPr>
-            <a:lvl2pPr indent="-317500" lvl="1" marL="914400">
+            <a:lvl2pPr marL="914400" lvl="1" indent="-317500">
               <a:lnSpc>
                 <a:spcPct val="115000"/>
               </a:lnSpc>
@@ -4367,7 +4477,7 @@
                 </a:solidFill>
               </a:defRPr>
             </a:lvl2pPr>
-            <a:lvl3pPr indent="-317500" lvl="2" marL="1371600">
+            <a:lvl3pPr marL="1371600" lvl="2" indent="-317500">
               <a:lnSpc>
                 <a:spcPct val="115000"/>
               </a:lnSpc>
@@ -4388,7 +4498,7 @@
                 </a:solidFill>
               </a:defRPr>
             </a:lvl3pPr>
-            <a:lvl4pPr indent="-317500" lvl="3" marL="1828800">
+            <a:lvl4pPr marL="1828800" lvl="3" indent="-317500">
               <a:lnSpc>
                 <a:spcPct val="115000"/>
               </a:lnSpc>
@@ -4409,7 +4519,7 @@
                 </a:solidFill>
               </a:defRPr>
             </a:lvl4pPr>
-            <a:lvl5pPr indent="-317500" lvl="4" marL="2286000">
+            <a:lvl5pPr marL="2286000" lvl="4" indent="-317500">
               <a:lnSpc>
                 <a:spcPct val="115000"/>
               </a:lnSpc>
@@ -4430,7 +4540,7 @@
                 </a:solidFill>
               </a:defRPr>
             </a:lvl5pPr>
-            <a:lvl6pPr indent="-317500" lvl="5" marL="2743200">
+            <a:lvl6pPr marL="2743200" lvl="5" indent="-317500">
               <a:lnSpc>
                 <a:spcPct val="115000"/>
               </a:lnSpc>
@@ -4451,7 +4561,7 @@
                 </a:solidFill>
               </a:defRPr>
             </a:lvl6pPr>
-            <a:lvl7pPr indent="-317500" lvl="6" marL="3200400">
+            <a:lvl7pPr marL="3200400" lvl="6" indent="-317500">
               <a:lnSpc>
                 <a:spcPct val="115000"/>
               </a:lnSpc>
@@ -4472,7 +4582,7 @@
                 </a:solidFill>
               </a:defRPr>
             </a:lvl7pPr>
-            <a:lvl8pPr indent="-317500" lvl="7" marL="3657600">
+            <a:lvl8pPr marL="3657600" lvl="7" indent="-317500">
               <a:lnSpc>
                 <a:spcPct val="115000"/>
               </a:lnSpc>
@@ -4493,7 +4603,7 @@
                 </a:solidFill>
               </a:defRPr>
             </a:lvl8pPr>
-            <a:lvl9pPr indent="-317500" lvl="8" marL="4114800">
+            <a:lvl9pPr marL="4114800" lvl="8" indent="-317500">
               <a:lnSpc>
                 <a:spcPct val="115000"/>
               </a:lnSpc>
@@ -4515,15 +4625,19 @@
               </a:defRPr>
             </a:lvl9pPr>
           </a:lstStyle>
-          <a:p/>
+          <a:p>
+            <a:endParaRPr/>
+          </a:p>
         </p:txBody>
       </p:sp>
       <p:sp>
         <p:nvSpPr>
           <p:cNvPr id="8" name="Google Shape;8;p1"/>
-          <p:cNvSpPr txBox="1"/>
+          <p:cNvSpPr txBox="1">
+            <a:spLocks noGrp="1"/>
+          </p:cNvSpPr>
           <p:nvPr>
-            <p:ph idx="12" type="sldNum"/>
+            <p:ph type="sldNum" idx="12"/>
           </p:nvPr>
         </p:nvSpPr>
         <p:spPr>
@@ -4540,7 +4654,7 @@
           </a:ln>
         </p:spPr>
         <p:txBody>
-          <a:bodyPr anchorCtr="0" anchor="ctr" bIns="91425" lIns="91425" spcFirstLastPara="1" rIns="91425" wrap="square" tIns="91425">
+          <a:bodyPr spcFirstLastPara="1" wrap="square" lIns="91425" tIns="91425" rIns="91425" bIns="91425" anchor="ctr" anchorCtr="0">
             <a:normAutofit/>
           </a:bodyPr>
           <a:lstStyle>
@@ -4618,7 +4732,7 @@
             </a:lvl9pPr>
           </a:lstStyle>
           <a:p>
-            <a:pPr indent="0" lvl="0" marL="0" rtl="0" algn="r">
+            <a:pPr marL="0" lvl="0" indent="0" algn="r" rtl="0">
               <a:spcBef>
                 <a:spcPts val="0"/>
               </a:spcBef>
@@ -4629,7 +4743,7 @@
             </a:pPr>
             <a:fld id="{00000000-1234-1234-1234-123412341234}" type="slidenum">
               <a:rPr lang="pt-BR"/>
-              <a:t>‹#›</a:t>
+              <a:t>‹nº›</a:t>
             </a:fld>
             <a:endParaRPr/>
           </a:p>
@@ -4637,7 +4751,7 @@
       </p:sp>
     </p:spTree>
   </p:cSld>
-  <p:clrMap accent1="accent1" accent2="accent2" accent3="accent3" accent4="accent4" accent5="accent5" accent6="accent6" bg1="lt1" bg2="dk2" tx1="dk1" tx2="lt2" folHlink="folHlink" hlink="hlink"/>
+  <p:clrMap bg1="lt1" tx1="dk1" bg2="dk2" tx2="lt2" accent1="accent1" accent2="accent2" accent3="accent3" accent4="accent4" accent5="accent5" accent6="accent6" hlink="hlink" folHlink="folHlink"/>
   <p:sldLayoutIdLst>
     <p:sldLayoutId id="2147483648" r:id="rId1"/>
     <p:sldLayoutId id="2147483649" r:id="rId2"/>
@@ -4651,10 +4765,10 @@
     <p:sldLayoutId id="2147483657" r:id="rId10"/>
     <p:sldLayoutId id="2147483658" r:id="rId11"/>
   </p:sldLayoutIdLst>
-  <p:hf dt="0" ftr="0" hdr="0" sldNum="0"/>
+  <p:hf sldNum="0" hdr="0" ftr="0" dt="0"/>
   <p:txStyles>
     <p:titleStyle>
-      <a:defPPr lvl="0" marR="0" rtl="0" algn="l">
+      <a:defPPr marR="0" lvl="0" algn="l" rtl="0">
         <a:lnSpc>
           <a:spcPct val="100000"/>
         </a:lnSpc>
@@ -4665,7 +4779,7 @@
           <a:spcPts val="0"/>
         </a:spcAft>
       </a:defPPr>
-      <a:lvl1pPr lvl="0" marR="0" rtl="0" algn="l">
+      <a:lvl1pPr marR="0" lvl="0" algn="l" rtl="0">
         <a:lnSpc>
           <a:spcPct val="100000"/>
         </a:lnSpc>
@@ -4679,7 +4793,7 @@
           <a:srgbClr val="000000"/>
         </a:buClr>
         <a:buFont typeface="Arial"/>
-        <a:defRPr b="0" i="0" spc="0" sz="1400" u="none" cap="none" strike="noStrike">
+        <a:defRPr sz="1400" b="0" i="0" u="none" strike="noStrike" cap="none" spc="0">
           <a:solidFill>
             <a:srgbClr val="000000"/>
           </a:solidFill>
@@ -4689,7 +4803,7 @@
           <a:sym typeface="Arial"/>
         </a:defRPr>
       </a:lvl1pPr>
-      <a:lvl2pPr lvl="1" marR="0" rtl="0" algn="l">
+      <a:lvl2pPr marR="0" lvl="1" algn="l" rtl="0">
         <a:lnSpc>
           <a:spcPct val="100000"/>
         </a:lnSpc>
@@ -4703,7 +4817,7 @@
           <a:srgbClr val="000000"/>
         </a:buClr>
         <a:buFont typeface="Arial"/>
-        <a:defRPr b="0" i="0" spc="0" sz="1400" u="none" cap="none" strike="noStrike">
+        <a:defRPr sz="1400" b="0" i="0" u="none" strike="noStrike" cap="none" spc="0">
           <a:solidFill>
             <a:srgbClr val="000000"/>
           </a:solidFill>
@@ -4713,7 +4827,7 @@
           <a:sym typeface="Arial"/>
         </a:defRPr>
       </a:lvl2pPr>
-      <a:lvl3pPr lvl="2" marR="0" rtl="0" algn="l">
+      <a:lvl3pPr marR="0" lvl="2" algn="l" rtl="0">
         <a:lnSpc>
           <a:spcPct val="100000"/>
         </a:lnSpc>
@@ -4727,7 +4841,7 @@
           <a:srgbClr val="000000"/>
         </a:buClr>
         <a:buFont typeface="Arial"/>
-        <a:defRPr b="0" i="0" spc="0" sz="1400" u="none" cap="none" strike="noStrike">
+        <a:defRPr sz="1400" b="0" i="0" u="none" strike="noStrike" cap="none" spc="0">
           <a:solidFill>
             <a:srgbClr val="000000"/>
           </a:solidFill>
@@ -4737,7 +4851,7 @@
           <a:sym typeface="Arial"/>
         </a:defRPr>
       </a:lvl3pPr>
-      <a:lvl4pPr lvl="3" marR="0" rtl="0" algn="l">
+      <a:lvl4pPr marR="0" lvl="3" algn="l" rtl="0">
         <a:lnSpc>
           <a:spcPct val="100000"/>
         </a:lnSpc>
@@ -4751,7 +4865,7 @@
           <a:srgbClr val="000000"/>
         </a:buClr>
         <a:buFont typeface="Arial"/>
-        <a:defRPr b="0" i="0" spc="0" sz="1400" u="none" cap="none" strike="noStrike">
+        <a:defRPr sz="1400" b="0" i="0" u="none" strike="noStrike" cap="none" spc="0">
           <a:solidFill>
             <a:srgbClr val="000000"/>
           </a:solidFill>
@@ -4761,7 +4875,7 @@
           <a:sym typeface="Arial"/>
         </a:defRPr>
       </a:lvl4pPr>
-      <a:lvl5pPr lvl="4" marR="0" rtl="0" algn="l">
+      <a:lvl5pPr marR="0" lvl="4" algn="l" rtl="0">
         <a:lnSpc>
           <a:spcPct val="100000"/>
         </a:lnSpc>
@@ -4775,7 +4889,7 @@
           <a:srgbClr val="000000"/>
         </a:buClr>
         <a:buFont typeface="Arial"/>
-        <a:defRPr b="0" i="0" spc="0" sz="1400" u="none" cap="none" strike="noStrike">
+        <a:defRPr sz="1400" b="0" i="0" u="none" strike="noStrike" cap="none" spc="0">
           <a:solidFill>
             <a:srgbClr val="000000"/>
           </a:solidFill>
@@ -4785,7 +4899,7 @@
           <a:sym typeface="Arial"/>
         </a:defRPr>
       </a:lvl5pPr>
-      <a:lvl6pPr lvl="5" marR="0" rtl="0" algn="l">
+      <a:lvl6pPr marR="0" lvl="5" algn="l" rtl="0">
         <a:lnSpc>
           <a:spcPct val="100000"/>
         </a:lnSpc>
@@ -4799,7 +4913,7 @@
           <a:srgbClr val="000000"/>
         </a:buClr>
         <a:buFont typeface="Arial"/>
-        <a:defRPr b="0" i="0" spc="0" sz="1400" u="none" cap="none" strike="noStrike">
+        <a:defRPr sz="1400" b="0" i="0" u="none" strike="noStrike" cap="none" spc="0">
           <a:solidFill>
             <a:srgbClr val="000000"/>
           </a:solidFill>
@@ -4809,7 +4923,7 @@
           <a:sym typeface="Arial"/>
         </a:defRPr>
       </a:lvl6pPr>
-      <a:lvl7pPr lvl="6" marR="0" rtl="0" algn="l">
+      <a:lvl7pPr marR="0" lvl="6" algn="l" rtl="0">
         <a:lnSpc>
           <a:spcPct val="100000"/>
         </a:lnSpc>
@@ -4823,7 +4937,7 @@
           <a:srgbClr val="000000"/>
         </a:buClr>
         <a:buFont typeface="Arial"/>
-        <a:defRPr b="0" i="0" spc="0" sz="1400" u="none" cap="none" strike="noStrike">
+        <a:defRPr sz="1400" b="0" i="0" u="none" strike="noStrike" cap="none" spc="0">
           <a:solidFill>
             <a:srgbClr val="000000"/>
           </a:solidFill>
@@ -4833,7 +4947,7 @@
           <a:sym typeface="Arial"/>
         </a:defRPr>
       </a:lvl7pPr>
-      <a:lvl8pPr lvl="7" marR="0" rtl="0" algn="l">
+      <a:lvl8pPr marR="0" lvl="7" algn="l" rtl="0">
         <a:lnSpc>
           <a:spcPct val="100000"/>
         </a:lnSpc>
@@ -4847,7 +4961,7 @@
           <a:srgbClr val="000000"/>
         </a:buClr>
         <a:buFont typeface="Arial"/>
-        <a:defRPr b="0" i="0" spc="0" sz="1400" u="none" cap="none" strike="noStrike">
+        <a:defRPr sz="1400" b="0" i="0" u="none" strike="noStrike" cap="none" spc="0">
           <a:solidFill>
             <a:srgbClr val="000000"/>
           </a:solidFill>
@@ -4857,7 +4971,7 @@
           <a:sym typeface="Arial"/>
         </a:defRPr>
       </a:lvl8pPr>
-      <a:lvl9pPr lvl="8" marR="0" rtl="0" algn="l">
+      <a:lvl9pPr marR="0" lvl="8" algn="l" rtl="0">
         <a:lnSpc>
           <a:spcPct val="100000"/>
         </a:lnSpc>
@@ -4871,7 +4985,7 @@
           <a:srgbClr val="000000"/>
         </a:buClr>
         <a:buFont typeface="Arial"/>
-        <a:defRPr b="0" i="0" spc="0" sz="1400" u="none" cap="none" strike="noStrike">
+        <a:defRPr sz="1400" b="0" i="0" u="none" strike="noStrike" cap="none" spc="0">
           <a:solidFill>
             <a:srgbClr val="000000"/>
           </a:solidFill>
@@ -4883,7 +4997,7 @@
       </a:lvl9pPr>
     </p:titleStyle>
     <p:bodyStyle>
-      <a:defPPr lvl="0" marR="0" rtl="0" algn="l">
+      <a:defPPr marR="0" lvl="0" algn="l" rtl="0">
         <a:lnSpc>
           <a:spcPct val="100000"/>
         </a:lnSpc>
@@ -4894,7 +5008,7 @@
           <a:spcPts val="0"/>
         </a:spcAft>
       </a:defPPr>
-      <a:lvl1pPr lvl="0" marR="0" rtl="0" algn="l">
+      <a:lvl1pPr marR="0" lvl="0" algn="l" rtl="0">
         <a:lnSpc>
           <a:spcPct val="100000"/>
         </a:lnSpc>
@@ -4908,7 +5022,7 @@
           <a:srgbClr val="000000"/>
         </a:buClr>
         <a:buFont typeface="Arial"/>
-        <a:defRPr b="0" i="0" spc="0" sz="1400" u="none" cap="none" strike="noStrike">
+        <a:defRPr sz="1400" b="0" i="0" u="none" strike="noStrike" cap="none" spc="0">
           <a:solidFill>
             <a:srgbClr val="000000"/>
           </a:solidFill>
@@ -4918,7 +5032,7 @@
           <a:sym typeface="Arial"/>
         </a:defRPr>
       </a:lvl1pPr>
-      <a:lvl2pPr lvl="1" marR="0" rtl="0" algn="l">
+      <a:lvl2pPr marR="0" lvl="1" algn="l" rtl="0">
         <a:lnSpc>
           <a:spcPct val="100000"/>
         </a:lnSpc>
@@ -4932,7 +5046,7 @@
           <a:srgbClr val="000000"/>
         </a:buClr>
         <a:buFont typeface="Arial"/>
-        <a:defRPr b="0" i="0" spc="0" sz="1400" u="none" cap="none" strike="noStrike">
+        <a:defRPr sz="1400" b="0" i="0" u="none" strike="noStrike" cap="none" spc="0">
           <a:solidFill>
             <a:srgbClr val="000000"/>
           </a:solidFill>
@@ -4942,7 +5056,7 @@
           <a:sym typeface="Arial"/>
         </a:defRPr>
       </a:lvl2pPr>
-      <a:lvl3pPr lvl="2" marR="0" rtl="0" algn="l">
+      <a:lvl3pPr marR="0" lvl="2" algn="l" rtl="0">
         <a:lnSpc>
           <a:spcPct val="100000"/>
         </a:lnSpc>
@@ -4956,7 +5070,7 @@
           <a:srgbClr val="000000"/>
         </a:buClr>
         <a:buFont typeface="Arial"/>
-        <a:defRPr b="0" i="0" spc="0" sz="1400" u="none" cap="none" strike="noStrike">
+        <a:defRPr sz="1400" b="0" i="0" u="none" strike="noStrike" cap="none" spc="0">
           <a:solidFill>
             <a:srgbClr val="000000"/>
           </a:solidFill>
@@ -4966,7 +5080,7 @@
           <a:sym typeface="Arial"/>
         </a:defRPr>
       </a:lvl3pPr>
-      <a:lvl4pPr lvl="3" marR="0" rtl="0" algn="l">
+      <a:lvl4pPr marR="0" lvl="3" algn="l" rtl="0">
         <a:lnSpc>
           <a:spcPct val="100000"/>
         </a:lnSpc>
@@ -4980,7 +5094,7 @@
           <a:srgbClr val="000000"/>
         </a:buClr>
         <a:buFont typeface="Arial"/>
-        <a:defRPr b="0" i="0" spc="0" sz="1400" u="none" cap="none" strike="noStrike">
+        <a:defRPr sz="1400" b="0" i="0" u="none" strike="noStrike" cap="none" spc="0">
           <a:solidFill>
             <a:srgbClr val="000000"/>
           </a:solidFill>
@@ -4990,7 +5104,7 @@
           <a:sym typeface="Arial"/>
         </a:defRPr>
       </a:lvl4pPr>
-      <a:lvl5pPr lvl="4" marR="0" rtl="0" algn="l">
+      <a:lvl5pPr marR="0" lvl="4" algn="l" rtl="0">
         <a:lnSpc>
           <a:spcPct val="100000"/>
         </a:lnSpc>
@@ -5004,7 +5118,7 @@
           <a:srgbClr val="000000"/>
         </a:buClr>
         <a:buFont typeface="Arial"/>
-        <a:defRPr b="0" i="0" spc="0" sz="1400" u="none" cap="none" strike="noStrike">
+        <a:defRPr sz="1400" b="0" i="0" u="none" strike="noStrike" cap="none" spc="0">
           <a:solidFill>
             <a:srgbClr val="000000"/>
           </a:solidFill>
@@ -5014,7 +5128,7 @@
           <a:sym typeface="Arial"/>
         </a:defRPr>
       </a:lvl5pPr>
-      <a:lvl6pPr lvl="5" marR="0" rtl="0" algn="l">
+      <a:lvl6pPr marR="0" lvl="5" algn="l" rtl="0">
         <a:lnSpc>
           <a:spcPct val="100000"/>
         </a:lnSpc>
@@ -5028,7 +5142,7 @@
           <a:srgbClr val="000000"/>
         </a:buClr>
         <a:buFont typeface="Arial"/>
-        <a:defRPr b="0" i="0" spc="0" sz="1400" u="none" cap="none" strike="noStrike">
+        <a:defRPr sz="1400" b="0" i="0" u="none" strike="noStrike" cap="none" spc="0">
           <a:solidFill>
             <a:srgbClr val="000000"/>
           </a:solidFill>
@@ -5038,7 +5152,7 @@
           <a:sym typeface="Arial"/>
         </a:defRPr>
       </a:lvl6pPr>
-      <a:lvl7pPr lvl="6" marR="0" rtl="0" algn="l">
+      <a:lvl7pPr marR="0" lvl="6" algn="l" rtl="0">
         <a:lnSpc>
           <a:spcPct val="100000"/>
         </a:lnSpc>
@@ -5052,7 +5166,7 @@
           <a:srgbClr val="000000"/>
         </a:buClr>
         <a:buFont typeface="Arial"/>
-        <a:defRPr b="0" i="0" spc="0" sz="1400" u="none" cap="none" strike="noStrike">
+        <a:defRPr sz="1400" b="0" i="0" u="none" strike="noStrike" cap="none" spc="0">
           <a:solidFill>
             <a:srgbClr val="000000"/>
           </a:solidFill>
@@ -5062,7 +5176,7 @@
           <a:sym typeface="Arial"/>
         </a:defRPr>
       </a:lvl7pPr>
-      <a:lvl8pPr lvl="7" marR="0" rtl="0" algn="l">
+      <a:lvl8pPr marR="0" lvl="7" algn="l" rtl="0">
         <a:lnSpc>
           <a:spcPct val="100000"/>
         </a:lnSpc>
@@ -5076,7 +5190,7 @@
           <a:srgbClr val="000000"/>
         </a:buClr>
         <a:buFont typeface="Arial"/>
-        <a:defRPr b="0" i="0" spc="0" sz="1400" u="none" cap="none" strike="noStrike">
+        <a:defRPr sz="1400" b="0" i="0" u="none" strike="noStrike" cap="none" spc="0">
           <a:solidFill>
             <a:srgbClr val="000000"/>
           </a:solidFill>
@@ -5086,7 +5200,7 @@
           <a:sym typeface="Arial"/>
         </a:defRPr>
       </a:lvl8pPr>
-      <a:lvl9pPr lvl="8" marR="0" rtl="0" algn="l">
+      <a:lvl9pPr marR="0" lvl="8" algn="l" rtl="0">
         <a:lnSpc>
           <a:spcPct val="100000"/>
         </a:lnSpc>
@@ -5100,7 +5214,7 @@
           <a:srgbClr val="000000"/>
         </a:buClr>
         <a:buFont typeface="Arial"/>
-        <a:defRPr b="0" i="0" spc="0" sz="1400" u="none" cap="none" strike="noStrike">
+        <a:defRPr sz="1400" b="0" i="0" u="none" strike="noStrike" cap="none" spc="0">
           <a:solidFill>
             <a:srgbClr val="000000"/>
           </a:solidFill>
@@ -5112,7 +5226,7 @@
       </a:lvl9pPr>
     </p:bodyStyle>
     <p:otherStyle>
-      <a:defPPr lvl="0" marR="0" rtl="0" algn="l">
+      <a:defPPr marR="0" lvl="0" algn="l" rtl="0">
         <a:lnSpc>
           <a:spcPct val="100000"/>
         </a:lnSpc>
@@ -5123,7 +5237,7 @@
           <a:spcPts val="0"/>
         </a:spcAft>
       </a:defPPr>
-      <a:lvl1pPr lvl="0" marR="0" rtl="0" algn="l">
+      <a:lvl1pPr marR="0" lvl="0" algn="l" rtl="0">
         <a:lnSpc>
           <a:spcPct val="100000"/>
         </a:lnSpc>
@@ -5137,7 +5251,7 @@
           <a:srgbClr val="000000"/>
         </a:buClr>
         <a:buFont typeface="Arial"/>
-        <a:defRPr b="0" i="0" spc="0" sz="1400" u="none" cap="none" strike="noStrike">
+        <a:defRPr sz="1400" b="0" i="0" u="none" strike="noStrike" cap="none" spc="0">
           <a:solidFill>
             <a:srgbClr val="000000"/>
           </a:solidFill>
@@ -5147,7 +5261,7 @@
           <a:sym typeface="Arial"/>
         </a:defRPr>
       </a:lvl1pPr>
-      <a:lvl2pPr lvl="1" marR="0" rtl="0" algn="l">
+      <a:lvl2pPr marR="0" lvl="1" algn="l" rtl="0">
         <a:lnSpc>
           <a:spcPct val="100000"/>
         </a:lnSpc>
@@ -5161,7 +5275,7 @@
           <a:srgbClr val="000000"/>
         </a:buClr>
         <a:buFont typeface="Arial"/>
-        <a:defRPr b="0" i="0" spc="0" sz="1400" u="none" cap="none" strike="noStrike">
+        <a:defRPr sz="1400" b="0" i="0" u="none" strike="noStrike" cap="none" spc="0">
           <a:solidFill>
             <a:srgbClr val="000000"/>
           </a:solidFill>
@@ -5171,7 +5285,7 @@
           <a:sym typeface="Arial"/>
         </a:defRPr>
       </a:lvl2pPr>
-      <a:lvl3pPr lvl="2" marR="0" rtl="0" algn="l">
+      <a:lvl3pPr marR="0" lvl="2" algn="l" rtl="0">
         <a:lnSpc>
           <a:spcPct val="100000"/>
         </a:lnSpc>
@@ -5185,7 +5299,7 @@
           <a:srgbClr val="000000"/>
         </a:buClr>
         <a:buFont typeface="Arial"/>
-        <a:defRPr b="0" i="0" spc="0" sz="1400" u="none" cap="none" strike="noStrike">
+        <a:defRPr sz="1400" b="0" i="0" u="none" strike="noStrike" cap="none" spc="0">
           <a:solidFill>
             <a:srgbClr val="000000"/>
           </a:solidFill>
@@ -5195,7 +5309,7 @@
           <a:sym typeface="Arial"/>
         </a:defRPr>
       </a:lvl3pPr>
-      <a:lvl4pPr lvl="3" marR="0" rtl="0" algn="l">
+      <a:lvl4pPr marR="0" lvl="3" algn="l" rtl="0">
         <a:lnSpc>
           <a:spcPct val="100000"/>
         </a:lnSpc>
@@ -5209,7 +5323,7 @@
           <a:srgbClr val="000000"/>
         </a:buClr>
         <a:buFont typeface="Arial"/>
-        <a:defRPr b="0" i="0" spc="0" sz="1400" u="none" cap="none" strike="noStrike">
+        <a:defRPr sz="1400" b="0" i="0" u="none" strike="noStrike" cap="none" spc="0">
           <a:solidFill>
             <a:srgbClr val="000000"/>
           </a:solidFill>
@@ -5219,7 +5333,7 @@
           <a:sym typeface="Arial"/>
         </a:defRPr>
       </a:lvl4pPr>
-      <a:lvl5pPr lvl="4" marR="0" rtl="0" algn="l">
+      <a:lvl5pPr marR="0" lvl="4" algn="l" rtl="0">
         <a:lnSpc>
           <a:spcPct val="100000"/>
         </a:lnSpc>
@@ -5233,7 +5347,7 @@
           <a:srgbClr val="000000"/>
         </a:buClr>
         <a:buFont typeface="Arial"/>
-        <a:defRPr b="0" i="0" spc="0" sz="1400" u="none" cap="none" strike="noStrike">
+        <a:defRPr sz="1400" b="0" i="0" u="none" strike="noStrike" cap="none" spc="0">
           <a:solidFill>
             <a:srgbClr val="000000"/>
           </a:solidFill>
@@ -5243,7 +5357,7 @@
           <a:sym typeface="Arial"/>
         </a:defRPr>
       </a:lvl5pPr>
-      <a:lvl6pPr lvl="5" marR="0" rtl="0" algn="l">
+      <a:lvl6pPr marR="0" lvl="5" algn="l" rtl="0">
         <a:lnSpc>
           <a:spcPct val="100000"/>
         </a:lnSpc>
@@ -5257,7 +5371,7 @@
           <a:srgbClr val="000000"/>
         </a:buClr>
         <a:buFont typeface="Arial"/>
-        <a:defRPr b="0" i="0" spc="0" sz="1400" u="none" cap="none" strike="noStrike">
+        <a:defRPr sz="1400" b="0" i="0" u="none" strike="noStrike" cap="none" spc="0">
           <a:solidFill>
             <a:srgbClr val="000000"/>
           </a:solidFill>
@@ -5267,7 +5381,7 @@
           <a:sym typeface="Arial"/>
         </a:defRPr>
       </a:lvl6pPr>
-      <a:lvl7pPr lvl="6" marR="0" rtl="0" algn="l">
+      <a:lvl7pPr marR="0" lvl="6" algn="l" rtl="0">
         <a:lnSpc>
           <a:spcPct val="100000"/>
         </a:lnSpc>
@@ -5281,7 +5395,7 @@
           <a:srgbClr val="000000"/>
         </a:buClr>
         <a:buFont typeface="Arial"/>
-        <a:defRPr b="0" i="0" spc="0" sz="1400" u="none" cap="none" strike="noStrike">
+        <a:defRPr sz="1400" b="0" i="0" u="none" strike="noStrike" cap="none" spc="0">
           <a:solidFill>
             <a:srgbClr val="000000"/>
           </a:solidFill>
@@ -5291,7 +5405,7 @@
           <a:sym typeface="Arial"/>
         </a:defRPr>
       </a:lvl7pPr>
-      <a:lvl8pPr lvl="7" marR="0" rtl="0" algn="l">
+      <a:lvl8pPr marR="0" lvl="7" algn="l" rtl="0">
         <a:lnSpc>
           <a:spcPct val="100000"/>
         </a:lnSpc>
@@ -5305,7 +5419,7 @@
           <a:srgbClr val="000000"/>
         </a:buClr>
         <a:buFont typeface="Arial"/>
-        <a:defRPr b="0" i="0" spc="0" sz="1400" u="none" cap="none" strike="noStrike">
+        <a:defRPr sz="1400" b="0" i="0" u="none" strike="noStrike" cap="none" spc="0">
           <a:solidFill>
             <a:srgbClr val="000000"/>
           </a:solidFill>
@@ -5315,7 +5429,7 @@
           <a:sym typeface="Arial"/>
         </a:defRPr>
       </a:lvl8pPr>
-      <a:lvl9pPr lvl="8" marR="0" rtl="0" algn="l">
+      <a:lvl9pPr marR="0" lvl="8" algn="l" rtl="0">
         <a:lnSpc>
           <a:spcPct val="100000"/>
         </a:lnSpc>
@@ -5329,7 +5443,7 @@
           <a:srgbClr val="000000"/>
         </a:buClr>
         <a:buFont typeface="Arial"/>
-        <a:defRPr b="0" i="0" spc="0" sz="1400" u="none" cap="none" strike="noStrike">
+        <a:defRPr sz="1400" b="0" i="0" u="none" strike="noStrike" cap="none" spc="0">
           <a:solidFill>
             <a:srgbClr val="000000"/>
           </a:solidFill>
@@ -5345,23 +5459,24 @@
 </file>
 
 <file path=ppt/slides/slide1.xml><?xml version="1.0" encoding="utf-8"?>
-<p:sld xmlns:a="http://schemas.openxmlformats.org/drawingml/2006/main" xmlns:r="http://schemas.openxmlformats.org/officeDocument/2006/relationships" xmlns:mc="http://schemas.openxmlformats.org/markup-compatibility/2006" xmlns:mv="urn:schemas-microsoft-com:mac:vml" xmlns:p="http://schemas.openxmlformats.org/presentationml/2006/main" xmlns:c="http://schemas.openxmlformats.org/drawingml/2006/chart" xmlns:dgm="http://schemas.openxmlformats.org/drawingml/2006/diagram" xmlns:o="urn:schemas-microsoft-com:office:office" xmlns:v="urn:schemas-microsoft-com:vml" xmlns:pvml="urn:schemas-microsoft-com:office:powerpoint" xmlns:com="http://schemas.openxmlformats.org/drawingml/2006/compatibility" xmlns:p14="http://schemas.microsoft.com/office/powerpoint/2010/main" xmlns:p15="http://schemas.microsoft.com/office/powerpoint/2012/main" xmlns:ahyp="http://schemas.microsoft.com/office/drawing/2018/hyperlinkcolor">
+<p:sld xmlns:a="http://schemas.openxmlformats.org/drawingml/2006/main" xmlns:r="http://schemas.openxmlformats.org/officeDocument/2006/relationships" xmlns:p="http://schemas.openxmlformats.org/presentationml/2006/main">
   <p:cSld>
     <p:bg>
       <p:bgPr>
         <a:blipFill>
-          <a:blip r:embed="rId3">
+          <a:blip r:embed="rId2">
             <a:alphaModFix/>
           </a:blip>
           <a:stretch>
             <a:fillRect/>
           </a:stretch>
         </a:blipFill>
+        <a:effectLst/>
       </p:bgPr>
     </p:bg>
     <p:spTree>
       <p:nvGrpSpPr>
-        <p:cNvPr id="53" name="Shape 53"/>
+        <p:cNvPr id="1" name="Shape 53"/>
         <p:cNvGrpSpPr/>
         <p:nvPr/>
       </p:nvGrpSpPr>
@@ -5376,7 +5491,9 @@
       <p:sp>
         <p:nvSpPr>
           <p:cNvPr id="54" name="Google Shape;54;p13"/>
-          <p:cNvSpPr txBox="1"/>
+          <p:cNvSpPr txBox="1">
+            <a:spLocks noGrp="1"/>
+          </p:cNvSpPr>
           <p:nvPr>
             <p:ph type="ctrTitle"/>
           </p:nvPr>
@@ -5391,12 +5508,12 @@
           </a:prstGeom>
         </p:spPr>
         <p:txBody>
-          <a:bodyPr anchorCtr="0" anchor="b" bIns="91425" lIns="91425" spcFirstLastPara="1" rIns="91425" wrap="square" tIns="91425">
+          <a:bodyPr spcFirstLastPara="1" wrap="square" lIns="91425" tIns="91425" rIns="91425" bIns="91425" anchor="b" anchorCtr="0">
             <a:normAutofit/>
           </a:bodyPr>
           <a:lstStyle/>
           <a:p>
-            <a:pPr indent="0" lvl="0" marL="0" rtl="0" algn="ctr">
+            <a:pPr marL="0" lvl="0" indent="0" algn="ctr" rtl="0">
               <a:lnSpc>
                 <a:spcPct val="100000"/>
               </a:lnSpc>
@@ -5409,12 +5526,12 @@
               <a:buNone/>
             </a:pPr>
             <a:r>
-              <a:rPr lang="pt-BR" sz="1800" b="1">
+              <a:rPr lang="pt-BR" sz="1300" b="1">
                 <a:solidFill>
                   <a:srgbClr val="0F2B5B"/>
                 </a:solidFill>
               </a:rPr>
-              <a:t>Alopecia androgenética feminina e saúde gastrointestinal</a:t>
+              <a:t>ALOPECIA ANDROGENÉTICA FEMININA E SAÚDE GASTROINTESTINAL: ESTUDO DE CASO DE UM PROTOCOLO ESTÉTICO COM FOTOBIOMODULAÇÃO, INTRADERMOTERAPIA CAPILAR E CUIDADO DOMICILIAR</a:t>
             </a:r>
           </a:p>
         </p:txBody>
@@ -5422,9 +5539,11 @@
       <p:sp>
         <p:nvSpPr>
           <p:cNvPr id="55" name="Google Shape;55;p13"/>
-          <p:cNvSpPr txBox="1"/>
+          <p:cNvSpPr txBox="1">
+            <a:spLocks noGrp="1"/>
+          </p:cNvSpPr>
           <p:nvPr>
-            <p:ph idx="1" type="subTitle"/>
+            <p:ph type="subTitle" idx="1"/>
           </p:nvPr>
         </p:nvSpPr>
         <p:spPr>
@@ -5437,12 +5556,12 @@
           </a:prstGeom>
         </p:spPr>
         <p:txBody>
-          <a:bodyPr anchorCtr="0" anchor="t" bIns="91425" lIns="91425" spcFirstLastPara="1" rIns="91425" wrap="square" tIns="91425">
+          <a:bodyPr spcFirstLastPara="1" wrap="square" lIns="91425" tIns="91425" rIns="91425" bIns="91425" anchor="t" anchorCtr="0">
             <a:normAutofit/>
           </a:bodyPr>
           <a:lstStyle/>
           <a:p>
-            <a:pPr indent="0" lvl="0" marL="0" rtl="0" algn="ctr">
+            <a:pPr marL="0" lvl="0" indent="0" algn="ctr" rtl="0">
               <a:lnSpc>
                 <a:spcPct val="100000"/>
               </a:lnSpc>
@@ -5464,7 +5583,7 @@
             </a:r>
           </a:p>
           <a:p>
-            <a:pPr indent="0" lvl="0" marL="0" rtl="0" algn="ctr">
+            <a:pPr marL="0" lvl="0" indent="0" algn="ctr" rtl="0">
               <a:lnSpc>
                 <a:spcPct val="100000"/>
               </a:lnSpc>
@@ -5486,7 +5605,7 @@
             </a:r>
           </a:p>
           <a:p>
-            <a:pPr indent="0" lvl="0" marL="0" rtl="0" algn="ctr">
+            <a:pPr marL="0" lvl="0" indent="0" algn="ctr" rtl="0">
               <a:lnSpc>
                 <a:spcPct val="100000"/>
               </a:lnSpc>
@@ -5517,24 +5636,25 @@
 </p:sld>
 </file>
 
-<file path=ppt/slides/slide10.xml><?xml version="1.0" encoding="utf-8"?>
-<p:sld xmlns:a="http://schemas.openxmlformats.org/drawingml/2006/main" xmlns:r="http://schemas.openxmlformats.org/officeDocument/2006/relationships" xmlns:mc="http://schemas.openxmlformats.org/markup-compatibility/2006" xmlns:mv="urn:schemas-microsoft-com:mac:vml" xmlns:p="http://schemas.openxmlformats.org/presentationml/2006/main" xmlns:c="http://schemas.openxmlformats.org/drawingml/2006/chart" xmlns:dgm="http://schemas.openxmlformats.org/drawingml/2006/diagram" xmlns:o="urn:schemas-microsoft-com:office:office" xmlns:v="urn:schemas-microsoft-com:vml" xmlns:pvml="urn:schemas-microsoft-com:office:powerpoint" xmlns:com="http://schemas.openxmlformats.org/drawingml/2006/compatibility" xmlns:p14="http://schemas.microsoft.com/office/powerpoint/2010/main" xmlns:p15="http://schemas.microsoft.com/office/powerpoint/2012/main" xmlns:ahyp="http://schemas.microsoft.com/office/drawing/2018/hyperlinkcolor">
+<file path=ppt/slides/slide2.xml><?xml version="1.0" encoding="utf-8"?>
+<p:sld xmlns:a="http://schemas.openxmlformats.org/drawingml/2006/main" xmlns:r="http://schemas.openxmlformats.org/officeDocument/2006/relationships" xmlns:p="http://schemas.openxmlformats.org/presentationml/2006/main">
   <p:cSld>
     <p:bg>
       <p:bgPr>
         <a:blipFill>
-          <a:blip r:embed="rId3">
+          <a:blip r:embed="rId2">
             <a:alphaModFix/>
           </a:blip>
           <a:stretch>
             <a:fillRect/>
           </a:stretch>
         </a:blipFill>
+        <a:effectLst/>
       </p:bgPr>
     </p:bg>
     <p:spTree>
       <p:nvGrpSpPr>
-        <p:cNvPr id="59" name="Shape 59"/>
+        <p:cNvPr id="1" name="Shape 59"/>
         <p:cNvGrpSpPr/>
         <p:nvPr/>
       </p:nvGrpSpPr>
@@ -5549,7 +5669,9 @@
       <p:sp>
         <p:nvSpPr>
           <p:cNvPr id="60" name="Google Shape;60;p14"/>
-          <p:cNvSpPr txBox="1"/>
+          <p:cNvSpPr txBox="1">
+            <a:spLocks noGrp="1"/>
+          </p:cNvSpPr>
           <p:nvPr>
             <p:ph type="title"/>
           </p:nvPr>
@@ -5564,188 +5686,12 @@
           </a:prstGeom>
         </p:spPr>
         <p:txBody>
-          <a:bodyPr anchorCtr="0" anchor="t" bIns="91425" lIns="91425" spcFirstLastPara="1" rIns="91425" wrap="square" tIns="91425">
-            <a:normAutofit fontScale="90000"/>
-          </a:bodyPr>
-          <a:lstStyle/>
-          <a:p>
-            <a:pPr indent="0" lvl="0" marL="0" rtl="0" algn="l">
-              <a:lnSpc>
-                <a:spcPct val="100000"/>
-              </a:lnSpc>
-              <a:spcBef>
-                <a:spcPts val="0"/>
-              </a:spcBef>
-              <a:spcAft>
-                <a:spcPts val="0"/>
-              </a:spcAft>
-              <a:buNone/>
-            </a:pPr>
-            <a:r>
-              <a:rPr lang="pt-BR" sz="1600" b="1">
-                <a:solidFill>
-                  <a:srgbClr val="0F2B5B"/>
-                </a:solidFill>
-              </a:rPr>
-              <a:t>DECLARAÇÃO DE USO DE IAG</a:t>
-            </a:r>
-          </a:p>
-        </p:txBody>
-      </p:sp>
-      <p:sp>
-        <p:nvSpPr>
-          <p:cNvPr id="61" name="Google Shape;61;p14"/>
-          <p:cNvSpPr txBox="1"/>
-          <p:nvPr>
-            <p:ph idx="1" type="body"/>
-          </p:nvPr>
-        </p:nvSpPr>
-        <p:spPr>
-          <a:xfrm>
-            <a:off x="420000" y="1020000"/>
-            <a:ext cx="8300000" cy="3050000"/>
-          </a:xfrm>
-          <a:prstGeom prst="rect">
-            <a:avLst/>
-          </a:prstGeom>
-        </p:spPr>
-        <p:txBody>
-          <a:bodyPr anchorCtr="0" anchor="ctr" bIns="91425" lIns="91425" spcFirstLastPara="1" rIns="91425" wrap="square" tIns="91425">
+          <a:bodyPr spcFirstLastPara="1" wrap="square" lIns="91425" tIns="91425" rIns="91425" bIns="91425" anchor="t" anchorCtr="0">
             <a:normAutofit/>
           </a:bodyPr>
           <a:lstStyle/>
           <a:p>
-            <a:pPr indent="-228600" lvl="0" marL="228600" rtl="0" algn="l">
-              <a:lnSpc>
-                <a:spcPct val="100000"/>
-              </a:lnSpc>
-              <a:spcBef>
-                <a:spcPts val="0"/>
-              </a:spcBef>
-              <a:spcAft>
-                <a:spcPts val="900"/>
-              </a:spcAft>
-              <a:buSzPts val="1400"/>
-              <a:buChar char="●"/>
-            </a:pPr>
-            <a:r>
-              <a:rPr lang="pt-BR" sz="1400">
-                <a:solidFill>
-                  <a:srgbClr val="1A1A1A"/>
-                </a:solidFill>
-              </a:rPr>
-              <a:t>Os autores declaram o uso da ferramenta Claude (Anthropic) para organização de ideias, revisão linguística e adequação do texto às normas do evento.</a:t>
-            </a:r>
-          </a:p>
-          <a:p>
-            <a:pPr indent="-228600" lvl="0" marL="228600" rtl="0" algn="l">
-              <a:lnSpc>
-                <a:spcPct val="100000"/>
-              </a:lnSpc>
-              <a:spcBef>
-                <a:spcPts val="0"/>
-              </a:spcBef>
-              <a:spcAft>
-                <a:spcPts val="900"/>
-              </a:spcAft>
-              <a:buSzPts val="1400"/>
-              <a:buChar char="●"/>
-            </a:pPr>
-            <a:r>
-              <a:rPr lang="pt-BR" sz="1400">
-                <a:solidFill>
-                  <a:srgbClr val="1A1A1A"/>
-                </a:solidFill>
-              </a:rPr>
-              <a:t>O conteúdo gerado foi revisado e validado pelos autores, que assumem integral responsabilidade pelo texto submetido.</a:t>
-            </a:r>
-          </a:p>
-          <a:p>
-            <a:pPr indent="-228600" lvl="0" marL="228600" rtl="0" algn="l">
-              <a:lnSpc>
-                <a:spcPct val="100000"/>
-              </a:lnSpc>
-              <a:spcBef>
-                <a:spcPts val="0"/>
-              </a:spcBef>
-              <a:spcAft>
-                <a:spcPts val="0"/>
-              </a:spcAft>
-              <a:buSzPts val="1400"/>
-              <a:buChar char="●"/>
-            </a:pPr>
-            <a:r>
-              <a:rPr lang="pt-BR" sz="1400">
-                <a:solidFill>
-                  <a:srgbClr val="1A1A1A"/>
-                </a:solidFill>
-              </a:rPr>
-              <a:t>Contato: paolabortolilionn@gmail.com</a:t>
-            </a:r>
-          </a:p>
-        </p:txBody>
-      </p:sp>
-    </p:spTree>
-  </p:cSld>
-  <p:clrMapOvr>
-    <a:masterClrMapping/>
-  </p:clrMapOvr>
-</p:sld>
-</file>
-
-<file path=ppt/slides/slide2.xml><?xml version="1.0" encoding="utf-8"?>
-<p:sld xmlns:a="http://schemas.openxmlformats.org/drawingml/2006/main" xmlns:r="http://schemas.openxmlformats.org/officeDocument/2006/relationships" xmlns:mc="http://schemas.openxmlformats.org/markup-compatibility/2006" xmlns:mv="urn:schemas-microsoft-com:mac:vml" xmlns:p="http://schemas.openxmlformats.org/presentationml/2006/main" xmlns:c="http://schemas.openxmlformats.org/drawingml/2006/chart" xmlns:dgm="http://schemas.openxmlformats.org/drawingml/2006/diagram" xmlns:o="urn:schemas-microsoft-com:office:office" xmlns:v="urn:schemas-microsoft-com:vml" xmlns:pvml="urn:schemas-microsoft-com:office:powerpoint" xmlns:com="http://schemas.openxmlformats.org/drawingml/2006/compatibility" xmlns:p14="http://schemas.microsoft.com/office/powerpoint/2010/main" xmlns:p15="http://schemas.microsoft.com/office/powerpoint/2012/main" xmlns:ahyp="http://schemas.microsoft.com/office/drawing/2018/hyperlinkcolor">
-  <p:cSld>
-    <p:bg>
-      <p:bgPr>
-        <a:blipFill>
-          <a:blip r:embed="rId3">
-            <a:alphaModFix/>
-          </a:blip>
-          <a:stretch>
-            <a:fillRect/>
-          </a:stretch>
-        </a:blipFill>
-      </p:bgPr>
-    </p:bg>
-    <p:spTree>
-      <p:nvGrpSpPr>
-        <p:cNvPr id="59" name="Shape 59"/>
-        <p:cNvGrpSpPr/>
-        <p:nvPr/>
-      </p:nvGrpSpPr>
-      <p:grpSpPr>
-        <a:xfrm>
-          <a:off x="0" y="0"/>
-          <a:ext cx="0" cy="0"/>
-          <a:chOff x="0" y="0"/>
-          <a:chExt cx="0" cy="0"/>
-        </a:xfrm>
-      </p:grpSpPr>
-      <p:sp>
-        <p:nvSpPr>
-          <p:cNvPr id="60" name="Google Shape;60;p14"/>
-          <p:cNvSpPr txBox="1"/>
-          <p:nvPr>
-            <p:ph type="title"/>
-          </p:nvPr>
-        </p:nvSpPr>
-        <p:spPr>
-          <a:xfrm>
-            <a:off x="420000" y="330000"/>
-            <a:ext cx="8300000" cy="620000"/>
-          </a:xfrm>
-          <a:prstGeom prst="rect">
-            <a:avLst/>
-          </a:prstGeom>
-        </p:spPr>
-        <p:txBody>
-          <a:bodyPr anchorCtr="0" anchor="t" bIns="91425" lIns="91425" spcFirstLastPara="1" rIns="91425" wrap="square" tIns="91425">
-            <a:normAutofit fontScale="90000"/>
-          </a:bodyPr>
-          <a:lstStyle/>
-          <a:p>
-            <a:pPr indent="0" lvl="0" marL="0" rtl="0" algn="l">
+            <a:pPr marL="0" lvl="0" indent="0" algn="l" rtl="0">
               <a:lnSpc>
                 <a:spcPct val="100000"/>
               </a:lnSpc>
@@ -5771,14 +5717,16 @@
       <p:sp>
         <p:nvSpPr>
           <p:cNvPr id="61" name="Google Shape;61;p14"/>
-          <p:cNvSpPr txBox="1"/>
+          <p:cNvSpPr txBox="1">
+            <a:spLocks noGrp="1"/>
+          </p:cNvSpPr>
           <p:nvPr>
-            <p:ph idx="1" type="body"/>
+            <p:ph type="body" idx="1"/>
           </p:nvPr>
         </p:nvSpPr>
         <p:spPr>
           <a:xfrm>
-            <a:off x="420000" y="1020000"/>
+            <a:off x="420000" y="950000"/>
             <a:ext cx="8300000" cy="3050000"/>
           </a:xfrm>
           <a:prstGeom prst="rect">
@@ -5786,12 +5734,12 @@
           </a:prstGeom>
         </p:spPr>
         <p:txBody>
-          <a:bodyPr anchorCtr="0" anchor="ctr" bIns="91425" lIns="91425" spcFirstLastPara="1" rIns="91425" wrap="square" tIns="91425">
-            <a:normAutofit/>
+          <a:bodyPr spcFirstLastPara="1" wrap="square" lIns="91425" tIns="91425" rIns="91425" bIns="91425" anchor="ctr" anchorCtr="0">
+            <a:normAutofit fontScale="85000" lnSpcReduction="10000"/>
           </a:bodyPr>
           <a:lstStyle/>
           <a:p>
-            <a:pPr indent="-228600" lvl="0" marL="228600" rtl="0" algn="l">
+            <a:pPr marL="228600" lvl="0" indent="-228600" algn="l" rtl="0">
               <a:lnSpc>
                 <a:spcPct val="100000"/>
               </a:lnSpc>
@@ -5805,7 +5753,7 @@
               <a:buChar char="●"/>
             </a:pPr>
             <a:r>
-              <a:rPr lang="pt-BR" sz="1300">
+              <a:rPr lang="pt-BR" sz="1300" dirty="0">
                 <a:solidFill>
                   <a:srgbClr val="1A1A1A"/>
                 </a:solidFill>
@@ -5814,7 +5762,7 @@
             </a:r>
           </a:p>
           <a:p>
-            <a:pPr indent="-228600" lvl="0" marL="228600" rtl="0" algn="l">
+            <a:pPr marL="228600" lvl="0" indent="-228600" algn="l" rtl="0">
               <a:lnSpc>
                 <a:spcPct val="100000"/>
               </a:lnSpc>
@@ -5828,16 +5776,32 @@
               <a:buChar char="●"/>
             </a:pPr>
             <a:r>
-              <a:rPr lang="pt-BR" sz="1300">
+              <a:rPr lang="pt-BR" sz="1300" dirty="0">
                 <a:solidFill>
                   <a:srgbClr val="1A1A1A"/>
                 </a:solidFill>
               </a:rPr>
-              <a:t>Ação da DHT sobre folículos predispostos → encurtamento da fase anágena e miniaturização folicular (Ho; Sood; Zito, 2024).</a:t>
+              <a:t>Ação da DHT sobre folículos predispostos → encurtamento da fase anágena e miniaturização folicular (Ho; </a:t>
+            </a:r>
+            <a:r>
+              <a:rPr lang="pt-BR" sz="1300" dirty="0" err="1">
+                <a:solidFill>
+                  <a:srgbClr val="1A1A1A"/>
+                </a:solidFill>
+              </a:rPr>
+              <a:t>Sood</a:t>
+            </a:r>
+            <a:r>
+              <a:rPr lang="pt-BR" sz="1300" dirty="0">
+                <a:solidFill>
+                  <a:srgbClr val="1A1A1A"/>
+                </a:solidFill>
+              </a:rPr>
+              <a:t>; Zito, 2024).</a:t>
             </a:r>
           </a:p>
           <a:p>
-            <a:pPr indent="-228600" lvl="0" marL="228600" rtl="0" algn="l">
+            <a:pPr marL="228600" lvl="0" indent="-228600" algn="l" rtl="0">
               <a:lnSpc>
                 <a:spcPct val="100000"/>
               </a:lnSpc>
@@ -5851,36 +5815,245 @@
               <a:buChar char="●"/>
             </a:pPr>
             <a:r>
-              <a:rPr lang="pt-BR" sz="1300">
+              <a:rPr lang="pt-BR" sz="1300" dirty="0">
                 <a:solidFill>
                   <a:srgbClr val="1A1A1A"/>
                 </a:solidFill>
               </a:rPr>
-              <a:t>Prevalência crescente com a idade: ~1,3% (18–29 anos) a ~11,8% (após 70 anos) (Singal; Sonthalia; Verma, 2013).</a:t>
+              <a:t>Prevalência crescente com a idade: ~1,3% (18–29 anos) a ~11,8% (após 70 anos) (</a:t>
+            </a:r>
+            <a:r>
+              <a:rPr lang="pt-BR" sz="1300" dirty="0" err="1">
+                <a:solidFill>
+                  <a:srgbClr val="1A1A1A"/>
+                </a:solidFill>
+              </a:rPr>
+              <a:t>Singal</a:t>
+            </a:r>
+            <a:r>
+              <a:rPr lang="pt-BR" sz="1300" dirty="0">
+                <a:solidFill>
+                  <a:srgbClr val="1A1A1A"/>
+                </a:solidFill>
+              </a:rPr>
+              <a:t>; </a:t>
+            </a:r>
+            <a:r>
+              <a:rPr lang="pt-BR" sz="1300" dirty="0" err="1">
+                <a:solidFill>
+                  <a:srgbClr val="1A1A1A"/>
+                </a:solidFill>
+              </a:rPr>
+              <a:t>Sonthalia</a:t>
+            </a:r>
+            <a:r>
+              <a:rPr lang="pt-BR" sz="1300" dirty="0">
+                <a:solidFill>
+                  <a:srgbClr val="1A1A1A"/>
+                </a:solidFill>
+              </a:rPr>
+              <a:t>; </a:t>
+            </a:r>
+            <a:r>
+              <a:rPr lang="pt-BR" sz="1300" dirty="0" err="1">
+                <a:solidFill>
+                  <a:srgbClr val="1A1A1A"/>
+                </a:solidFill>
+              </a:rPr>
+              <a:t>Verma</a:t>
+            </a:r>
+            <a:r>
+              <a:rPr lang="pt-BR" sz="1300" dirty="0">
+                <a:solidFill>
+                  <a:srgbClr val="1A1A1A"/>
+                </a:solidFill>
+              </a:rPr>
+              <a:t>, 2013).</a:t>
             </a:r>
           </a:p>
           <a:p>
-            <a:pPr indent="-228600" lvl="0" marL="228600" rtl="0" algn="l">
+            <a:pPr marL="228600" indent="-228600">
               <a:lnSpc>
                 <a:spcPct val="100000"/>
               </a:lnSpc>
-              <a:spcBef>
-                <a:spcPts val="0"/>
-              </a:spcBef>
-              <a:spcAft>
-                <a:spcPts val="0"/>
+              <a:spcAft>
+                <a:spcPts val="700"/>
               </a:spcAft>
               <a:buSzPts val="1300"/>
-              <a:buChar char="●"/>
             </a:pPr>
             <a:r>
-              <a:rPr lang="pt-BR" sz="1300">
+              <a:rPr lang="pt-BR" sz="1300" dirty="0">
                 <a:solidFill>
                   <a:srgbClr val="1A1A1A"/>
                 </a:solidFill>
               </a:rPr>
               <a:t>Fatores sistêmicos modulam a velocidade de progressão — entre eles, alterações gastrointestinais que comprometem a absorção de ferro, vitamina B12 e zinco.</a:t>
             </a:r>
+            <a:r>
+              <a:rPr lang="pt-BR" sz="1400" dirty="0">
+                <a:solidFill>
+                  <a:srgbClr val="1A1A1A"/>
+                </a:solidFill>
+              </a:rPr>
+              <a:t> Estudo de caso descritivo e qualitativo, em andamento; paciente do sexo feminino, nascida em 1964 (60 anos ao início, 61 na reavaliação).</a:t>
+            </a:r>
+          </a:p>
+          <a:p>
+            <a:pPr marL="228600" indent="-228600">
+              <a:lnSpc>
+                <a:spcPct val="100000"/>
+              </a:lnSpc>
+              <a:spcAft>
+                <a:spcPts val="700"/>
+              </a:spcAft>
+              <a:buSzPts val="1300"/>
+            </a:pPr>
+            <a:r>
+              <a:rPr lang="pt-BR" sz="1400" dirty="0">
+                <a:solidFill>
+                  <a:srgbClr val="1A1A1A"/>
+                </a:solidFill>
+              </a:rPr>
+              <a:t>Histórico: calvície paterna, gastrite crônica em tratamento, infecção por H. </a:t>
+            </a:r>
+            <a:r>
+              <a:rPr lang="pt-BR" sz="1400" dirty="0" err="1">
+                <a:solidFill>
+                  <a:srgbClr val="1A1A1A"/>
+                </a:solidFill>
+              </a:rPr>
+              <a:t>pylori</a:t>
+            </a:r>
+            <a:r>
+              <a:rPr lang="pt-BR" sz="1400" dirty="0">
+                <a:solidFill>
+                  <a:srgbClr val="1A1A1A"/>
+                </a:solidFill>
+              </a:rPr>
+              <a:t> já erradicada e confirmada por exames.</a:t>
+            </a:r>
+          </a:p>
+          <a:p>
+            <a:pPr marL="228600" indent="-228600">
+              <a:lnSpc>
+                <a:spcPct val="100000"/>
+              </a:lnSpc>
+              <a:spcAft>
+                <a:spcPts val="700"/>
+              </a:spcAft>
+              <a:buSzPts val="1300"/>
+            </a:pPr>
+            <a:r>
+              <a:rPr lang="pt-BR" sz="1400" dirty="0">
+                <a:solidFill>
+                  <a:srgbClr val="1A1A1A"/>
+                </a:solidFill>
+              </a:rPr>
+              <a:t>Antecedente: em 2023, tratamento de desinflamação do couro cabeludo (não conduzido pela autora); meses depois, piora, diagnóstico de H. </a:t>
+            </a:r>
+            <a:r>
+              <a:rPr lang="pt-BR" sz="1400" dirty="0" err="1">
+                <a:solidFill>
+                  <a:srgbClr val="1A1A1A"/>
+                </a:solidFill>
+              </a:rPr>
+              <a:t>pylori</a:t>
+            </a:r>
+            <a:r>
+              <a:rPr lang="pt-BR" sz="1400" dirty="0">
+                <a:solidFill>
+                  <a:srgbClr val="1A1A1A"/>
+                </a:solidFill>
+              </a:rPr>
+              <a:t> e gastrite, cura da infecção com antibióticos e persistência da gastrite.</a:t>
+            </a:r>
+          </a:p>
+          <a:p>
+            <a:pPr marL="228600" indent="-228600">
+              <a:lnSpc>
+                <a:spcPct val="100000"/>
+              </a:lnSpc>
+              <a:spcAft>
+                <a:spcPts val="700"/>
+              </a:spcAft>
+              <a:buSzPts val="1300"/>
+            </a:pPr>
+            <a:r>
+              <a:rPr lang="pt-BR" sz="1400" dirty="0">
+                <a:solidFill>
+                  <a:srgbClr val="1A1A1A"/>
+                </a:solidFill>
+              </a:rPr>
+              <a:t>Em 2024, estimulação mais intensa: intradermoterapia (técnica de pápula, Mescla PHD) e fotobiomodulação com luz vermelha, com tônico domiciliar de </a:t>
+            </a:r>
+            <a:r>
+              <a:rPr lang="pt-BR" sz="1400" dirty="0" err="1">
+                <a:solidFill>
+                  <a:srgbClr val="1A1A1A"/>
+                </a:solidFill>
+              </a:rPr>
+              <a:t>Capilia</a:t>
+            </a:r>
+            <a:r>
+              <a:rPr lang="pt-BR" sz="1400" dirty="0">
+                <a:solidFill>
+                  <a:srgbClr val="1A1A1A"/>
+                </a:solidFill>
+              </a:rPr>
+              <a:t> Longa.</a:t>
+            </a:r>
+          </a:p>
+          <a:p>
+            <a:pPr marL="228600" indent="-228600">
+              <a:lnSpc>
+                <a:spcPct val="100000"/>
+              </a:lnSpc>
+              <a:buSzPts val="1300"/>
+            </a:pPr>
+            <a:r>
+              <a:rPr lang="pt-BR" sz="1400" dirty="0">
+                <a:solidFill>
+                  <a:srgbClr val="1A1A1A"/>
+                </a:solidFill>
+              </a:rPr>
+              <a:t>Instrumentos: ficha de anamnese capilar, tricoscopia com </a:t>
+            </a:r>
+            <a:r>
+              <a:rPr lang="pt-BR" sz="1400" dirty="0" err="1">
+                <a:solidFill>
+                  <a:srgbClr val="1A1A1A"/>
+                </a:solidFill>
+              </a:rPr>
+              <a:t>fotovideodermatoscópio</a:t>
+            </a:r>
+            <a:r>
+              <a:rPr lang="pt-BR" sz="1400" dirty="0">
+                <a:solidFill>
+                  <a:srgbClr val="1A1A1A"/>
+                </a:solidFill>
+              </a:rPr>
+              <a:t> e registro fotográfico padronizado.</a:t>
+            </a:r>
+          </a:p>
+          <a:p>
+            <a:pPr marL="228600" lvl="0" indent="-228600" algn="l" rtl="0">
+              <a:lnSpc>
+                <a:spcPct val="100000"/>
+              </a:lnSpc>
+              <a:spcBef>
+                <a:spcPts val="0"/>
+              </a:spcBef>
+              <a:spcAft>
+                <a:spcPts val="0"/>
+              </a:spcAft>
+              <a:buSzPts val="1300"/>
+              <a:buChar char="●"/>
+            </a:pPr>
+            <a:endParaRPr lang="pt-BR" sz="1300" dirty="0">
+              <a:solidFill>
+                <a:srgbClr val="1A1A1A"/>
+              </a:solidFill>
+            </a:endParaRPr>
           </a:p>
         </p:txBody>
       </p:sp>
@@ -5893,23 +6066,24 @@
 </file>
 
 <file path=ppt/slides/slide3.xml><?xml version="1.0" encoding="utf-8"?>
-<p:sld xmlns:a="http://schemas.openxmlformats.org/drawingml/2006/main" xmlns:r="http://schemas.openxmlformats.org/officeDocument/2006/relationships" xmlns:mc="http://schemas.openxmlformats.org/markup-compatibility/2006" xmlns:mv="urn:schemas-microsoft-com:mac:vml" xmlns:p="http://schemas.openxmlformats.org/presentationml/2006/main" xmlns:c="http://schemas.openxmlformats.org/drawingml/2006/chart" xmlns:dgm="http://schemas.openxmlformats.org/drawingml/2006/diagram" xmlns:o="urn:schemas-microsoft-com:office:office" xmlns:v="urn:schemas-microsoft-com:vml" xmlns:pvml="urn:schemas-microsoft-com:office:powerpoint" xmlns:com="http://schemas.openxmlformats.org/drawingml/2006/compatibility" xmlns:p14="http://schemas.microsoft.com/office/powerpoint/2010/main" xmlns:p15="http://schemas.microsoft.com/office/powerpoint/2012/main" xmlns:ahyp="http://schemas.microsoft.com/office/drawing/2018/hyperlinkcolor">
+<p:sld xmlns:a="http://schemas.openxmlformats.org/drawingml/2006/main" xmlns:r="http://schemas.openxmlformats.org/officeDocument/2006/relationships" xmlns:p="http://schemas.openxmlformats.org/presentationml/2006/main">
   <p:cSld>
     <p:bg>
       <p:bgPr>
         <a:blipFill>
-          <a:blip r:embed="rId3">
+          <a:blip r:embed="rId2">
             <a:alphaModFix/>
           </a:blip>
           <a:stretch>
             <a:fillRect/>
           </a:stretch>
         </a:blipFill>
+        <a:effectLst/>
       </p:bgPr>
     </p:bg>
     <p:spTree>
       <p:nvGrpSpPr>
-        <p:cNvPr id="59" name="Shape 59"/>
+        <p:cNvPr id="1" name="Shape 59"/>
         <p:cNvGrpSpPr/>
         <p:nvPr/>
       </p:nvGrpSpPr>
@@ -5924,7 +6098,9 @@
       <p:sp>
         <p:nvSpPr>
           <p:cNvPr id="60" name="Google Shape;60;p14"/>
-          <p:cNvSpPr txBox="1"/>
+          <p:cNvSpPr txBox="1">
+            <a:spLocks noGrp="1"/>
+          </p:cNvSpPr>
           <p:nvPr>
             <p:ph type="title"/>
           </p:nvPr>
@@ -5939,12 +6115,12 @@
           </a:prstGeom>
         </p:spPr>
         <p:txBody>
-          <a:bodyPr anchorCtr="0" anchor="t" bIns="91425" lIns="91425" spcFirstLastPara="1" rIns="91425" wrap="square" tIns="91425">
-            <a:normAutofit fontScale="90000"/>
+          <a:bodyPr spcFirstLastPara="1" wrap="square" lIns="91425" tIns="91425" rIns="91425" bIns="91425" anchor="t" anchorCtr="0">
+            <a:normAutofit/>
           </a:bodyPr>
           <a:lstStyle/>
           <a:p>
-            <a:pPr indent="0" lvl="0" marL="0" rtl="0" algn="l">
+            <a:pPr marL="0" lvl="0" indent="0" algn="l" rtl="0">
               <a:lnSpc>
                 <a:spcPct val="100000"/>
               </a:lnSpc>
@@ -5970,9 +6146,11 @@
       <p:sp>
         <p:nvSpPr>
           <p:cNvPr id="61" name="Google Shape;61;p14"/>
-          <p:cNvSpPr txBox="1"/>
+          <p:cNvSpPr txBox="1">
+            <a:spLocks noGrp="1"/>
+          </p:cNvSpPr>
           <p:nvPr>
-            <p:ph idx="1" type="body"/>
+            <p:ph type="body" idx="1"/>
           </p:nvPr>
         </p:nvSpPr>
         <p:spPr>
@@ -5985,12 +6163,12 @@
           </a:prstGeom>
         </p:spPr>
         <p:txBody>
-          <a:bodyPr anchorCtr="0" anchor="ctr" bIns="91425" lIns="91425" spcFirstLastPara="1" rIns="91425" wrap="square" tIns="91425">
+          <a:bodyPr spcFirstLastPara="1" wrap="square" lIns="91425" tIns="91425" rIns="91425" bIns="91425" anchor="ctr" anchorCtr="0">
             <a:normAutofit/>
           </a:bodyPr>
           <a:lstStyle/>
           <a:p>
-            <a:pPr indent="-228600" lvl="0" marL="228600" rtl="0" algn="l">
+            <a:pPr marL="228600" lvl="0" indent="-228600" algn="l" rtl="0">
               <a:lnSpc>
                 <a:spcPct val="100000"/>
               </a:lnSpc>
@@ -6013,7 +6191,7 @@
             </a:r>
           </a:p>
           <a:p>
-            <a:pPr indent="-228600" lvl="0" marL="228600" rtl="0" algn="l">
+            <a:pPr marL="228600" lvl="0" indent="-228600" algn="l" rtl="0">
               <a:lnSpc>
                 <a:spcPct val="100000"/>
               </a:lnSpc>
@@ -6036,7 +6214,7 @@
             </a:r>
           </a:p>
           <a:p>
-            <a:pPr indent="-228600" lvl="0" marL="228600" rtl="0" algn="l">
+            <a:pPr marL="228600" lvl="0" indent="-228600" algn="l" rtl="0">
               <a:lnSpc>
                 <a:spcPct val="100000"/>
               </a:lnSpc>
@@ -6059,7 +6237,7 @@
             </a:r>
           </a:p>
           <a:p>
-            <a:pPr indent="-228600" lvl="0" marL="228600" rtl="0" algn="l">
+            <a:pPr marL="228600" lvl="0" indent="-228600" algn="l" rtl="0">
               <a:lnSpc>
                 <a:spcPct val="100000"/>
               </a:lnSpc>
@@ -6092,23 +6270,24 @@
 </file>
 
 <file path=ppt/slides/slide4.xml><?xml version="1.0" encoding="utf-8"?>
-<p:sld xmlns:a="http://schemas.openxmlformats.org/drawingml/2006/main" xmlns:r="http://schemas.openxmlformats.org/officeDocument/2006/relationships" xmlns:mc="http://schemas.openxmlformats.org/markup-compatibility/2006" xmlns:mv="urn:schemas-microsoft-com:mac:vml" xmlns:p="http://schemas.openxmlformats.org/presentationml/2006/main" xmlns:c="http://schemas.openxmlformats.org/drawingml/2006/chart" xmlns:dgm="http://schemas.openxmlformats.org/drawingml/2006/diagram" xmlns:o="urn:schemas-microsoft-com:office:office" xmlns:v="urn:schemas-microsoft-com:vml" xmlns:pvml="urn:schemas-microsoft-com:office:powerpoint" xmlns:com="http://schemas.openxmlformats.org/drawingml/2006/compatibility" xmlns:p14="http://schemas.microsoft.com/office/powerpoint/2010/main" xmlns:p15="http://schemas.microsoft.com/office/powerpoint/2012/main" xmlns:ahyp="http://schemas.microsoft.com/office/drawing/2018/hyperlinkcolor">
+<p:sld xmlns:a="http://schemas.openxmlformats.org/drawingml/2006/main" xmlns:r="http://schemas.openxmlformats.org/officeDocument/2006/relationships" xmlns:p="http://schemas.openxmlformats.org/presentationml/2006/main">
   <p:cSld>
     <p:bg>
       <p:bgPr>
         <a:blipFill>
-          <a:blip r:embed="rId3">
+          <a:blip r:embed="rId2">
             <a:alphaModFix/>
           </a:blip>
           <a:stretch>
             <a:fillRect/>
           </a:stretch>
         </a:blipFill>
+        <a:effectLst/>
       </p:bgPr>
     </p:bg>
     <p:spTree>
       <p:nvGrpSpPr>
-        <p:cNvPr id="59" name="Shape 59"/>
+        <p:cNvPr id="1" name="Shape 59"/>
         <p:cNvGrpSpPr/>
         <p:nvPr/>
       </p:nvGrpSpPr>
@@ -6123,7 +6302,9 @@
       <p:sp>
         <p:nvSpPr>
           <p:cNvPr id="60" name="Google Shape;60;p14"/>
-          <p:cNvSpPr txBox="1"/>
+          <p:cNvSpPr txBox="1">
+            <a:spLocks noGrp="1"/>
+          </p:cNvSpPr>
           <p:nvPr>
             <p:ph type="title"/>
           </p:nvPr>
@@ -6138,12 +6319,12 @@
           </a:prstGeom>
         </p:spPr>
         <p:txBody>
-          <a:bodyPr anchorCtr="0" anchor="t" bIns="91425" lIns="91425" spcFirstLastPara="1" rIns="91425" wrap="square" tIns="91425">
-            <a:normAutofit fontScale="90000"/>
+          <a:bodyPr spcFirstLastPara="1" wrap="square" lIns="91425" tIns="91425" rIns="91425" bIns="91425" anchor="t" anchorCtr="0">
+            <a:normAutofit/>
           </a:bodyPr>
           <a:lstStyle/>
           <a:p>
-            <a:pPr indent="0" lvl="0" marL="0" rtl="0" algn="l">
+            <a:pPr marL="0" lvl="0" indent="0" algn="l" rtl="0">
               <a:lnSpc>
                 <a:spcPct val="100000"/>
               </a:lnSpc>
@@ -6169,9 +6350,11 @@
       <p:sp>
         <p:nvSpPr>
           <p:cNvPr id="61" name="Google Shape;61;p14"/>
-          <p:cNvSpPr txBox="1"/>
+          <p:cNvSpPr txBox="1">
+            <a:spLocks noGrp="1"/>
+          </p:cNvSpPr>
           <p:nvPr>
-            <p:ph idx="1" type="body"/>
+            <p:ph type="body" idx="1"/>
           </p:nvPr>
         </p:nvSpPr>
         <p:spPr>
@@ -6184,12 +6367,12 @@
           </a:prstGeom>
         </p:spPr>
         <p:txBody>
-          <a:bodyPr anchorCtr="0" anchor="ctr" bIns="91425" lIns="91425" spcFirstLastPara="1" rIns="91425" wrap="square" tIns="91425">
+          <a:bodyPr spcFirstLastPara="1" wrap="square" lIns="91425" tIns="91425" rIns="91425" bIns="91425" anchor="ctr" anchorCtr="0">
             <a:normAutofit/>
           </a:bodyPr>
           <a:lstStyle/>
           <a:p>
-            <a:pPr indent="-228600" lvl="0" marL="228600" rtl="0" algn="l">
+            <a:pPr marL="228600" lvl="0" indent="-228600" algn="l" rtl="0">
               <a:lnSpc>
                 <a:spcPct val="100000"/>
               </a:lnSpc>
@@ -6208,11 +6391,11 @@
                   <a:srgbClr val="1A1A1A"/>
                 </a:solidFill>
               </a:rPr>
-              <a:t>Descrever e discutir os resultados de um protocolo estético com fotobiomodulação, intradermoterapia capilar e cuidado domiciliar, conduzido em paralelo ao acompanhamento médico.</a:t>
+              <a:t>Descrever um protocolo estético com fotobiomodulação, intradermoterapia capilar e cuidado domiciliar, conduzido em paralelo ao acompanhamento médico.</a:t>
             </a:r>
           </a:p>
           <a:p>
-            <a:pPr indent="-228600" lvl="0" marL="228600" rtl="0" algn="l">
+            <a:pPr marL="228600" lvl="0" indent="-228600" algn="l" rtl="0">
               <a:lnSpc>
                 <a:spcPct val="100000"/>
               </a:lnSpc>
@@ -6231,7 +6414,7 @@
                   <a:srgbClr val="1A1A1A"/>
                 </a:solidFill>
               </a:rPr>
-              <a:t>Finalidade: controle da miniaturização folicular e melhora da qualidade capilar em paciente com AAF e histórico gastrointestinal relevante.</a:t>
+              <a:t>Finalidade: controle da miniaturização folicular em paciente com AAF e histórico gastrointestinal relevante.</a:t>
             </a:r>
           </a:p>
         </p:txBody>
@@ -6245,23 +6428,24 @@
 </file>
 
 <file path=ppt/slides/slide5.xml><?xml version="1.0" encoding="utf-8"?>
-<p:sld xmlns:a="http://schemas.openxmlformats.org/drawingml/2006/main" xmlns:r="http://schemas.openxmlformats.org/officeDocument/2006/relationships" xmlns:mc="http://schemas.openxmlformats.org/markup-compatibility/2006" xmlns:mv="urn:schemas-microsoft-com:mac:vml" xmlns:p="http://schemas.openxmlformats.org/presentationml/2006/main" xmlns:c="http://schemas.openxmlformats.org/drawingml/2006/chart" xmlns:dgm="http://schemas.openxmlformats.org/drawingml/2006/diagram" xmlns:o="urn:schemas-microsoft-com:office:office" xmlns:v="urn:schemas-microsoft-com:vml" xmlns:pvml="urn:schemas-microsoft-com:office:powerpoint" xmlns:com="http://schemas.openxmlformats.org/drawingml/2006/compatibility" xmlns:p14="http://schemas.microsoft.com/office/powerpoint/2010/main" xmlns:p15="http://schemas.microsoft.com/office/powerpoint/2012/main" xmlns:ahyp="http://schemas.microsoft.com/office/drawing/2018/hyperlinkcolor">
+<p:sld xmlns:a="http://schemas.openxmlformats.org/drawingml/2006/main" xmlns:r="http://schemas.openxmlformats.org/officeDocument/2006/relationships" xmlns:p="http://schemas.openxmlformats.org/presentationml/2006/main">
   <p:cSld>
     <p:bg>
       <p:bgPr>
         <a:blipFill>
-          <a:blip r:embed="rId3">
+          <a:blip r:embed="rId2">
             <a:alphaModFix/>
           </a:blip>
           <a:stretch>
             <a:fillRect/>
           </a:stretch>
         </a:blipFill>
+        <a:effectLst/>
       </p:bgPr>
     </p:bg>
     <p:spTree>
       <p:nvGrpSpPr>
-        <p:cNvPr id="59" name="Shape 59"/>
+        <p:cNvPr id="1" name="Shape 59"/>
         <p:cNvGrpSpPr/>
         <p:nvPr/>
       </p:nvGrpSpPr>
@@ -6276,7 +6460,9 @@
       <p:sp>
         <p:nvSpPr>
           <p:cNvPr id="60" name="Google Shape;60;p14"/>
-          <p:cNvSpPr txBox="1"/>
+          <p:cNvSpPr txBox="1">
+            <a:spLocks noGrp="1"/>
+          </p:cNvSpPr>
           <p:nvPr>
             <p:ph type="title"/>
           </p:nvPr>
@@ -6291,12 +6477,12 @@
           </a:prstGeom>
         </p:spPr>
         <p:txBody>
-          <a:bodyPr anchorCtr="0" anchor="t" bIns="91425" lIns="91425" spcFirstLastPara="1" rIns="91425" wrap="square" tIns="91425">
-            <a:normAutofit fontScale="90000"/>
+          <a:bodyPr spcFirstLastPara="1" wrap="square" lIns="91425" tIns="91425" rIns="91425" bIns="91425" anchor="t" anchorCtr="0">
+            <a:normAutofit/>
           </a:bodyPr>
           <a:lstStyle/>
           <a:p>
-            <a:pPr indent="0" lvl="0" marL="0" rtl="0" algn="l">
+            <a:pPr marL="0" lvl="0" indent="0" algn="l" rtl="0">
               <a:lnSpc>
                 <a:spcPct val="100000"/>
               </a:lnSpc>
@@ -6314,150 +6500,1153 @@
                   <a:srgbClr val="0F2B5B"/>
                 </a:solidFill>
               </a:rPr>
-              <a:t>METODOLOGIA</a:t>
+              <a:t>METODOLOGIA — PROTOCOLO APLICADO</a:t>
             </a:r>
           </a:p>
         </p:txBody>
       </p:sp>
-      <p:sp>
-        <p:nvSpPr>
-          <p:cNvPr id="61" name="Google Shape;61;p14"/>
-          <p:cNvSpPr txBox="1"/>
-          <p:nvPr>
-            <p:ph idx="1" type="body"/>
-          </p:nvPr>
-        </p:nvSpPr>
-        <p:spPr>
-          <a:xfrm>
-            <a:off x="420000" y="1020000"/>
-            <a:ext cx="8300000" cy="3050000"/>
-          </a:xfrm>
-          <a:prstGeom prst="rect">
-            <a:avLst/>
-          </a:prstGeom>
-        </p:spPr>
-        <p:txBody>
-          <a:bodyPr anchorCtr="0" anchor="ctr" bIns="91425" lIns="91425" spcFirstLastPara="1" rIns="91425" wrap="square" tIns="91425">
-            <a:normAutofit/>
-          </a:bodyPr>
-          <a:lstStyle/>
-          <a:p>
-            <a:pPr indent="-228600" lvl="0" marL="228600" rtl="0" algn="l">
-              <a:lnSpc>
-                <a:spcPct val="100000"/>
-              </a:lnSpc>
-              <a:spcBef>
-                <a:spcPts val="0"/>
-              </a:spcBef>
-              <a:spcAft>
-                <a:spcPts val="700"/>
-              </a:spcAft>
-              <a:buSzPts val="1150"/>
-              <a:buChar char="●"/>
-            </a:pPr>
-            <a:r>
-              <a:rPr lang="pt-BR" sz="1150">
-                <a:solidFill>
-                  <a:srgbClr val="1A1A1A"/>
-                </a:solidFill>
-              </a:rPr>
-              <a:t>Estudo de caso descritivo e qualitativo, em andamento; paciente do sexo feminino, nascida em 1964 (60 anos ao início, 61 na reavaliação).</a:t>
-            </a:r>
-          </a:p>
-          <a:p>
-            <a:pPr indent="-228600" lvl="0" marL="228600" rtl="0" algn="l">
-              <a:lnSpc>
-                <a:spcPct val="100000"/>
-              </a:lnSpc>
-              <a:spcBef>
-                <a:spcPts val="0"/>
-              </a:spcBef>
-              <a:spcAft>
-                <a:spcPts val="700"/>
-              </a:spcAft>
-              <a:buSzPts val="1150"/>
-              <a:buChar char="●"/>
-            </a:pPr>
-            <a:r>
-              <a:rPr lang="pt-BR" sz="1150">
-                <a:solidFill>
-                  <a:srgbClr val="1A1A1A"/>
-                </a:solidFill>
-              </a:rPr>
-              <a:t>Histórico: calvície paterna, gastrite crônica em tratamento, infecção por H. pylori já erradicada e confirmada por exames.</a:t>
-            </a:r>
-          </a:p>
-          <a:p>
-            <a:pPr indent="-228600" lvl="0" marL="228600" rtl="0" algn="l">
-              <a:lnSpc>
-                <a:spcPct val="100000"/>
-              </a:lnSpc>
-              <a:spcBef>
-                <a:spcPts val="0"/>
-              </a:spcBef>
-              <a:spcAft>
-                <a:spcPts val="700"/>
-              </a:spcAft>
-              <a:buSzPts val="1150"/>
-              <a:buChar char="●"/>
-            </a:pPr>
-            <a:r>
-              <a:rPr lang="pt-BR" sz="1150">
-                <a:solidFill>
-                  <a:srgbClr val="1A1A1A"/>
-                </a:solidFill>
-              </a:rPr>
-              <a:t>Instrumentos: ficha de anamnese capilar, tricoscopia com fotovideodermatoscópio e registro fotográfico padronizado.</a:t>
-            </a:r>
-          </a:p>
-          <a:p>
-            <a:pPr indent="-228600" lvl="0" marL="228600" rtl="0" algn="l">
-              <a:lnSpc>
-                <a:spcPct val="100000"/>
-              </a:lnSpc>
-              <a:spcBef>
-                <a:spcPts val="0"/>
-              </a:spcBef>
-              <a:spcAft>
-                <a:spcPts val="700"/>
-              </a:spcAft>
-              <a:buSzPts val="1150"/>
-              <a:buChar char="●"/>
-            </a:pPr>
-            <a:r>
-              <a:rPr lang="pt-BR" sz="1150">
-                <a:solidFill>
-                  <a:srgbClr val="1A1A1A"/>
-                </a:solidFill>
-              </a:rPr>
-              <a:t>Fase 1 (desinflamação): aromaterapia, argiloterapia e fotobiomodulação com luz azul.</a:t>
-            </a:r>
-          </a:p>
-          <a:p>
-            <a:pPr indent="-228600" lvl="0" marL="228600" rtl="0" algn="l">
-              <a:lnSpc>
-                <a:spcPct val="100000"/>
-              </a:lnSpc>
-              <a:spcBef>
-                <a:spcPts val="0"/>
-              </a:spcBef>
-              <a:spcAft>
-                <a:spcPts val="0"/>
-              </a:spcAft>
-              <a:buSzPts val="1150"/>
-              <a:buChar char="●"/>
-            </a:pPr>
-            <a:r>
-              <a:rPr lang="pt-BR" sz="1150">
-                <a:solidFill>
-                  <a:srgbClr val="1A1A1A"/>
-                </a:solidFill>
-              </a:rPr>
-              <a:t>Fase 2 (estímulo): intradermoterapia (técnica de pápula, Mescla PHD), fotobiomodulação com luz vermelha e tônico domiciliar de Capilia Longa.</a:t>
-            </a:r>
-          </a:p>
-        </p:txBody>
-      </p:sp>
+      <p:graphicFrame>
+        <p:nvGraphicFramePr>
+          <p:cNvPr id="90" name="Quadro da metodologia"/>
+          <p:cNvGraphicFramePr>
+            <a:graphicFrameLocks noGrp="1"/>
+          </p:cNvGraphicFramePr>
+          <p:nvPr/>
+        </p:nvGraphicFramePr>
+        <p:xfrm>
+          <a:off x="420000" y="1100000"/>
+          <a:ext cx="8300000" cy="2410000"/>
+        </p:xfrm>
+        <a:graphic>
+          <a:graphicData uri="http://schemas.openxmlformats.org/drawingml/2006/table">
+            <a:tbl>
+              <a:tblPr firstRow="1" bandRow="1"/>
+              <a:tblGrid>
+                <a:gridCol w="650000">
+                  <a:extLst>
+                    <a:ext uri="{9D8B030D-6E8A-4147-A177-3AD203B41FA5}">
+                      <a16:colId xmlns:a16="http://schemas.microsoft.com/office/drawing/2014/main" val="20000"/>
+                    </a:ext>
+                  </a:extLst>
+                </a:gridCol>
+                <a:gridCol w="1150000">
+                  <a:extLst>
+                    <a:ext uri="{9D8B030D-6E8A-4147-A177-3AD203B41FA5}">
+                      <a16:colId xmlns:a16="http://schemas.microsoft.com/office/drawing/2014/main" val="20001"/>
+                    </a:ext>
+                  </a:extLst>
+                </a:gridCol>
+                <a:gridCol w="2550000">
+                  <a:extLst>
+                    <a:ext uri="{9D8B030D-6E8A-4147-A177-3AD203B41FA5}">
+                      <a16:colId xmlns:a16="http://schemas.microsoft.com/office/drawing/2014/main" val="20002"/>
+                    </a:ext>
+                  </a:extLst>
+                </a:gridCol>
+                <a:gridCol w="1600000">
+                  <a:extLst>
+                    <a:ext uri="{9D8B030D-6E8A-4147-A177-3AD203B41FA5}">
+                      <a16:colId xmlns:a16="http://schemas.microsoft.com/office/drawing/2014/main" val="20003"/>
+                    </a:ext>
+                  </a:extLst>
+                </a:gridCol>
+                <a:gridCol w="2350000">
+                  <a:extLst>
+                    <a:ext uri="{9D8B030D-6E8A-4147-A177-3AD203B41FA5}">
+                      <a16:colId xmlns:a16="http://schemas.microsoft.com/office/drawing/2014/main" val="20004"/>
+                    </a:ext>
+                  </a:extLst>
+                </a:gridCol>
+              </a:tblGrid>
+              <a:tr h="330000">
+                <a:tc>
+                  <a:txBody>
+                    <a:bodyPr/>
+                    <a:lstStyle/>
+                    <a:p>
+                      <a:pPr algn="l"/>
+                      <a:r>
+                        <a:rPr lang="pt-BR" sz="900" b="1">
+                          <a:solidFill>
+                            <a:srgbClr val="FFFFFF"/>
+                          </a:solidFill>
+                        </a:rPr>
+                        <a:t>Etapa</a:t>
+                      </a:r>
+                    </a:p>
+                  </a:txBody>
+                  <a:tcPr marL="60000" marR="60000" marT="30000" marB="30000" anchor="ctr">
+                    <a:lnL w="6350">
+                      <a:solidFill>
+                        <a:srgbClr val="BFBFBF"/>
+                      </a:solidFill>
+                    </a:lnL>
+                    <a:lnR w="6350">
+                      <a:solidFill>
+                        <a:srgbClr val="BFBFBF"/>
+                      </a:solidFill>
+                    </a:lnR>
+                    <a:lnT w="6350">
+                      <a:solidFill>
+                        <a:srgbClr val="BFBFBF"/>
+                      </a:solidFill>
+                    </a:lnT>
+                    <a:lnB w="6350">
+                      <a:solidFill>
+                        <a:srgbClr val="BFBFBF"/>
+                      </a:solidFill>
+                    </a:lnB>
+                    <a:solidFill>
+                      <a:srgbClr val="0B5FA5"/>
+                    </a:solidFill>
+                  </a:tcPr>
+                </a:tc>
+                <a:tc>
+                  <a:txBody>
+                    <a:bodyPr/>
+                    <a:lstStyle/>
+                    <a:p>
+                      <a:pPr algn="l"/>
+                      <a:r>
+                        <a:rPr lang="pt-BR" sz="900" b="1">
+                          <a:solidFill>
+                            <a:srgbClr val="FFFFFF"/>
+                          </a:solidFill>
+                        </a:rPr>
+                        <a:t>Período</a:t>
+                      </a:r>
+                    </a:p>
+                  </a:txBody>
+                  <a:tcPr marL="60000" marR="60000" marT="30000" marB="30000" anchor="ctr">
+                    <a:lnL w="6350">
+                      <a:solidFill>
+                        <a:srgbClr val="BFBFBF"/>
+                      </a:solidFill>
+                    </a:lnL>
+                    <a:lnR w="6350">
+                      <a:solidFill>
+                        <a:srgbClr val="BFBFBF"/>
+                      </a:solidFill>
+                    </a:lnR>
+                    <a:lnT w="6350">
+                      <a:solidFill>
+                        <a:srgbClr val="BFBFBF"/>
+                      </a:solidFill>
+                    </a:lnT>
+                    <a:lnB w="6350">
+                      <a:solidFill>
+                        <a:srgbClr val="BFBFBF"/>
+                      </a:solidFill>
+                    </a:lnB>
+                    <a:solidFill>
+                      <a:srgbClr val="0B5FA5"/>
+                    </a:solidFill>
+                  </a:tcPr>
+                </a:tc>
+                <a:tc>
+                  <a:txBody>
+                    <a:bodyPr/>
+                    <a:lstStyle/>
+                    <a:p>
+                      <a:pPr algn="l"/>
+                      <a:r>
+                        <a:rPr lang="pt-BR" sz="900" b="1">
+                          <a:solidFill>
+                            <a:srgbClr val="FFFFFF"/>
+                          </a:solidFill>
+                        </a:rPr>
+                        <a:t>Recurso</a:t>
+                      </a:r>
+                    </a:p>
+                  </a:txBody>
+                  <a:tcPr marL="60000" marR="60000" marT="30000" marB="30000" anchor="ctr">
+                    <a:lnL w="6350">
+                      <a:solidFill>
+                        <a:srgbClr val="BFBFBF"/>
+                      </a:solidFill>
+                    </a:lnL>
+                    <a:lnR w="6350">
+                      <a:solidFill>
+                        <a:srgbClr val="BFBFBF"/>
+                      </a:solidFill>
+                    </a:lnR>
+                    <a:lnT w="6350">
+                      <a:solidFill>
+                        <a:srgbClr val="BFBFBF"/>
+                      </a:solidFill>
+                    </a:lnT>
+                    <a:lnB w="6350">
+                      <a:solidFill>
+                        <a:srgbClr val="BFBFBF"/>
+                      </a:solidFill>
+                    </a:lnB>
+                    <a:solidFill>
+                      <a:srgbClr val="0B5FA5"/>
+                    </a:solidFill>
+                  </a:tcPr>
+                </a:tc>
+                <a:tc>
+                  <a:txBody>
+                    <a:bodyPr/>
+                    <a:lstStyle/>
+                    <a:p>
+                      <a:pPr algn="l"/>
+                      <a:r>
+                        <a:rPr lang="pt-BR" sz="900" b="1">
+                          <a:solidFill>
+                            <a:srgbClr val="FFFFFF"/>
+                          </a:solidFill>
+                        </a:rPr>
+                        <a:t>Frequência</a:t>
+                      </a:r>
+                    </a:p>
+                  </a:txBody>
+                  <a:tcPr marL="60000" marR="60000" marT="30000" marB="30000" anchor="ctr">
+                    <a:lnL w="6350">
+                      <a:solidFill>
+                        <a:srgbClr val="BFBFBF"/>
+                      </a:solidFill>
+                    </a:lnL>
+                    <a:lnR w="6350">
+                      <a:solidFill>
+                        <a:srgbClr val="BFBFBF"/>
+                      </a:solidFill>
+                    </a:lnR>
+                    <a:lnT w="6350">
+                      <a:solidFill>
+                        <a:srgbClr val="BFBFBF"/>
+                      </a:solidFill>
+                    </a:lnT>
+                    <a:lnB w="6350">
+                      <a:solidFill>
+                        <a:srgbClr val="BFBFBF"/>
+                      </a:solidFill>
+                    </a:lnB>
+                    <a:solidFill>
+                      <a:srgbClr val="0B5FA5"/>
+                    </a:solidFill>
+                  </a:tcPr>
+                </a:tc>
+                <a:tc>
+                  <a:txBody>
+                    <a:bodyPr/>
+                    <a:lstStyle/>
+                    <a:p>
+                      <a:pPr algn="l"/>
+                      <a:r>
+                        <a:rPr lang="pt-BR" sz="900" b="1">
+                          <a:solidFill>
+                            <a:srgbClr val="FFFFFF"/>
+                          </a:solidFill>
+                        </a:rPr>
+                        <a:t>Como foi feito</a:t>
+                      </a:r>
+                    </a:p>
+                  </a:txBody>
+                  <a:tcPr marL="60000" marR="60000" marT="30000" marB="30000" anchor="ctr">
+                    <a:lnL w="6350">
+                      <a:solidFill>
+                        <a:srgbClr val="BFBFBF"/>
+                      </a:solidFill>
+                    </a:lnL>
+                    <a:lnR w="6350">
+                      <a:solidFill>
+                        <a:srgbClr val="BFBFBF"/>
+                      </a:solidFill>
+                    </a:lnR>
+                    <a:lnT w="6350">
+                      <a:solidFill>
+                        <a:srgbClr val="BFBFBF"/>
+                      </a:solidFill>
+                    </a:lnT>
+                    <a:lnB w="6350">
+                      <a:solidFill>
+                        <a:srgbClr val="BFBFBF"/>
+                      </a:solidFill>
+                    </a:lnB>
+                    <a:solidFill>
+                      <a:srgbClr val="0B5FA5"/>
+                    </a:solidFill>
+                  </a:tcPr>
+                </a:tc>
+                <a:extLst>
+                  <a:ext uri="{0D108BD9-81ED-4DB2-BD59-A6C34878D82A}">
+                    <a16:rowId xmlns:a16="http://schemas.microsoft.com/office/drawing/2014/main" val="10000"/>
+                  </a:ext>
+                </a:extLst>
+              </a:tr>
+              <a:tr h="520000">
+                <a:tc>
+                  <a:txBody>
+                    <a:bodyPr/>
+                    <a:lstStyle/>
+                    <a:p>
+                      <a:pPr algn="l"/>
+                      <a:r>
+                        <a:rPr lang="pt-BR" sz="900">
+                          <a:solidFill>
+                            <a:srgbClr val="1A1A1A"/>
+                          </a:solidFill>
+                        </a:rPr>
+                        <a:t>1</a:t>
+                      </a:r>
+                    </a:p>
+                  </a:txBody>
+                  <a:tcPr marL="60000" marR="60000" marT="30000" marB="30000" anchor="ctr">
+                    <a:lnL w="6350">
+                      <a:solidFill>
+                        <a:srgbClr val="BFBFBF"/>
+                      </a:solidFill>
+                    </a:lnL>
+                    <a:lnR w="6350">
+                      <a:solidFill>
+                        <a:srgbClr val="BFBFBF"/>
+                      </a:solidFill>
+                    </a:lnR>
+                    <a:lnT w="6350">
+                      <a:solidFill>
+                        <a:srgbClr val="BFBFBF"/>
+                      </a:solidFill>
+                    </a:lnT>
+                    <a:lnB w="6350">
+                      <a:solidFill>
+                        <a:srgbClr val="BFBFBF"/>
+                      </a:solidFill>
+                    </a:lnB>
+                    <a:solidFill>
+                      <a:srgbClr val="EAF2FB"/>
+                    </a:solidFill>
+                  </a:tcPr>
+                </a:tc>
+                <a:tc>
+                  <a:txBody>
+                    <a:bodyPr/>
+                    <a:lstStyle/>
+                    <a:p>
+                      <a:pPr algn="l"/>
+                      <a:r>
+                        <a:rPr lang="pt-BR" sz="900">
+                          <a:solidFill>
+                            <a:srgbClr val="1A1A1A"/>
+                          </a:solidFill>
+                        </a:rPr>
+                        <a:t>Mês 1</a:t>
+                      </a:r>
+                    </a:p>
+                  </a:txBody>
+                  <a:tcPr marL="60000" marR="60000" marT="30000" marB="30000" anchor="ctr">
+                    <a:lnL w="6350">
+                      <a:solidFill>
+                        <a:srgbClr val="BFBFBF"/>
+                      </a:solidFill>
+                    </a:lnL>
+                    <a:lnR w="6350">
+                      <a:solidFill>
+                        <a:srgbClr val="BFBFBF"/>
+                      </a:solidFill>
+                    </a:lnR>
+                    <a:lnT w="6350">
+                      <a:solidFill>
+                        <a:srgbClr val="BFBFBF"/>
+                      </a:solidFill>
+                    </a:lnT>
+                    <a:lnB w="6350">
+                      <a:solidFill>
+                        <a:srgbClr val="BFBFBF"/>
+                      </a:solidFill>
+                    </a:lnB>
+                    <a:solidFill>
+                      <a:srgbClr val="EAF2FB"/>
+                    </a:solidFill>
+                  </a:tcPr>
+                </a:tc>
+                <a:tc>
+                  <a:txBody>
+                    <a:bodyPr/>
+                    <a:lstStyle/>
+                    <a:p>
+                      <a:pPr algn="l"/>
+                      <a:r>
+                        <a:rPr lang="pt-BR" sz="900">
+                          <a:solidFill>
+                            <a:srgbClr val="1A1A1A"/>
+                          </a:solidFill>
+                        </a:rPr>
+                        <a:t>Intradermoterapia (Mescla PHD)</a:t>
+                      </a:r>
+                    </a:p>
+                  </a:txBody>
+                  <a:tcPr marL="60000" marR="60000" marT="30000" marB="30000" anchor="ctr">
+                    <a:lnL w="6350">
+                      <a:solidFill>
+                        <a:srgbClr val="BFBFBF"/>
+                      </a:solidFill>
+                    </a:lnL>
+                    <a:lnR w="6350">
+                      <a:solidFill>
+                        <a:srgbClr val="BFBFBF"/>
+                      </a:solidFill>
+                    </a:lnR>
+                    <a:lnT w="6350">
+                      <a:solidFill>
+                        <a:srgbClr val="BFBFBF"/>
+                      </a:solidFill>
+                    </a:lnT>
+                    <a:lnB w="6350">
+                      <a:solidFill>
+                        <a:srgbClr val="BFBFBF"/>
+                      </a:solidFill>
+                    </a:lnB>
+                    <a:solidFill>
+                      <a:srgbClr val="EAF2FB"/>
+                    </a:solidFill>
+                  </a:tcPr>
+                </a:tc>
+                <a:tc>
+                  <a:txBody>
+                    <a:bodyPr/>
+                    <a:lstStyle/>
+                    <a:p>
+                      <a:pPr algn="l"/>
+                      <a:r>
+                        <a:rPr lang="pt-BR" sz="900">
+                          <a:solidFill>
+                            <a:srgbClr val="1A1A1A"/>
+                          </a:solidFill>
+                        </a:rPr>
+                        <a:t>1 vez por semana</a:t>
+                      </a:r>
+                    </a:p>
+                  </a:txBody>
+                  <a:tcPr marL="60000" marR="60000" marT="30000" marB="30000" anchor="ctr">
+                    <a:lnL w="6350">
+                      <a:solidFill>
+                        <a:srgbClr val="BFBFBF"/>
+                      </a:solidFill>
+                    </a:lnL>
+                    <a:lnR w="6350">
+                      <a:solidFill>
+                        <a:srgbClr val="BFBFBF"/>
+                      </a:solidFill>
+                    </a:lnR>
+                    <a:lnT w="6350">
+                      <a:solidFill>
+                        <a:srgbClr val="BFBFBF"/>
+                      </a:solidFill>
+                    </a:lnT>
+                    <a:lnB w="6350">
+                      <a:solidFill>
+                        <a:srgbClr val="BFBFBF"/>
+                      </a:solidFill>
+                    </a:lnB>
+                    <a:solidFill>
+                      <a:srgbClr val="EAF2FB"/>
+                    </a:solidFill>
+                  </a:tcPr>
+                </a:tc>
+                <a:tc>
+                  <a:txBody>
+                    <a:bodyPr/>
+                    <a:lstStyle/>
+                    <a:p>
+                      <a:pPr algn="l"/>
+                      <a:r>
+                        <a:rPr lang="pt-BR" sz="900">
+                          <a:solidFill>
+                            <a:srgbClr val="1A1A1A"/>
+                          </a:solidFill>
+                        </a:rPr>
+                        <a:t>técnica de pápula, agulha 30G, 2–4 mm, ~0,05–0,1 mL por ponto, pápulas a cada 2 cm</a:t>
+                      </a:r>
+                    </a:p>
+                  </a:txBody>
+                  <a:tcPr marL="60000" marR="60000" marT="30000" marB="30000" anchor="ctr">
+                    <a:lnL w="6350">
+                      <a:solidFill>
+                        <a:srgbClr val="BFBFBF"/>
+                      </a:solidFill>
+                    </a:lnL>
+                    <a:lnR w="6350">
+                      <a:solidFill>
+                        <a:srgbClr val="BFBFBF"/>
+                      </a:solidFill>
+                    </a:lnR>
+                    <a:lnT w="6350">
+                      <a:solidFill>
+                        <a:srgbClr val="BFBFBF"/>
+                      </a:solidFill>
+                    </a:lnT>
+                    <a:lnB w="6350">
+                      <a:solidFill>
+                        <a:srgbClr val="BFBFBF"/>
+                      </a:solidFill>
+                    </a:lnB>
+                    <a:solidFill>
+                      <a:srgbClr val="EAF2FB"/>
+                    </a:solidFill>
+                  </a:tcPr>
+                </a:tc>
+                <a:extLst>
+                  <a:ext uri="{0D108BD9-81ED-4DB2-BD59-A6C34878D82A}">
+                    <a16:rowId xmlns:a16="http://schemas.microsoft.com/office/drawing/2014/main" val="10001"/>
+                  </a:ext>
+                </a:extLst>
+              </a:tr>
+              <a:tr h="520000">
+                <a:tc>
+                  <a:txBody>
+                    <a:bodyPr/>
+                    <a:lstStyle/>
+                    <a:p>
+                      <a:pPr algn="l"/>
+                      <a:r>
+                        <a:rPr lang="pt-BR" sz="900">
+                          <a:solidFill>
+                            <a:srgbClr val="1A1A1A"/>
+                          </a:solidFill>
+                        </a:rPr>
+                        <a:t>2</a:t>
+                      </a:r>
+                    </a:p>
+                  </a:txBody>
+                  <a:tcPr marL="60000" marR="60000" marT="30000" marB="30000" anchor="ctr">
+                    <a:lnL w="6350">
+                      <a:solidFill>
+                        <a:srgbClr val="BFBFBF"/>
+                      </a:solidFill>
+                    </a:lnL>
+                    <a:lnR w="6350">
+                      <a:solidFill>
+                        <a:srgbClr val="BFBFBF"/>
+                      </a:solidFill>
+                    </a:lnR>
+                    <a:lnT w="6350">
+                      <a:solidFill>
+                        <a:srgbClr val="BFBFBF"/>
+                      </a:solidFill>
+                    </a:lnT>
+                    <a:lnB w="6350">
+                      <a:solidFill>
+                        <a:srgbClr val="BFBFBF"/>
+                      </a:solidFill>
+                    </a:lnB>
+                    <a:solidFill>
+                      <a:srgbClr val="FFFFFF"/>
+                    </a:solidFill>
+                  </a:tcPr>
+                </a:tc>
+                <a:tc>
+                  <a:txBody>
+                    <a:bodyPr/>
+                    <a:lstStyle/>
+                    <a:p>
+                      <a:pPr algn="l"/>
+                      <a:r>
+                        <a:rPr lang="pt-BR" sz="900">
+                          <a:solidFill>
+                            <a:srgbClr val="1A1A1A"/>
+                          </a:solidFill>
+                        </a:rPr>
+                        <a:t>A partir do mês 2</a:t>
+                      </a:r>
+                    </a:p>
+                  </a:txBody>
+                  <a:tcPr marL="60000" marR="60000" marT="30000" marB="30000" anchor="ctr">
+                    <a:lnL w="6350">
+                      <a:solidFill>
+                        <a:srgbClr val="BFBFBF"/>
+                      </a:solidFill>
+                    </a:lnL>
+                    <a:lnR w="6350">
+                      <a:solidFill>
+                        <a:srgbClr val="BFBFBF"/>
+                      </a:solidFill>
+                    </a:lnR>
+                    <a:lnT w="6350">
+                      <a:solidFill>
+                        <a:srgbClr val="BFBFBF"/>
+                      </a:solidFill>
+                    </a:lnT>
+                    <a:lnB w="6350">
+                      <a:solidFill>
+                        <a:srgbClr val="BFBFBF"/>
+                      </a:solidFill>
+                    </a:lnB>
+                    <a:solidFill>
+                      <a:srgbClr val="FFFFFF"/>
+                    </a:solidFill>
+                  </a:tcPr>
+                </a:tc>
+                <a:tc>
+                  <a:txBody>
+                    <a:bodyPr/>
+                    <a:lstStyle/>
+                    <a:p>
+                      <a:pPr algn="l"/>
+                      <a:r>
+                        <a:rPr lang="pt-BR" sz="900">
+                          <a:solidFill>
+                            <a:srgbClr val="1A1A1A"/>
+                          </a:solidFill>
+                        </a:rPr>
+                        <a:t>Fotobiomodulação (laser vermelho 655–660 nm, ~2 J/cm², ~20 min)</a:t>
+                      </a:r>
+                    </a:p>
+                  </a:txBody>
+                  <a:tcPr marL="60000" marR="60000" marT="30000" marB="30000" anchor="ctr">
+                    <a:lnL w="6350">
+                      <a:solidFill>
+                        <a:srgbClr val="BFBFBF"/>
+                      </a:solidFill>
+                    </a:lnL>
+                    <a:lnR w="6350">
+                      <a:solidFill>
+                        <a:srgbClr val="BFBFBF"/>
+                      </a:solidFill>
+                    </a:lnR>
+                    <a:lnT w="6350">
+                      <a:solidFill>
+                        <a:srgbClr val="BFBFBF"/>
+                      </a:solidFill>
+                    </a:lnT>
+                    <a:lnB w="6350">
+                      <a:solidFill>
+                        <a:srgbClr val="BFBFBF"/>
+                      </a:solidFill>
+                    </a:lnB>
+                    <a:solidFill>
+                      <a:srgbClr val="FFFFFF"/>
+                    </a:solidFill>
+                  </a:tcPr>
+                </a:tc>
+                <a:tc>
+                  <a:txBody>
+                    <a:bodyPr/>
+                    <a:lstStyle/>
+                    <a:p>
+                      <a:pPr algn="l"/>
+                      <a:r>
+                        <a:rPr lang="pt-BR" sz="900">
+                          <a:solidFill>
+                            <a:srgbClr val="1A1A1A"/>
+                          </a:solidFill>
+                        </a:rPr>
+                        <a:t>1 sessão a cada 15 dias</a:t>
+                      </a:r>
+                    </a:p>
+                  </a:txBody>
+                  <a:tcPr marL="60000" marR="60000" marT="30000" marB="30000" anchor="ctr">
+                    <a:lnL w="6350">
+                      <a:solidFill>
+                        <a:srgbClr val="BFBFBF"/>
+                      </a:solidFill>
+                    </a:lnL>
+                    <a:lnR w="6350">
+                      <a:solidFill>
+                        <a:srgbClr val="BFBFBF"/>
+                      </a:solidFill>
+                    </a:lnR>
+                    <a:lnT w="6350">
+                      <a:solidFill>
+                        <a:srgbClr val="BFBFBF"/>
+                      </a:solidFill>
+                    </a:lnT>
+                    <a:lnB w="6350">
+                      <a:solidFill>
+                        <a:srgbClr val="BFBFBF"/>
+                      </a:solidFill>
+                    </a:lnB>
+                    <a:solidFill>
+                      <a:srgbClr val="FFFFFF"/>
+                    </a:solidFill>
+                  </a:tcPr>
+                </a:tc>
+                <a:tc>
+                  <a:txBody>
+                    <a:bodyPr/>
+                    <a:lstStyle/>
+                    <a:p>
+                      <a:pPr algn="l"/>
+                      <a:r>
+                        <a:rPr lang="pt-BR" sz="900">
+                          <a:solidFill>
+                            <a:srgbClr val="1A1A1A"/>
+                          </a:solidFill>
+                        </a:rPr>
+                        <a:t>intercalada com a intradermoterapia</a:t>
+                      </a:r>
+                    </a:p>
+                  </a:txBody>
+                  <a:tcPr marL="60000" marR="60000" marT="30000" marB="30000" anchor="ctr">
+                    <a:lnL w="6350">
+                      <a:solidFill>
+                        <a:srgbClr val="BFBFBF"/>
+                      </a:solidFill>
+                    </a:lnL>
+                    <a:lnR w="6350">
+                      <a:solidFill>
+                        <a:srgbClr val="BFBFBF"/>
+                      </a:solidFill>
+                    </a:lnR>
+                    <a:lnT w="6350">
+                      <a:solidFill>
+                        <a:srgbClr val="BFBFBF"/>
+                      </a:solidFill>
+                    </a:lnT>
+                    <a:lnB w="6350">
+                      <a:solidFill>
+                        <a:srgbClr val="BFBFBF"/>
+                      </a:solidFill>
+                    </a:lnB>
+                    <a:solidFill>
+                      <a:srgbClr val="FFFFFF"/>
+                    </a:solidFill>
+                  </a:tcPr>
+                </a:tc>
+                <a:extLst>
+                  <a:ext uri="{0D108BD9-81ED-4DB2-BD59-A6C34878D82A}">
+                    <a16:rowId xmlns:a16="http://schemas.microsoft.com/office/drawing/2014/main" val="10002"/>
+                  </a:ext>
+                </a:extLst>
+              </a:tr>
+              <a:tr h="520000">
+                <a:tc>
+                  <a:txBody>
+                    <a:bodyPr/>
+                    <a:lstStyle/>
+                    <a:p>
+                      <a:pPr algn="l"/>
+                      <a:r>
+                        <a:rPr lang="pt-BR" sz="900">
+                          <a:solidFill>
+                            <a:srgbClr val="1A1A1A"/>
+                          </a:solidFill>
+                        </a:rPr>
+                        <a:t>2</a:t>
+                      </a:r>
+                    </a:p>
+                  </a:txBody>
+                  <a:tcPr marL="60000" marR="60000" marT="30000" marB="30000" anchor="ctr">
+                    <a:lnL w="6350">
+                      <a:solidFill>
+                        <a:srgbClr val="BFBFBF"/>
+                      </a:solidFill>
+                    </a:lnL>
+                    <a:lnR w="6350">
+                      <a:solidFill>
+                        <a:srgbClr val="BFBFBF"/>
+                      </a:solidFill>
+                    </a:lnR>
+                    <a:lnT w="6350">
+                      <a:solidFill>
+                        <a:srgbClr val="BFBFBF"/>
+                      </a:solidFill>
+                    </a:lnT>
+                    <a:lnB w="6350">
+                      <a:solidFill>
+                        <a:srgbClr val="BFBFBF"/>
+                      </a:solidFill>
+                    </a:lnB>
+                    <a:solidFill>
+                      <a:srgbClr val="EAF2FB"/>
+                    </a:solidFill>
+                  </a:tcPr>
+                </a:tc>
+                <a:tc>
+                  <a:txBody>
+                    <a:bodyPr/>
+                    <a:lstStyle/>
+                    <a:p>
+                      <a:pPr algn="l"/>
+                      <a:r>
+                        <a:rPr lang="pt-BR" sz="900">
+                          <a:solidFill>
+                            <a:srgbClr val="1A1A1A"/>
+                          </a:solidFill>
+                        </a:rPr>
+                        <a:t>A partir do mês 2</a:t>
+                      </a:r>
+                    </a:p>
+                  </a:txBody>
+                  <a:tcPr marL="60000" marR="60000" marT="30000" marB="30000" anchor="ctr">
+                    <a:lnL w="6350">
+                      <a:solidFill>
+                        <a:srgbClr val="BFBFBF"/>
+                      </a:solidFill>
+                    </a:lnL>
+                    <a:lnR w="6350">
+                      <a:solidFill>
+                        <a:srgbClr val="BFBFBF"/>
+                      </a:solidFill>
+                    </a:lnR>
+                    <a:lnT w="6350">
+                      <a:solidFill>
+                        <a:srgbClr val="BFBFBF"/>
+                      </a:solidFill>
+                    </a:lnT>
+                    <a:lnB w="6350">
+                      <a:solidFill>
+                        <a:srgbClr val="BFBFBF"/>
+                      </a:solidFill>
+                    </a:lnB>
+                    <a:solidFill>
+                      <a:srgbClr val="EAF2FB"/>
+                    </a:solidFill>
+                  </a:tcPr>
+                </a:tc>
+                <a:tc>
+                  <a:txBody>
+                    <a:bodyPr/>
+                    <a:lstStyle/>
+                    <a:p>
+                      <a:pPr algn="l"/>
+                      <a:r>
+                        <a:rPr lang="pt-BR" sz="900">
+                          <a:solidFill>
+                            <a:srgbClr val="1A1A1A"/>
+                          </a:solidFill>
+                        </a:rPr>
+                        <a:t>Intradermoterapia (mesma técnica)</a:t>
+                      </a:r>
+                    </a:p>
+                  </a:txBody>
+                  <a:tcPr marL="60000" marR="60000" marT="30000" marB="30000" anchor="ctr">
+                    <a:lnL w="6350">
+                      <a:solidFill>
+                        <a:srgbClr val="BFBFBF"/>
+                      </a:solidFill>
+                    </a:lnL>
+                    <a:lnR w="6350">
+                      <a:solidFill>
+                        <a:srgbClr val="BFBFBF"/>
+                      </a:solidFill>
+                    </a:lnR>
+                    <a:lnT w="6350">
+                      <a:solidFill>
+                        <a:srgbClr val="BFBFBF"/>
+                      </a:solidFill>
+                    </a:lnT>
+                    <a:lnB w="6350">
+                      <a:solidFill>
+                        <a:srgbClr val="BFBFBF"/>
+                      </a:solidFill>
+                    </a:lnB>
+                    <a:solidFill>
+                      <a:srgbClr val="EAF2FB"/>
+                    </a:solidFill>
+                  </a:tcPr>
+                </a:tc>
+                <a:tc>
+                  <a:txBody>
+                    <a:bodyPr/>
+                    <a:lstStyle/>
+                    <a:p>
+                      <a:pPr algn="l"/>
+                      <a:r>
+                        <a:rPr lang="pt-BR" sz="900">
+                          <a:solidFill>
+                            <a:srgbClr val="1A1A1A"/>
+                          </a:solidFill>
+                        </a:rPr>
+                        <a:t>1 sessão a cada 15 dias</a:t>
+                      </a:r>
+                    </a:p>
+                  </a:txBody>
+                  <a:tcPr marL="60000" marR="60000" marT="30000" marB="30000" anchor="ctr">
+                    <a:lnL w="6350">
+                      <a:solidFill>
+                        <a:srgbClr val="BFBFBF"/>
+                      </a:solidFill>
+                    </a:lnL>
+                    <a:lnR w="6350">
+                      <a:solidFill>
+                        <a:srgbClr val="BFBFBF"/>
+                      </a:solidFill>
+                    </a:lnR>
+                    <a:lnT w="6350">
+                      <a:solidFill>
+                        <a:srgbClr val="BFBFBF"/>
+                      </a:solidFill>
+                    </a:lnT>
+                    <a:lnB w="6350">
+                      <a:solidFill>
+                        <a:srgbClr val="BFBFBF"/>
+                      </a:solidFill>
+                    </a:lnB>
+                    <a:solidFill>
+                      <a:srgbClr val="EAF2FB"/>
+                    </a:solidFill>
+                  </a:tcPr>
+                </a:tc>
+                <a:tc>
+                  <a:txBody>
+                    <a:bodyPr/>
+                    <a:lstStyle/>
+                    <a:p>
+                      <a:pPr algn="l"/>
+                      <a:r>
+                        <a:rPr lang="pt-BR" sz="900">
+                          <a:solidFill>
+                            <a:srgbClr val="1A1A1A"/>
+                          </a:solidFill>
+                        </a:rPr>
+                        <a:t>intercalada com o laser</a:t>
+                      </a:r>
+                    </a:p>
+                  </a:txBody>
+                  <a:tcPr marL="60000" marR="60000" marT="30000" marB="30000" anchor="ctr">
+                    <a:lnL w="6350">
+                      <a:solidFill>
+                        <a:srgbClr val="BFBFBF"/>
+                      </a:solidFill>
+                    </a:lnL>
+                    <a:lnR w="6350">
+                      <a:solidFill>
+                        <a:srgbClr val="BFBFBF"/>
+                      </a:solidFill>
+                    </a:lnR>
+                    <a:lnT w="6350">
+                      <a:solidFill>
+                        <a:srgbClr val="BFBFBF"/>
+                      </a:solidFill>
+                    </a:lnT>
+                    <a:lnB w="6350">
+                      <a:solidFill>
+                        <a:srgbClr val="BFBFBF"/>
+                      </a:solidFill>
+                    </a:lnB>
+                    <a:solidFill>
+                      <a:srgbClr val="EAF2FB"/>
+                    </a:solidFill>
+                  </a:tcPr>
+                </a:tc>
+                <a:extLst>
+                  <a:ext uri="{0D108BD9-81ED-4DB2-BD59-A6C34878D82A}">
+                    <a16:rowId xmlns:a16="http://schemas.microsoft.com/office/drawing/2014/main" val="10003"/>
+                  </a:ext>
+                </a:extLst>
+              </a:tr>
+              <a:tr h="520000">
+                <a:tc>
+                  <a:txBody>
+                    <a:bodyPr/>
+                    <a:lstStyle/>
+                    <a:p>
+                      <a:pPr algn="l"/>
+                      <a:r>
+                        <a:rPr lang="pt-BR" sz="900">
+                          <a:solidFill>
+                            <a:srgbClr val="1A1A1A"/>
+                          </a:solidFill>
+                        </a:rPr>
+                        <a:t>Contínuo</a:t>
+                      </a:r>
+                    </a:p>
+                  </a:txBody>
+                  <a:tcPr marL="60000" marR="60000" marT="30000" marB="30000" anchor="ctr">
+                    <a:lnL w="6350">
+                      <a:solidFill>
+                        <a:srgbClr val="BFBFBF"/>
+                      </a:solidFill>
+                    </a:lnL>
+                    <a:lnR w="6350">
+                      <a:solidFill>
+                        <a:srgbClr val="BFBFBF"/>
+                      </a:solidFill>
+                    </a:lnR>
+                    <a:lnT w="6350">
+                      <a:solidFill>
+                        <a:srgbClr val="BFBFBF"/>
+                      </a:solidFill>
+                    </a:lnT>
+                    <a:lnB w="6350">
+                      <a:solidFill>
+                        <a:srgbClr val="BFBFBF"/>
+                      </a:solidFill>
+                    </a:lnB>
+                    <a:solidFill>
+                      <a:srgbClr val="FFFFFF"/>
+                    </a:solidFill>
+                  </a:tcPr>
+                </a:tc>
+                <a:tc>
+                  <a:txBody>
+                    <a:bodyPr/>
+                    <a:lstStyle/>
+                    <a:p>
+                      <a:pPr algn="l"/>
+                      <a:r>
+                        <a:rPr lang="pt-BR" sz="900">
+                          <a:solidFill>
+                            <a:srgbClr val="1A1A1A"/>
+                          </a:solidFill>
+                        </a:rPr>
+                        <a:t>Todo o período</a:t>
+                      </a:r>
+                    </a:p>
+                  </a:txBody>
+                  <a:tcPr marL="60000" marR="60000" marT="30000" marB="30000" anchor="ctr">
+                    <a:lnL w="6350">
+                      <a:solidFill>
+                        <a:srgbClr val="BFBFBF"/>
+                      </a:solidFill>
+                    </a:lnL>
+                    <a:lnR w="6350">
+                      <a:solidFill>
+                        <a:srgbClr val="BFBFBF"/>
+                      </a:solidFill>
+                    </a:lnR>
+                    <a:lnT w="6350">
+                      <a:solidFill>
+                        <a:srgbClr val="BFBFBF"/>
+                      </a:solidFill>
+                    </a:lnT>
+                    <a:lnB w="6350">
+                      <a:solidFill>
+                        <a:srgbClr val="BFBFBF"/>
+                      </a:solidFill>
+                    </a:lnB>
+                    <a:solidFill>
+                      <a:srgbClr val="FFFFFF"/>
+                    </a:solidFill>
+                  </a:tcPr>
+                </a:tc>
+                <a:tc>
+                  <a:txBody>
+                    <a:bodyPr/>
+                    <a:lstStyle/>
+                    <a:p>
+                      <a:pPr algn="l"/>
+                      <a:r>
+                        <a:rPr lang="pt-BR" sz="900">
+                          <a:solidFill>
+                            <a:srgbClr val="1A1A1A"/>
+                          </a:solidFill>
+                        </a:rPr>
+                        <a:t>Tônico Capilia Longa</a:t>
+                      </a:r>
+                    </a:p>
+                  </a:txBody>
+                  <a:tcPr marL="60000" marR="60000" marT="30000" marB="30000" anchor="ctr">
+                    <a:lnL w="6350">
+                      <a:solidFill>
+                        <a:srgbClr val="BFBFBF"/>
+                      </a:solidFill>
+                    </a:lnL>
+                    <a:lnR w="6350">
+                      <a:solidFill>
+                        <a:srgbClr val="BFBFBF"/>
+                      </a:solidFill>
+                    </a:lnR>
+                    <a:lnT w="6350">
+                      <a:solidFill>
+                        <a:srgbClr val="BFBFBF"/>
+                      </a:solidFill>
+                    </a:lnT>
+                    <a:lnB w="6350">
+                      <a:solidFill>
+                        <a:srgbClr val="BFBFBF"/>
+                      </a:solidFill>
+                    </a:lnB>
+                    <a:solidFill>
+                      <a:srgbClr val="FFFFFF"/>
+                    </a:solidFill>
+                  </a:tcPr>
+                </a:tc>
+                <a:tc>
+                  <a:txBody>
+                    <a:bodyPr/>
+                    <a:lstStyle/>
+                    <a:p>
+                      <a:pPr algn="l"/>
+                      <a:r>
+                        <a:rPr lang="pt-BR" sz="900">
+                          <a:solidFill>
+                            <a:srgbClr val="1A1A1A"/>
+                          </a:solidFill>
+                        </a:rPr>
+                        <a:t>diário, em casa</a:t>
+                      </a:r>
+                    </a:p>
+                  </a:txBody>
+                  <a:tcPr marL="60000" marR="60000" marT="30000" marB="30000" anchor="ctr">
+                    <a:lnL w="6350">
+                      <a:solidFill>
+                        <a:srgbClr val="BFBFBF"/>
+                      </a:solidFill>
+                    </a:lnL>
+                    <a:lnR w="6350">
+                      <a:solidFill>
+                        <a:srgbClr val="BFBFBF"/>
+                      </a:solidFill>
+                    </a:lnR>
+                    <a:lnT w="6350">
+                      <a:solidFill>
+                        <a:srgbClr val="BFBFBF"/>
+                      </a:solidFill>
+                    </a:lnT>
+                    <a:lnB w="6350">
+                      <a:solidFill>
+                        <a:srgbClr val="BFBFBF"/>
+                      </a:solidFill>
+                    </a:lnB>
+                    <a:solidFill>
+                      <a:srgbClr val="FFFFFF"/>
+                    </a:solidFill>
+                  </a:tcPr>
+                </a:tc>
+                <a:tc>
+                  <a:txBody>
+                    <a:bodyPr/>
+                    <a:lstStyle/>
+                    <a:p>
+                      <a:pPr algn="l"/>
+                      <a:r>
+                        <a:rPr lang="pt-BR" sz="900">
+                          <a:solidFill>
+                            <a:srgbClr val="1A1A1A"/>
+                          </a:solidFill>
+                        </a:rPr>
+                        <a:t>cuidado domiciliar</a:t>
+                      </a:r>
+                    </a:p>
+                  </a:txBody>
+                  <a:tcPr marL="60000" marR="60000" marT="30000" marB="30000" anchor="ctr">
+                    <a:lnL w="6350">
+                      <a:solidFill>
+                        <a:srgbClr val="BFBFBF"/>
+                      </a:solidFill>
+                    </a:lnL>
+                    <a:lnR w="6350">
+                      <a:solidFill>
+                        <a:srgbClr val="BFBFBF"/>
+                      </a:solidFill>
+                    </a:lnR>
+                    <a:lnT w="6350">
+                      <a:solidFill>
+                        <a:srgbClr val="BFBFBF"/>
+                      </a:solidFill>
+                    </a:lnT>
+                    <a:lnB w="6350">
+                      <a:solidFill>
+                        <a:srgbClr val="BFBFBF"/>
+                      </a:solidFill>
+                    </a:lnB>
+                    <a:solidFill>
+                      <a:srgbClr val="FFFFFF"/>
+                    </a:solidFill>
+                  </a:tcPr>
+                </a:tc>
+                <a:extLst>
+                  <a:ext uri="{0D108BD9-81ED-4DB2-BD59-A6C34878D82A}">
+                    <a16:rowId xmlns:a16="http://schemas.microsoft.com/office/drawing/2014/main" val="10004"/>
+                  </a:ext>
+                </a:extLst>
+              </a:tr>
+            </a:tbl>
+          </a:graphicData>
+        </a:graphic>
+      </p:graphicFrame>
     </p:spTree>
   </p:cSld>
   <p:clrMapOvr>
@@ -6467,23 +7656,24 @@
 </file>
 
 <file path=ppt/slides/slide6.xml><?xml version="1.0" encoding="utf-8"?>
-<p:sld xmlns:a="http://schemas.openxmlformats.org/drawingml/2006/main" xmlns:r="http://schemas.openxmlformats.org/officeDocument/2006/relationships" xmlns:mc="http://schemas.openxmlformats.org/markup-compatibility/2006" xmlns:mv="urn:schemas-microsoft-com:mac:vml" xmlns:p="http://schemas.openxmlformats.org/presentationml/2006/main" xmlns:c="http://schemas.openxmlformats.org/drawingml/2006/chart" xmlns:dgm="http://schemas.openxmlformats.org/drawingml/2006/diagram" xmlns:o="urn:schemas-microsoft-com:office:office" xmlns:v="urn:schemas-microsoft-com:vml" xmlns:pvml="urn:schemas-microsoft-com:office:powerpoint" xmlns:com="http://schemas.openxmlformats.org/drawingml/2006/compatibility" xmlns:p14="http://schemas.microsoft.com/office/powerpoint/2010/main" xmlns:p15="http://schemas.microsoft.com/office/powerpoint/2012/main" xmlns:ahyp="http://schemas.microsoft.com/office/drawing/2018/hyperlinkcolor">
+<p:sld xmlns:a="http://schemas.openxmlformats.org/drawingml/2006/main" xmlns:r="http://schemas.openxmlformats.org/officeDocument/2006/relationships" xmlns:p="http://schemas.openxmlformats.org/presentationml/2006/main">
   <p:cSld>
     <p:bg>
       <p:bgPr>
         <a:blipFill>
-          <a:blip r:embed="rId3">
+          <a:blip r:embed="rId2">
             <a:alphaModFix/>
           </a:blip>
           <a:stretch>
             <a:fillRect/>
           </a:stretch>
         </a:blipFill>
+        <a:effectLst/>
       </p:bgPr>
     </p:bg>
     <p:spTree>
       <p:nvGrpSpPr>
-        <p:cNvPr id="59" name="Shape 59"/>
+        <p:cNvPr id="1" name="Shape 59"/>
         <p:cNvGrpSpPr/>
         <p:nvPr/>
       </p:nvGrpSpPr>
@@ -6498,7 +7688,9 @@
       <p:sp>
         <p:nvSpPr>
           <p:cNvPr id="60" name="Google Shape;60;p14"/>
-          <p:cNvSpPr txBox="1"/>
+          <p:cNvSpPr txBox="1">
+            <a:spLocks noGrp="1"/>
+          </p:cNvSpPr>
           <p:nvPr>
             <p:ph type="title"/>
           </p:nvPr>
@@ -6513,12 +7705,12 @@
           </a:prstGeom>
         </p:spPr>
         <p:txBody>
-          <a:bodyPr anchorCtr="0" anchor="t" bIns="91425" lIns="91425" spcFirstLastPara="1" rIns="91425" wrap="square" tIns="91425">
-            <a:normAutofit fontScale="90000"/>
+          <a:bodyPr spcFirstLastPara="1" wrap="square" lIns="91425" tIns="91425" rIns="91425" bIns="91425" anchor="t" anchorCtr="0">
+            <a:normAutofit/>
           </a:bodyPr>
           <a:lstStyle/>
           <a:p>
-            <a:pPr indent="0" lvl="0" marL="0" rtl="0" algn="l">
+            <a:pPr marL="0" lvl="0" indent="0" algn="l" rtl="0">
               <a:lnSpc>
                 <a:spcPct val="100000"/>
               </a:lnSpc>
@@ -6544,9 +7736,11 @@
       <p:sp>
         <p:nvSpPr>
           <p:cNvPr id="61" name="Google Shape;61;p14"/>
-          <p:cNvSpPr txBox="1"/>
+          <p:cNvSpPr txBox="1">
+            <a:spLocks noGrp="1"/>
+          </p:cNvSpPr>
           <p:nvPr>
-            <p:ph idx="1" type="body"/>
+            <p:ph type="body" idx="1"/>
           </p:nvPr>
         </p:nvSpPr>
         <p:spPr>
@@ -6559,12 +7753,12 @@
           </a:prstGeom>
         </p:spPr>
         <p:txBody>
-          <a:bodyPr anchorCtr="0" anchor="ctr" bIns="91425" lIns="91425" spcFirstLastPara="1" rIns="91425" wrap="square" tIns="91425">
+          <a:bodyPr spcFirstLastPara="1" wrap="square" lIns="91425" tIns="91425" rIns="91425" bIns="91425" anchor="ctr" anchorCtr="0">
             <a:normAutofit/>
           </a:bodyPr>
           <a:lstStyle/>
           <a:p>
-            <a:pPr indent="-228600" lvl="0" marL="228600" rtl="0" algn="l">
+            <a:pPr marL="228600" lvl="0" indent="-228600" algn="l" rtl="0">
               <a:lnSpc>
                 <a:spcPct val="100000"/>
               </a:lnSpc>
@@ -6587,7 +7781,7 @@
             </a:r>
           </a:p>
           <a:p>
-            <a:pPr indent="-228600" lvl="0" marL="228600" rtl="0" algn="l">
+            <a:pPr marL="228600" lvl="0" indent="-228600" algn="l" rtl="0">
               <a:lnSpc>
                 <a:spcPct val="100000"/>
               </a:lnSpc>
@@ -6610,7 +7804,7 @@
             </a:r>
           </a:p>
           <a:p>
-            <a:pPr indent="-228600" lvl="0" marL="228600" rtl="0" algn="l">
+            <a:pPr marL="228600" lvl="0" indent="-228600" algn="l" rtl="0">
               <a:lnSpc>
                 <a:spcPct val="100000"/>
               </a:lnSpc>
@@ -6643,23 +7837,24 @@
 </file>
 
 <file path=ppt/slides/slide7.xml><?xml version="1.0" encoding="utf-8"?>
-<p:sld xmlns:a="http://schemas.openxmlformats.org/drawingml/2006/main" xmlns:r="http://schemas.openxmlformats.org/officeDocument/2006/relationships" xmlns:mc="http://schemas.openxmlformats.org/markup-compatibility/2006" xmlns:mv="urn:schemas-microsoft-com:mac:vml" xmlns:p="http://schemas.openxmlformats.org/presentationml/2006/main" xmlns:c="http://schemas.openxmlformats.org/drawingml/2006/chart" xmlns:dgm="http://schemas.openxmlformats.org/drawingml/2006/diagram" xmlns:o="urn:schemas-microsoft-com:office:office" xmlns:v="urn:schemas-microsoft-com:vml" xmlns:pvml="urn:schemas-microsoft-com:office:powerpoint" xmlns:com="http://schemas.openxmlformats.org/drawingml/2006/compatibility" xmlns:p14="http://schemas.microsoft.com/office/powerpoint/2010/main" xmlns:p15="http://schemas.microsoft.com/office/powerpoint/2012/main" xmlns:ahyp="http://schemas.microsoft.com/office/drawing/2018/hyperlinkcolor">
+<p:sld xmlns:a="http://schemas.openxmlformats.org/drawingml/2006/main" xmlns:r="http://schemas.openxmlformats.org/officeDocument/2006/relationships" xmlns:p="http://schemas.openxmlformats.org/presentationml/2006/main">
   <p:cSld>
     <p:bg>
       <p:bgPr>
         <a:blipFill>
-          <a:blip r:embed="rId3">
+          <a:blip r:embed="rId2">
             <a:alphaModFix/>
           </a:blip>
           <a:stretch>
             <a:fillRect/>
           </a:stretch>
         </a:blipFill>
+        <a:effectLst/>
       </p:bgPr>
     </p:bg>
     <p:spTree>
       <p:nvGrpSpPr>
-        <p:cNvPr id="59" name="Shape 59"/>
+        <p:cNvPr id="1" name="Shape 59"/>
         <p:cNvGrpSpPr/>
         <p:nvPr/>
       </p:nvGrpSpPr>
@@ -6674,7 +7869,9 @@
       <p:sp>
         <p:nvSpPr>
           <p:cNvPr id="60" name="Google Shape;60;p14"/>
-          <p:cNvSpPr txBox="1"/>
+          <p:cNvSpPr txBox="1">
+            <a:spLocks noGrp="1"/>
+          </p:cNvSpPr>
           <p:nvPr>
             <p:ph type="title"/>
           </p:nvPr>
@@ -6689,12 +7886,12 @@
           </a:prstGeom>
         </p:spPr>
         <p:txBody>
-          <a:bodyPr anchorCtr="0" anchor="t" bIns="91425" lIns="91425" spcFirstLastPara="1" rIns="91425" wrap="square" tIns="91425">
-            <a:normAutofit fontScale="90000"/>
+          <a:bodyPr spcFirstLastPara="1" wrap="square" lIns="91425" tIns="91425" rIns="91425" bIns="91425" anchor="t" anchorCtr="0">
+            <a:normAutofit/>
           </a:bodyPr>
           <a:lstStyle/>
           <a:p>
-            <a:pPr indent="0" lvl="0" marL="0" rtl="0" algn="l">
+            <a:pPr marL="0" lvl="0" indent="0" algn="l" rtl="0">
               <a:lnSpc>
                 <a:spcPct val="100000"/>
               </a:lnSpc>
@@ -6712,7 +7909,7 @@
                   <a:srgbClr val="0F2B5B"/>
                 </a:solidFill>
               </a:rPr>
-              <a:t>RESULTADOS PARCIAIS</a:t>
+              <a:t>ANDAMENTO DA PESQUISA</a:t>
             </a:r>
           </a:p>
         </p:txBody>
@@ -6720,9 +7917,11 @@
       <p:sp>
         <p:nvSpPr>
           <p:cNvPr id="61" name="Google Shape;61;p14"/>
-          <p:cNvSpPr txBox="1"/>
+          <p:cNvSpPr txBox="1">
+            <a:spLocks noGrp="1"/>
+          </p:cNvSpPr>
           <p:nvPr>
-            <p:ph idx="1" type="body"/>
+            <p:ph type="body" idx="1"/>
           </p:nvPr>
         </p:nvSpPr>
         <p:spPr>
@@ -6735,12 +7934,12 @@
           </a:prstGeom>
         </p:spPr>
         <p:txBody>
-          <a:bodyPr anchorCtr="0" anchor="ctr" bIns="91425" lIns="91425" spcFirstLastPara="1" rIns="91425" wrap="square" tIns="91425">
+          <a:bodyPr spcFirstLastPara="1" wrap="square" lIns="91425" tIns="91425" rIns="91425" bIns="91425" anchor="ctr" anchorCtr="0">
             <a:normAutofit/>
           </a:bodyPr>
           <a:lstStyle/>
           <a:p>
-            <a:pPr indent="-228600" lvl="0" marL="228600" rtl="0" algn="l">
+            <a:pPr marL="228600" lvl="0" indent="-228600" algn="l" rtl="0">
               <a:lnSpc>
                 <a:spcPct val="100000"/>
               </a:lnSpc>
@@ -6748,22 +7947,22 @@
                 <a:spcPts val="0"/>
               </a:spcBef>
               <a:spcAft>
-                <a:spcPts val="450"/>
-              </a:spcAft>
-              <a:buSzPts val="1150"/>
+                <a:spcPts val="900"/>
+              </a:spcAft>
+              <a:buSzPts val="1400"/>
               <a:buChar char="●"/>
             </a:pPr>
             <a:r>
-              <a:rPr lang="pt-BR" sz="1150">
+              <a:rPr lang="pt-BR" sz="1400">
                 <a:solidFill>
                   <a:srgbClr val="1A1A1A"/>
                 </a:solidFill>
               </a:rPr>
-              <a:t>Terceiro semestre: terapia capilar como preparo da pele, com foco em home care — redução da hiperemia e da oleosidade.</a:t>
+              <a:t>Pesquisa em andamento: os resultados ainda não foram analisados.</a:t>
             </a:r>
           </a:p>
           <a:p>
-            <a:pPr indent="-228600" lvl="0" marL="228600" rtl="0" algn="l">
+            <a:pPr marL="228600" lvl="0" indent="-228600" algn="l" rtl="0">
               <a:lnSpc>
                 <a:spcPct val="100000"/>
               </a:lnSpc>
@@ -6771,22 +7970,22 @@
                 <a:spcPts val="0"/>
               </a:spcBef>
               <a:spcAft>
-                <a:spcPts val="450"/>
-              </a:spcAft>
-              <a:buSzPts val="1150"/>
+                <a:spcPts val="900"/>
+              </a:spcAft>
+              <a:buSzPts val="1400"/>
               <a:buChar char="●"/>
             </a:pPr>
             <a:r>
-              <a:rPr lang="pt-BR" sz="1150">
+              <a:rPr lang="pt-BR" sz="1400">
                 <a:solidFill>
                   <a:srgbClr val="1A1A1A"/>
                 </a:solidFill>
               </a:rPr>
-              <a:t>Neste ano: piora constatada e nova avaliação; higienização insuficiente e uso irregular do tônico domiciliar.</a:t>
+              <a:t>A análise depende do registro fotográfico final (depois), a ser obtido nas mesmas condições do inicial, e da reavaliação tricoscópica.</a:t>
             </a:r>
           </a:p>
           <a:p>
-            <a:pPr indent="-228600" lvl="0" marL="228600" rtl="0" algn="l">
+            <a:pPr marL="228600" lvl="0" indent="-228600" algn="l" rtl="0">
               <a:lnSpc>
                 <a:spcPct val="100000"/>
               </a:lnSpc>
@@ -6794,87 +7993,18 @@
                 <a:spcPts val="0"/>
               </a:spcBef>
               <a:spcAft>
-                <a:spcPts val="450"/>
-              </a:spcAft>
-              <a:buSzPts val="1150"/>
+                <a:spcPts val="0"/>
+              </a:spcAft>
+              <a:buSzPts val="1400"/>
               <a:buChar char="●"/>
             </a:pPr>
             <a:r>
-              <a:rPr lang="pt-BR" sz="1150">
+              <a:rPr lang="pt-BR" sz="1400">
                 <a:solidFill>
                   <a:srgbClr val="1A1A1A"/>
                 </a:solidFill>
               </a:rPr>
-              <a:t>Após a reavaliação: melhora dos hábitos domésticos (lavagem mais frequente) + apoio médico ao quadro gastrointestinal.</a:t>
-            </a:r>
-          </a:p>
-          <a:p>
-            <a:pPr indent="-228600" lvl="0" marL="228600" rtl="0" algn="l">
-              <a:lnSpc>
-                <a:spcPct val="100000"/>
-              </a:lnSpc>
-              <a:spcBef>
-                <a:spcPts val="0"/>
-              </a:spcBef>
-              <a:spcAft>
-                <a:spcPts val="450"/>
-              </a:spcAft>
-              <a:buSzPts val="1150"/>
-              <a:buChar char="●"/>
-            </a:pPr>
-            <a:r>
-              <a:rPr lang="pt-BR" sz="1150">
-                <a:solidFill>
-                  <a:srgbClr val="1A1A1A"/>
-                </a:solidFill>
-              </a:rPr>
-              <a:t>Resultado parcial: aumento da microcirculação e novos fios nas áreas rarefeitas; série de sessões estendida.</a:t>
-            </a:r>
-          </a:p>
-          <a:p>
-            <a:pPr indent="-228600" lvl="0" marL="228600" rtl="0" algn="l">
-              <a:lnSpc>
-                <a:spcPct val="100000"/>
-              </a:lnSpc>
-              <a:spcBef>
-                <a:spcPts val="0"/>
-              </a:spcBef>
-              <a:spcAft>
-                <a:spcPts val="450"/>
-              </a:spcAft>
-              <a:buSzPts val="1150"/>
-              <a:buChar char="●"/>
-            </a:pPr>
-            <a:r>
-              <a:rPr lang="pt-BR" sz="1150">
-                <a:solidFill>
-                  <a:srgbClr val="1A1A1A"/>
-                </a:solidFill>
-              </a:rPr>
-              <a:t>A adesão domiciliar foi o determinante mais evidente da resposta.</a:t>
-            </a:r>
-          </a:p>
-          <a:p>
-            <a:pPr indent="-228600" lvl="0" marL="228600" rtl="0" algn="l">
-              <a:lnSpc>
-                <a:spcPct val="100000"/>
-              </a:lnSpc>
-              <a:spcBef>
-                <a:spcPts val="0"/>
-              </a:spcBef>
-              <a:spcAft>
-                <a:spcPts val="0"/>
-              </a:spcAft>
-              <a:buSzPts val="1150"/>
-              <a:buChar char="●"/>
-            </a:pPr>
-            <a:r>
-              <a:rPr lang="pt-BR" sz="1150">
-                <a:solidFill>
-                  <a:srgbClr val="1A1A1A"/>
-                </a:solidFill>
-              </a:rPr>
-              <a:t>Protocolo combinado: não é possível isolar a contribuição de cada recurso (Kaiser et al., 2022).</a:t>
+              <a:t>Os recursos têm respaldo na literatura (Avci et al., 2014; Uzel et al., 2021); protocolo combinado, sem possibilidade de isolar a contribuição de cada recurso (Kaiser et al., 2022).</a:t>
             </a:r>
           </a:p>
         </p:txBody>
@@ -6888,23 +8018,24 @@
 </file>
 
 <file path=ppt/slides/slide8.xml><?xml version="1.0" encoding="utf-8"?>
-<p:sld xmlns:a="http://schemas.openxmlformats.org/drawingml/2006/main" xmlns:r="http://schemas.openxmlformats.org/officeDocument/2006/relationships" xmlns:mc="http://schemas.openxmlformats.org/markup-compatibility/2006" xmlns:mv="urn:schemas-microsoft-com:mac:vml" xmlns:p="http://schemas.openxmlformats.org/presentationml/2006/main" xmlns:c="http://schemas.openxmlformats.org/drawingml/2006/chart" xmlns:dgm="http://schemas.openxmlformats.org/drawingml/2006/diagram" xmlns:o="urn:schemas-microsoft-com:office:office" xmlns:v="urn:schemas-microsoft-com:vml" xmlns:pvml="urn:schemas-microsoft-com:office:powerpoint" xmlns:com="http://schemas.openxmlformats.org/drawingml/2006/compatibility" xmlns:p14="http://schemas.microsoft.com/office/powerpoint/2010/main" xmlns:p15="http://schemas.microsoft.com/office/powerpoint/2012/main" xmlns:ahyp="http://schemas.microsoft.com/office/drawing/2018/hyperlinkcolor">
+<p:sld xmlns:a="http://schemas.openxmlformats.org/drawingml/2006/main" xmlns:r="http://schemas.openxmlformats.org/officeDocument/2006/relationships" xmlns:p="http://schemas.openxmlformats.org/presentationml/2006/main">
   <p:cSld>
     <p:bg>
       <p:bgPr>
         <a:blipFill>
-          <a:blip r:embed="rId3">
+          <a:blip r:embed="rId2">
             <a:alphaModFix/>
           </a:blip>
           <a:stretch>
             <a:fillRect/>
           </a:stretch>
         </a:blipFill>
+        <a:effectLst/>
       </p:bgPr>
     </p:bg>
     <p:spTree>
       <p:nvGrpSpPr>
-        <p:cNvPr id="59" name="Shape 59"/>
+        <p:cNvPr id="1" name="Shape 59"/>
         <p:cNvGrpSpPr/>
         <p:nvPr/>
       </p:nvGrpSpPr>
@@ -6919,7 +8050,9 @@
       <p:sp>
         <p:nvSpPr>
           <p:cNvPr id="60" name="Google Shape;60;p14"/>
-          <p:cNvSpPr txBox="1"/>
+          <p:cNvSpPr txBox="1">
+            <a:spLocks noGrp="1"/>
+          </p:cNvSpPr>
           <p:nvPr>
             <p:ph type="title"/>
           </p:nvPr>
@@ -6934,234 +8067,12 @@
           </a:prstGeom>
         </p:spPr>
         <p:txBody>
-          <a:bodyPr anchorCtr="0" anchor="t" bIns="91425" lIns="91425" spcFirstLastPara="1" rIns="91425" wrap="square" tIns="91425">
-            <a:normAutofit fontScale="90000"/>
-          </a:bodyPr>
-          <a:lstStyle/>
-          <a:p>
-            <a:pPr indent="0" lvl="0" marL="0" rtl="0" algn="l">
-              <a:lnSpc>
-                <a:spcPct val="100000"/>
-              </a:lnSpc>
-              <a:spcBef>
-                <a:spcPts val="0"/>
-              </a:spcBef>
-              <a:spcAft>
-                <a:spcPts val="0"/>
-              </a:spcAft>
-              <a:buNone/>
-            </a:pPr>
-            <a:r>
-              <a:rPr lang="pt-BR" sz="1600" b="1">
-                <a:solidFill>
-                  <a:srgbClr val="0F2B5B"/>
-                </a:solidFill>
-              </a:rPr>
-              <a:t>CONSIDERAÇÕES FINAIS</a:t>
-            </a:r>
-          </a:p>
-        </p:txBody>
-      </p:sp>
-      <p:sp>
-        <p:nvSpPr>
-          <p:cNvPr id="61" name="Google Shape;61;p14"/>
-          <p:cNvSpPr txBox="1"/>
-          <p:nvPr>
-            <p:ph idx="1" type="body"/>
-          </p:nvPr>
-        </p:nvSpPr>
-        <p:spPr>
-          <a:xfrm>
-            <a:off x="420000" y="1020000"/>
-            <a:ext cx="8300000" cy="3050000"/>
-          </a:xfrm>
-          <a:prstGeom prst="rect">
-            <a:avLst/>
-          </a:prstGeom>
-        </p:spPr>
-        <p:txBody>
-          <a:bodyPr anchorCtr="0" anchor="ctr" bIns="91425" lIns="91425" spcFirstLastPara="1" rIns="91425" wrap="square" tIns="91425">
+          <a:bodyPr spcFirstLastPara="1" wrap="square" lIns="91425" tIns="91425" rIns="91425" bIns="91425" anchor="t" anchorCtr="0">
             <a:normAutofit/>
           </a:bodyPr>
           <a:lstStyle/>
           <a:p>
-            <a:pPr indent="-228600" lvl="0" marL="228600" rtl="0" algn="l">
-              <a:lnSpc>
-                <a:spcPct val="100000"/>
-              </a:lnSpc>
-              <a:spcBef>
-                <a:spcPts val="0"/>
-              </a:spcBef>
-              <a:spcAft>
-                <a:spcPts val="700"/>
-              </a:spcAft>
-              <a:buSzPts val="1150"/>
-              <a:buChar char="●"/>
-            </a:pPr>
-            <a:r>
-              <a:rPr lang="pt-BR" sz="1150">
-                <a:solidFill>
-                  <a:srgbClr val="1A1A1A"/>
-                </a:solidFill>
-              </a:rPr>
-              <a:t>Protocolo em duas fases foi bem tolerado e acompanhou-se de melhora do couro cabeludo e de novos fios nas áreas rarefeitas.</a:t>
-            </a:r>
-          </a:p>
-          <a:p>
-            <a:pPr indent="-228600" lvl="0" marL="228600" rtl="0" algn="l">
-              <a:lnSpc>
-                <a:spcPct val="100000"/>
-              </a:lnSpc>
-              <a:spcBef>
-                <a:spcPts val="0"/>
-              </a:spcBef>
-              <a:spcAft>
-                <a:spcPts val="700"/>
-              </a:spcAft>
-              <a:buSzPts val="1150"/>
-              <a:buChar char="●"/>
-            </a:pPr>
-            <a:r>
-              <a:rPr lang="pt-BR" sz="1150">
-                <a:solidFill>
-                  <a:srgbClr val="1A1A1A"/>
-                </a:solidFill>
-              </a:rPr>
-              <a:t>Educação e acompanhamento da paciente são componentes do protocolo, não recomendações acessórias.</a:t>
-            </a:r>
-          </a:p>
-          <a:p>
-            <a:pPr indent="-228600" lvl="0" marL="228600" rtl="0" algn="l">
-              <a:lnSpc>
-                <a:spcPct val="100000"/>
-              </a:lnSpc>
-              <a:spcBef>
-                <a:spcPts val="0"/>
-              </a:spcBef>
-              <a:spcAft>
-                <a:spcPts val="700"/>
-              </a:spcAft>
-              <a:buSzPts val="1150"/>
-              <a:buChar char="●"/>
-            </a:pPr>
-            <a:r>
-              <a:rPr lang="pt-BR" sz="1150">
-                <a:solidFill>
-                  <a:srgbClr val="1A1A1A"/>
-                </a:solidFill>
-              </a:rPr>
-              <a:t>Histórico de H. pylori e gastrite crônica: fatores sistêmicos ASSOCIADOS, com plausibilidade mecanística — não causa da AAF.</a:t>
-            </a:r>
-          </a:p>
-          <a:p>
-            <a:pPr indent="-228600" lvl="0" marL="228600" rtl="0" algn="l">
-              <a:lnSpc>
-                <a:spcPct val="100000"/>
-              </a:lnSpc>
-              <a:spcBef>
-                <a:spcPts val="0"/>
-              </a:spcBef>
-              <a:spcAft>
-                <a:spcPts val="700"/>
-              </a:spcAft>
-              <a:buSzPts val="1150"/>
-              <a:buChar char="●"/>
-            </a:pPr>
-            <a:r>
-              <a:rPr lang="pt-BR" sz="1150">
-                <a:solidFill>
-                  <a:srgbClr val="1A1A1A"/>
-                </a:solidFill>
-              </a:rPr>
-              <a:t>Limitações: caso único, sem grupo controle, recursos combinados e avaliação predominantemente qualitativa.</a:t>
-            </a:r>
-          </a:p>
-          <a:p>
-            <a:pPr indent="-228600" lvl="0" marL="228600" rtl="0" algn="l">
-              <a:lnSpc>
-                <a:spcPct val="100000"/>
-              </a:lnSpc>
-              <a:spcBef>
-                <a:spcPts val="0"/>
-              </a:spcBef>
-              <a:spcAft>
-                <a:spcPts val="0"/>
-              </a:spcAft>
-              <a:buSzPts val="1150"/>
-              <a:buChar char="●"/>
-            </a:pPr>
-            <a:r>
-              <a:rPr lang="pt-BR" sz="1150">
-                <a:solidFill>
-                  <a:srgbClr val="1A1A1A"/>
-                </a:solidFill>
-              </a:rPr>
-              <a:t>Estudos futuros: amostras maiores e dosagem seriada de ferritina, vitamina B12 e zinco.</a:t>
-            </a:r>
-          </a:p>
-        </p:txBody>
-      </p:sp>
-    </p:spTree>
-  </p:cSld>
-  <p:clrMapOvr>
-    <a:masterClrMapping/>
-  </p:clrMapOvr>
-</p:sld>
-</file>
-
-<file path=ppt/slides/slide9.xml><?xml version="1.0" encoding="utf-8"?>
-<p:sld xmlns:a="http://schemas.openxmlformats.org/drawingml/2006/main" xmlns:r="http://schemas.openxmlformats.org/officeDocument/2006/relationships" xmlns:mc="http://schemas.openxmlformats.org/markup-compatibility/2006" xmlns:mv="urn:schemas-microsoft-com:mac:vml" xmlns:p="http://schemas.openxmlformats.org/presentationml/2006/main" xmlns:c="http://schemas.openxmlformats.org/drawingml/2006/chart" xmlns:dgm="http://schemas.openxmlformats.org/drawingml/2006/diagram" xmlns:o="urn:schemas-microsoft-com:office:office" xmlns:v="urn:schemas-microsoft-com:vml" xmlns:pvml="urn:schemas-microsoft-com:office:powerpoint" xmlns:com="http://schemas.openxmlformats.org/drawingml/2006/compatibility" xmlns:p14="http://schemas.microsoft.com/office/powerpoint/2010/main" xmlns:p15="http://schemas.microsoft.com/office/powerpoint/2012/main" xmlns:ahyp="http://schemas.microsoft.com/office/drawing/2018/hyperlinkcolor">
-  <p:cSld>
-    <p:bg>
-      <p:bgPr>
-        <a:blipFill>
-          <a:blip r:embed="rId3">
-            <a:alphaModFix/>
-          </a:blip>
-          <a:stretch>
-            <a:fillRect/>
-          </a:stretch>
-        </a:blipFill>
-      </p:bgPr>
-    </p:bg>
-    <p:spTree>
-      <p:nvGrpSpPr>
-        <p:cNvPr id="59" name="Shape 59"/>
-        <p:cNvGrpSpPr/>
-        <p:nvPr/>
-      </p:nvGrpSpPr>
-      <p:grpSpPr>
-        <a:xfrm>
-          <a:off x="0" y="0"/>
-          <a:ext cx="0" cy="0"/>
-          <a:chOff x="0" y="0"/>
-          <a:chExt cx="0" cy="0"/>
-        </a:xfrm>
-      </p:grpSpPr>
-      <p:sp>
-        <p:nvSpPr>
-          <p:cNvPr id="60" name="Google Shape;60;p14"/>
-          <p:cNvSpPr txBox="1"/>
-          <p:nvPr>
-            <p:ph type="title"/>
-          </p:nvPr>
-        </p:nvSpPr>
-        <p:spPr>
-          <a:xfrm>
-            <a:off x="420000" y="330000"/>
-            <a:ext cx="8300000" cy="620000"/>
-          </a:xfrm>
-          <a:prstGeom prst="rect">
-            <a:avLst/>
-          </a:prstGeom>
-        </p:spPr>
-        <p:txBody>
-          <a:bodyPr anchorCtr="0" anchor="t" bIns="91425" lIns="91425" spcFirstLastPara="1" rIns="91425" wrap="square" tIns="91425">
-            <a:normAutofit fontScale="90000"/>
-          </a:bodyPr>
-          <a:lstStyle/>
-          <a:p>
-            <a:pPr indent="0" lvl="0" marL="0" rtl="0" algn="l">
+            <a:pPr marL="0" lvl="0" indent="0" algn="l" rtl="0">
               <a:lnSpc>
                 <a:spcPct val="100000"/>
               </a:lnSpc>
@@ -7187,9 +8098,11 @@
       <p:sp>
         <p:nvSpPr>
           <p:cNvPr id="61" name="Google Shape;61;p14"/>
-          <p:cNvSpPr txBox="1"/>
+          <p:cNvSpPr txBox="1">
+            <a:spLocks noGrp="1"/>
+          </p:cNvSpPr>
           <p:nvPr>
-            <p:ph idx="1" type="body"/>
+            <p:ph type="body" idx="1"/>
           </p:nvPr>
         </p:nvSpPr>
         <p:spPr>
@@ -7202,12 +8115,12 @@
           </a:prstGeom>
         </p:spPr>
         <p:txBody>
-          <a:bodyPr anchorCtr="0" anchor="ctr" bIns="91425" lIns="91425" spcFirstLastPara="1" rIns="91425" wrap="square" tIns="91425">
+          <a:bodyPr spcFirstLastPara="1" wrap="square" lIns="91425" tIns="91425" rIns="91425" bIns="91425" anchor="ctr" anchorCtr="0">
             <a:normAutofit/>
           </a:bodyPr>
           <a:lstStyle/>
           <a:p>
-            <a:pPr indent="-228600" lvl="0" marL="228600" rtl="0" algn="l">
+            <a:pPr marL="228600" lvl="0" indent="-228600" algn="l" rtl="0">
               <a:lnSpc>
                 <a:spcPct val="100000"/>
               </a:lnSpc>
@@ -7230,7 +8143,7 @@
             </a:r>
           </a:p>
           <a:p>
-            <a:pPr indent="-228600" lvl="0" marL="228600" rtl="0" algn="l">
+            <a:pPr marL="228600" lvl="0" indent="-228600" algn="l" rtl="0">
               <a:lnSpc>
                 <a:spcPct val="100000"/>
               </a:lnSpc>
@@ -7253,7 +8166,7 @@
             </a:r>
           </a:p>
           <a:p>
-            <a:pPr indent="-228600" lvl="0" marL="228600" rtl="0" algn="l">
+            <a:pPr marL="228600" lvl="0" indent="-228600" algn="l" rtl="0">
               <a:lnSpc>
                 <a:spcPct val="100000"/>
               </a:lnSpc>
@@ -7276,7 +8189,7 @@
             </a:r>
           </a:p>
           <a:p>
-            <a:pPr indent="-228600" lvl="0" marL="228600" rtl="0" algn="l">
+            <a:pPr marL="228600" lvl="0" indent="-228600" algn="l" rtl="0">
               <a:lnSpc>
                 <a:spcPct val="100000"/>
               </a:lnSpc>
@@ -7299,7 +8212,7 @@
             </a:r>
           </a:p>
           <a:p>
-            <a:pPr indent="-228600" lvl="0" marL="228600" rtl="0" algn="l">
+            <a:pPr marL="228600" lvl="0" indent="-228600" algn="l" rtl="0">
               <a:lnSpc>
                 <a:spcPct val="100000"/>
               </a:lnSpc>
@@ -7322,7 +8235,7 @@
             </a:r>
           </a:p>
           <a:p>
-            <a:pPr indent="-228600" lvl="0" marL="228600" rtl="0" algn="l">
+            <a:pPr marL="228600" lvl="0" indent="-228600" algn="l" rtl="0">
               <a:lnSpc>
                 <a:spcPct val="100000"/>
               </a:lnSpc>
@@ -7345,7 +8258,7 @@
             </a:r>
           </a:p>
           <a:p>
-            <a:pPr indent="-228600" lvl="0" marL="228600" rtl="0" algn="l">
+            <a:pPr marL="228600" lvl="0" indent="-228600" algn="l" rtl="0">
               <a:lnSpc>
                 <a:spcPct val="100000"/>
               </a:lnSpc>
@@ -7377,8 +8290,189 @@
 </p:sld>
 </file>
 
+<file path=ppt/slides/slide9.xml><?xml version="1.0" encoding="utf-8"?>
+<p:sld xmlns:a="http://schemas.openxmlformats.org/drawingml/2006/main" xmlns:r="http://schemas.openxmlformats.org/officeDocument/2006/relationships" xmlns:p="http://schemas.openxmlformats.org/presentationml/2006/main">
+  <p:cSld>
+    <p:bg>
+      <p:bgPr>
+        <a:blipFill>
+          <a:blip r:embed="rId2">
+            <a:alphaModFix/>
+          </a:blip>
+          <a:stretch>
+            <a:fillRect/>
+          </a:stretch>
+        </a:blipFill>
+        <a:effectLst/>
+      </p:bgPr>
+    </p:bg>
+    <p:spTree>
+      <p:nvGrpSpPr>
+        <p:cNvPr id="1" name="Shape 59"/>
+        <p:cNvGrpSpPr/>
+        <p:nvPr/>
+      </p:nvGrpSpPr>
+      <p:grpSpPr>
+        <a:xfrm>
+          <a:off x="0" y="0"/>
+          <a:ext cx="0" cy="0"/>
+          <a:chOff x="0" y="0"/>
+          <a:chExt cx="0" cy="0"/>
+        </a:xfrm>
+      </p:grpSpPr>
+      <p:sp>
+        <p:nvSpPr>
+          <p:cNvPr id="60" name="Google Shape;60;p14"/>
+          <p:cNvSpPr txBox="1">
+            <a:spLocks noGrp="1"/>
+          </p:cNvSpPr>
+          <p:nvPr>
+            <p:ph type="title"/>
+          </p:nvPr>
+        </p:nvSpPr>
+        <p:spPr>
+          <a:xfrm>
+            <a:off x="420000" y="330000"/>
+            <a:ext cx="8300000" cy="620000"/>
+          </a:xfrm>
+          <a:prstGeom prst="rect">
+            <a:avLst/>
+          </a:prstGeom>
+        </p:spPr>
+        <p:txBody>
+          <a:bodyPr spcFirstLastPara="1" wrap="square" lIns="91425" tIns="91425" rIns="91425" bIns="91425" anchor="t" anchorCtr="0">
+            <a:normAutofit/>
+          </a:bodyPr>
+          <a:lstStyle/>
+          <a:p>
+            <a:pPr marL="0" lvl="0" indent="0" algn="l" rtl="0">
+              <a:lnSpc>
+                <a:spcPct val="100000"/>
+              </a:lnSpc>
+              <a:spcBef>
+                <a:spcPts val="0"/>
+              </a:spcBef>
+              <a:spcAft>
+                <a:spcPts val="0"/>
+              </a:spcAft>
+              <a:buNone/>
+            </a:pPr>
+            <a:r>
+              <a:rPr lang="pt-BR" sz="1600" b="1">
+                <a:solidFill>
+                  <a:srgbClr val="0F2B5B"/>
+                </a:solidFill>
+              </a:rPr>
+              <a:t>DECLARAÇÃO DE USO DE IAG</a:t>
+            </a:r>
+          </a:p>
+        </p:txBody>
+      </p:sp>
+      <p:sp>
+        <p:nvSpPr>
+          <p:cNvPr id="61" name="Google Shape;61;p14"/>
+          <p:cNvSpPr txBox="1">
+            <a:spLocks noGrp="1"/>
+          </p:cNvSpPr>
+          <p:nvPr>
+            <p:ph type="body" idx="1"/>
+          </p:nvPr>
+        </p:nvSpPr>
+        <p:spPr>
+          <a:xfrm>
+            <a:off x="420000" y="1020000"/>
+            <a:ext cx="8300000" cy="3050000"/>
+          </a:xfrm>
+          <a:prstGeom prst="rect">
+            <a:avLst/>
+          </a:prstGeom>
+        </p:spPr>
+        <p:txBody>
+          <a:bodyPr spcFirstLastPara="1" wrap="square" lIns="91425" tIns="91425" rIns="91425" bIns="91425" anchor="ctr" anchorCtr="0">
+            <a:normAutofit/>
+          </a:bodyPr>
+          <a:lstStyle/>
+          <a:p>
+            <a:pPr marL="228600" lvl="0" indent="-228600" algn="l" rtl="0">
+              <a:lnSpc>
+                <a:spcPct val="100000"/>
+              </a:lnSpc>
+              <a:spcBef>
+                <a:spcPts val="0"/>
+              </a:spcBef>
+              <a:spcAft>
+                <a:spcPts val="900"/>
+              </a:spcAft>
+              <a:buSzPts val="1400"/>
+              <a:buChar char="●"/>
+            </a:pPr>
+            <a:r>
+              <a:rPr lang="pt-BR" sz="1400">
+                <a:solidFill>
+                  <a:srgbClr val="1A1A1A"/>
+                </a:solidFill>
+              </a:rPr>
+              <a:t>Os autores declaram o uso da ferramenta Claude (Anthropic) para organização de ideias, revisão linguística e adequação do texto às normas do evento.</a:t>
+            </a:r>
+          </a:p>
+          <a:p>
+            <a:pPr marL="228600" lvl="0" indent="-228600" algn="l" rtl="0">
+              <a:lnSpc>
+                <a:spcPct val="100000"/>
+              </a:lnSpc>
+              <a:spcBef>
+                <a:spcPts val="0"/>
+              </a:spcBef>
+              <a:spcAft>
+                <a:spcPts val="900"/>
+              </a:spcAft>
+              <a:buSzPts val="1400"/>
+              <a:buChar char="●"/>
+            </a:pPr>
+            <a:r>
+              <a:rPr lang="pt-BR" sz="1400">
+                <a:solidFill>
+                  <a:srgbClr val="1A1A1A"/>
+                </a:solidFill>
+              </a:rPr>
+              <a:t>O conteúdo gerado foi revisado e validado pelos autores, que assumem integral responsabilidade pelo texto submetido.</a:t>
+            </a:r>
+          </a:p>
+          <a:p>
+            <a:pPr marL="228600" lvl="0" indent="-228600" algn="l" rtl="0">
+              <a:lnSpc>
+                <a:spcPct val="100000"/>
+              </a:lnSpc>
+              <a:spcBef>
+                <a:spcPts val="0"/>
+              </a:spcBef>
+              <a:spcAft>
+                <a:spcPts val="0"/>
+              </a:spcAft>
+              <a:buSzPts val="1400"/>
+              <a:buChar char="●"/>
+            </a:pPr>
+            <a:r>
+              <a:rPr lang="pt-BR" sz="1400">
+                <a:solidFill>
+                  <a:srgbClr val="1A1A1A"/>
+                </a:solidFill>
+              </a:rPr>
+              <a:t>Contato: paolabortolilionn@gmail.com</a:t>
+            </a:r>
+          </a:p>
+        </p:txBody>
+      </p:sp>
+    </p:spTree>
+  </p:cSld>
+  <p:clrMapOvr>
+    <a:masterClrMapping/>
+  </p:clrMapOvr>
+</p:sld>
+</file>
+
 <file path=ppt/theme/theme1.xml><?xml version="1.0" encoding="utf-8"?>
-<a:theme xmlns:a="http://schemas.openxmlformats.org/drawingml/2006/main" xmlns:r="http://schemas.openxmlformats.org/officeDocument/2006/relationships" name="Simple Light">
+<a:theme xmlns:a="http://schemas.openxmlformats.org/drawingml/2006/main" name="Simple Light">
   <a:themeElements>
     <a:clrScheme name="Simple Light">
       <a:dk1>
@@ -7653,11 +8747,13 @@
       </a:bgFillStyleLst>
     </a:fmtScheme>
   </a:themeElements>
+  <a:objectDefaults/>
+  <a:extraClrSchemeLst/>
 </a:theme>
 </file>
 
 <file path=ppt/theme/theme2.xml><?xml version="1.0" encoding="utf-8"?>
-<a:theme xmlns:a="http://schemas.openxmlformats.org/drawingml/2006/main" xmlns:r="http://schemas.openxmlformats.org/officeDocument/2006/relationships">
+<a:theme xmlns:a="http://schemas.openxmlformats.org/drawingml/2006/main">
   <a:themeElements>
     <a:clrScheme name="Default">
       <a:dk1>
@@ -7932,5 +9028,7 @@
       </a:bgFillStyleLst>
     </a:fmtScheme>
   </a:themeElements>
+  <a:objectDefaults/>
+  <a:extraClrSchemeLst/>
 </a:theme>
 </file>